--- a/reports/Bluestock_MF_Presentation.pptx
+++ b/reports/Bluestock_MF_Presentation.pptx
@@ -2,23 +2,26 @@
 <file path=ppt/presentation.xml><?xml version="1.0" encoding="utf-8"?>
 <p:presentation xmlns:a="http://schemas.openxmlformats.org/drawingml/2006/main" xmlns:r="http://schemas.openxmlformats.org/officeDocument/2006/relationships" xmlns:p="http://schemas.openxmlformats.org/presentationml/2006/main" saveSubsetFonts="1" autoCompressPictures="0">
   <p:sldMasterIdLst>
-    <p:sldMasterId id="2147483648" r:id="rId1"/>
+    <p:sldMasterId id="2147483732" r:id="rId1"/>
   </p:sldMasterIdLst>
+  <p:notesMasterIdLst>
+    <p:notesMasterId r:id="rId14"/>
+  </p:notesMasterIdLst>
   <p:sldIdLst>
-    <p:sldId id="256" r:id="rId7"/>
-    <p:sldId id="257" r:id="rId8"/>
-    <p:sldId id="258" r:id="rId9"/>
-    <p:sldId id="259" r:id="rId10"/>
-    <p:sldId id="260" r:id="rId11"/>
-    <p:sldId id="261" r:id="rId12"/>
-    <p:sldId id="262" r:id="rId13"/>
-    <p:sldId id="263" r:id="rId14"/>
-    <p:sldId id="264" r:id="rId15"/>
-    <p:sldId id="265" r:id="rId16"/>
-    <p:sldId id="266" r:id="rId17"/>
-    <p:sldId id="267" r:id="rId18"/>
+    <p:sldId id="256" r:id="rId2"/>
+    <p:sldId id="257" r:id="rId3"/>
+    <p:sldId id="258" r:id="rId4"/>
+    <p:sldId id="259" r:id="rId5"/>
+    <p:sldId id="260" r:id="rId6"/>
+    <p:sldId id="261" r:id="rId7"/>
+    <p:sldId id="262" r:id="rId8"/>
+    <p:sldId id="263" r:id="rId9"/>
+    <p:sldId id="264" r:id="rId10"/>
+    <p:sldId id="265" r:id="rId11"/>
+    <p:sldId id="266" r:id="rId12"/>
+    <p:sldId id="267" r:id="rId13"/>
   </p:sldIdLst>
-  <p:sldSz cx="12188952" cy="6858000" type="screen4x3"/>
+  <p:sldSz cx="12188825" cy="6858000"/>
   <p:notesSz cx="6858000" cy="9144000"/>
   <p:defaultTextStyle>
     <a:defPPr>
@@ -115,7 +118,929 @@
       </a:defRPr>
     </a:lvl9pPr>
   </p:defaultTextStyle>
+  <p:extLst>
+    <p:ext uri="{EFAFB233-063F-42B5-8137-9DF3F51BA10A}">
+      <p15:sldGuideLst xmlns:p15="http://schemas.microsoft.com/office/powerpoint/2012/main">
+        <p15:guide id="1" orient="horz" pos="2160">
+          <p15:clr>
+            <a:srgbClr val="A4A3A4"/>
+          </p15:clr>
+        </p15:guide>
+        <p15:guide id="2" pos="2880">
+          <p15:clr>
+            <a:srgbClr val="A4A3A4"/>
+          </p15:clr>
+        </p15:guide>
+      </p15:sldGuideLst>
+    </p:ext>
+  </p:extLst>
 </p:presentation>
+</file>
+
+<file path=ppt/revisionInfo.xml><?xml version="1.0" encoding="utf-8"?>
+<p1510:revInfo xmlns:a="http://schemas.openxmlformats.org/drawingml/2006/main" xmlns:r="http://schemas.openxmlformats.org/officeDocument/2006/relationships" xmlns:p1510="http://schemas.microsoft.com/office/powerpoint/2015/10/main">
+  <p1510:revLst>
+    <p1510:client id="{637912C2-A8B3-4C64-A4D9-A7AAB02B9A48}" v="141" dt="2026-06-10T04:51:35.417"/>
+  </p1510:revLst>
+</p1510:revInfo>
+</file>
+
+<file path=ppt/changesInfos/changesInfo1.xml><?xml version="1.0" encoding="utf-8"?>
+<pc:chgInfo xmlns:a="http://schemas.openxmlformats.org/drawingml/2006/main" xmlns:r="http://schemas.openxmlformats.org/officeDocument/2006/relationships" xmlns:ac="http://schemas.microsoft.com/office/drawing/2013/main/command" xmlns:pc="http://schemas.microsoft.com/office/powerpoint/2013/main/command">
+  <pc:docChgLst>
+    <pc:chgData name="Gopi U" userId="4820542927acb1bf" providerId="LiveId" clId="{172478D8-5494-471C-B60C-DD487D7977DB}"/>
+    <pc:docChg chg="undo custSel modSld modMainMaster">
+      <pc:chgData name="Gopi U" userId="4820542927acb1bf" providerId="LiveId" clId="{172478D8-5494-471C-B60C-DD487D7977DB}" dt="2026-06-10T04:56:31.713" v="645" actId="1076"/>
+      <pc:docMkLst>
+        <pc:docMk/>
+      </pc:docMkLst>
+      <pc:sldChg chg="addSp delSp modSp mod setBg">
+        <pc:chgData name="Gopi U" userId="4820542927acb1bf" providerId="LiveId" clId="{172478D8-5494-471C-B60C-DD487D7977DB}" dt="2026-06-10T04:56:31.713" v="645" actId="1076"/>
+        <pc:sldMkLst>
+          <pc:docMk/>
+          <pc:sldMk cId="0" sldId="256"/>
+        </pc:sldMkLst>
+        <pc:spChg chg="mod">
+          <ac:chgData name="Gopi U" userId="4820542927acb1bf" providerId="LiveId" clId="{172478D8-5494-471C-B60C-DD487D7977DB}" dt="2026-06-10T04:32:20.641" v="291" actId="122"/>
+          <ac:spMkLst>
+            <pc:docMk/>
+            <pc:sldMk cId="0" sldId="256"/>
+            <ac:spMk id="2" creationId="{00000000-0000-0000-0000-000000000000}"/>
+          </ac:spMkLst>
+        </pc:spChg>
+        <pc:spChg chg="mod">
+          <ac:chgData name="Gopi U" userId="4820542927acb1bf" providerId="LiveId" clId="{172478D8-5494-471C-B60C-DD487D7977DB}" dt="2026-06-10T04:32:36.640" v="294" actId="14100"/>
+          <ac:spMkLst>
+            <pc:docMk/>
+            <pc:sldMk cId="0" sldId="256"/>
+            <ac:spMk id="3" creationId="{00000000-0000-0000-0000-000000000000}"/>
+          </ac:spMkLst>
+        </pc:spChg>
+        <pc:spChg chg="mod">
+          <ac:chgData name="Gopi U" userId="4820542927acb1bf" providerId="LiveId" clId="{172478D8-5494-471C-B60C-DD487D7977DB}" dt="2026-06-10T04:33:17.137" v="295" actId="14100"/>
+          <ac:spMkLst>
+            <pc:docMk/>
+            <pc:sldMk cId="0" sldId="256"/>
+            <ac:spMk id="4" creationId="{00000000-0000-0000-0000-000000000000}"/>
+          </ac:spMkLst>
+        </pc:spChg>
+        <pc:spChg chg="mod">
+          <ac:chgData name="Gopi U" userId="4820542927acb1bf" providerId="LiveId" clId="{172478D8-5494-471C-B60C-DD487D7977DB}" dt="2026-06-10T04:23:07.722" v="208" actId="207"/>
+          <ac:spMkLst>
+            <pc:docMk/>
+            <pc:sldMk cId="0" sldId="256"/>
+            <ac:spMk id="9" creationId="{A5EB4141-B813-6F05-BAB5-AC00937A4591}"/>
+          </ac:spMkLst>
+        </pc:spChg>
+        <pc:spChg chg="add del mod">
+          <ac:chgData name="Gopi U" userId="4820542927acb1bf" providerId="LiveId" clId="{172478D8-5494-471C-B60C-DD487D7977DB}" dt="2026-06-10T04:27:53.414" v="213" actId="21"/>
+          <ac:spMkLst>
+            <pc:docMk/>
+            <pc:sldMk cId="0" sldId="256"/>
+            <ac:spMk id="10" creationId="{D12F36BB-F3FE-0DBE-7804-C25D1F132D30}"/>
+          </ac:spMkLst>
+        </pc:spChg>
+        <pc:spChg chg="add del mod">
+          <ac:chgData name="Gopi U" userId="4820542927acb1bf" providerId="LiveId" clId="{172478D8-5494-471C-B60C-DD487D7977DB}" dt="2026-06-10T04:54:25.940" v="626" actId="21"/>
+          <ac:spMkLst>
+            <pc:docMk/>
+            <pc:sldMk cId="0" sldId="256"/>
+            <ac:spMk id="12" creationId="{CCDA4B43-2A5C-6B69-D73A-28F7336F2BA0}"/>
+          </ac:spMkLst>
+        </pc:spChg>
+        <pc:picChg chg="add del mod">
+          <ac:chgData name="Gopi U" userId="4820542927acb1bf" providerId="LiveId" clId="{172478D8-5494-471C-B60C-DD487D7977DB}" dt="2026-06-10T04:54:14.447" v="625" actId="21"/>
+          <ac:picMkLst>
+            <pc:docMk/>
+            <pc:sldMk cId="0" sldId="256"/>
+            <ac:picMk id="6" creationId="{AB076379-E813-34B3-3F13-EF5F5DE44114}"/>
+          </ac:picMkLst>
+        </pc:picChg>
+        <pc:picChg chg="add mod">
+          <ac:chgData name="Gopi U" userId="4820542927acb1bf" providerId="LiveId" clId="{172478D8-5494-471C-B60C-DD487D7977DB}" dt="2026-06-10T04:56:31.713" v="645" actId="1076"/>
+          <ac:picMkLst>
+            <pc:docMk/>
+            <pc:sldMk cId="0" sldId="256"/>
+            <ac:picMk id="14" creationId="{4C2CB761-2C09-9768-EED9-B7F7BE4C4A38}"/>
+          </ac:picMkLst>
+        </pc:picChg>
+      </pc:sldChg>
+      <pc:sldChg chg="addSp modSp mod setBg">
+        <pc:chgData name="Gopi U" userId="4820542927acb1bf" providerId="LiveId" clId="{172478D8-5494-471C-B60C-DD487D7977DB}" dt="2026-06-10T04:47:49.449" v="596"/>
+        <pc:sldMkLst>
+          <pc:docMk/>
+          <pc:sldMk cId="0" sldId="257"/>
+        </pc:sldMkLst>
+        <pc:spChg chg="mod">
+          <ac:chgData name="Gopi U" userId="4820542927acb1bf" providerId="LiveId" clId="{172478D8-5494-471C-B60C-DD487D7977DB}" dt="2026-06-10T03:54:26.767" v="5" actId="27636"/>
+          <ac:spMkLst>
+            <pc:docMk/>
+            <pc:sldMk cId="0" sldId="257"/>
+            <ac:spMk id="2" creationId="{00000000-0000-0000-0000-000000000000}"/>
+          </ac:spMkLst>
+        </pc:spChg>
+        <pc:spChg chg="mod">
+          <ac:chgData name="Gopi U" userId="4820542927acb1bf" providerId="LiveId" clId="{172478D8-5494-471C-B60C-DD487D7977DB}" dt="2026-06-10T04:14:56.065" v="180" actId="27636"/>
+          <ac:spMkLst>
+            <pc:docMk/>
+            <pc:sldMk cId="0" sldId="257"/>
+            <ac:spMk id="3" creationId="{00000000-0000-0000-0000-000000000000}"/>
+          </ac:spMkLst>
+        </pc:spChg>
+        <pc:spChg chg="mod">
+          <ac:chgData name="Gopi U" userId="4820542927acb1bf" providerId="LiveId" clId="{172478D8-5494-471C-B60C-DD487D7977DB}" dt="2026-06-10T04:34:50.786" v="304" actId="20577"/>
+          <ac:spMkLst>
+            <pc:docMk/>
+            <pc:sldMk cId="0" sldId="257"/>
+            <ac:spMk id="6" creationId="{3D4869E1-10FA-728B-2341-D90188F44235}"/>
+          </ac:spMkLst>
+        </pc:spChg>
+        <pc:spChg chg="add mod">
+          <ac:chgData name="Gopi U" userId="4820542927acb1bf" providerId="LiveId" clId="{172478D8-5494-471C-B60C-DD487D7977DB}" dt="2026-06-10T04:47:49.449" v="596"/>
+          <ac:spMkLst>
+            <pc:docMk/>
+            <pc:sldMk cId="0" sldId="257"/>
+            <ac:spMk id="7" creationId="{D687D9DF-CF9D-7453-12C7-624237032AE4}"/>
+          </ac:spMkLst>
+        </pc:spChg>
+      </pc:sldChg>
+      <pc:sldChg chg="addSp modSp mod setBg">
+        <pc:chgData name="Gopi U" userId="4820542927acb1bf" providerId="LiveId" clId="{172478D8-5494-471C-B60C-DD487D7977DB}" dt="2026-06-10T04:48:11.259" v="598" actId="1076"/>
+        <pc:sldMkLst>
+          <pc:docMk/>
+          <pc:sldMk cId="0" sldId="258"/>
+        </pc:sldMkLst>
+        <pc:spChg chg="mod">
+          <ac:chgData name="Gopi U" userId="4820542927acb1bf" providerId="LiveId" clId="{172478D8-5494-471C-B60C-DD487D7977DB}" dt="2026-06-10T03:55:29.775" v="8" actId="14100"/>
+          <ac:spMkLst>
+            <pc:docMk/>
+            <pc:sldMk cId="0" sldId="258"/>
+            <ac:spMk id="2" creationId="{00000000-0000-0000-0000-000000000000}"/>
+          </ac:spMkLst>
+        </pc:spChg>
+        <pc:spChg chg="mod">
+          <ac:chgData name="Gopi U" userId="4820542927acb1bf" providerId="LiveId" clId="{172478D8-5494-471C-B60C-DD487D7977DB}" dt="2026-06-10T04:15:34.741" v="194"/>
+          <ac:spMkLst>
+            <pc:docMk/>
+            <pc:sldMk cId="0" sldId="258"/>
+            <ac:spMk id="3" creationId="{00000000-0000-0000-0000-000000000000}"/>
+          </ac:spMkLst>
+        </pc:spChg>
+        <pc:picChg chg="add mod">
+          <ac:chgData name="Gopi U" userId="4820542927acb1bf" providerId="LiveId" clId="{172478D8-5494-471C-B60C-DD487D7977DB}" dt="2026-06-10T04:48:11.259" v="598" actId="1076"/>
+          <ac:picMkLst>
+            <pc:docMk/>
+            <pc:sldMk cId="0" sldId="258"/>
+            <ac:picMk id="6" creationId="{0887B34C-F1A2-D93B-830C-DB70EE3AEB56}"/>
+          </ac:picMkLst>
+        </pc:picChg>
+      </pc:sldChg>
+      <pc:sldChg chg="addSp modSp mod">
+        <pc:chgData name="Gopi U" userId="4820542927acb1bf" providerId="LiveId" clId="{172478D8-5494-471C-B60C-DD487D7977DB}" dt="2026-06-10T04:48:22.704" v="599"/>
+        <pc:sldMkLst>
+          <pc:docMk/>
+          <pc:sldMk cId="0" sldId="259"/>
+        </pc:sldMkLst>
+        <pc:spChg chg="mod">
+          <ac:chgData name="Gopi U" userId="4820542927acb1bf" providerId="LiveId" clId="{172478D8-5494-471C-B60C-DD487D7977DB}" dt="2026-06-10T04:15:34.741" v="194"/>
+          <ac:spMkLst>
+            <pc:docMk/>
+            <pc:sldMk cId="0" sldId="259"/>
+            <ac:spMk id="2" creationId="{00000000-0000-0000-0000-000000000000}"/>
+          </ac:spMkLst>
+        </pc:spChg>
+        <pc:spChg chg="mod">
+          <ac:chgData name="Gopi U" userId="4820542927acb1bf" providerId="LiveId" clId="{172478D8-5494-471C-B60C-DD487D7977DB}" dt="2026-06-10T04:15:34.741" v="194"/>
+          <ac:spMkLst>
+            <pc:docMk/>
+            <pc:sldMk cId="0" sldId="259"/>
+            <ac:spMk id="3" creationId="{00000000-0000-0000-0000-000000000000}"/>
+          </ac:spMkLst>
+        </pc:spChg>
+        <pc:spChg chg="add mod">
+          <ac:chgData name="Gopi U" userId="4820542927acb1bf" providerId="LiveId" clId="{172478D8-5494-471C-B60C-DD487D7977DB}" dt="2026-06-10T04:48:22.704" v="599"/>
+          <ac:spMkLst>
+            <pc:docMk/>
+            <pc:sldMk cId="0" sldId="259"/>
+            <ac:spMk id="5" creationId="{0DFCA42C-65CD-7D5A-1A57-F094EB263203}"/>
+          </ac:spMkLst>
+        </pc:spChg>
+      </pc:sldChg>
+      <pc:sldChg chg="addSp modSp mod">
+        <pc:chgData name="Gopi U" userId="4820542927acb1bf" providerId="LiveId" clId="{172478D8-5494-471C-B60C-DD487D7977DB}" dt="2026-06-10T04:48:28.008" v="600"/>
+        <pc:sldMkLst>
+          <pc:docMk/>
+          <pc:sldMk cId="0" sldId="260"/>
+        </pc:sldMkLst>
+        <pc:spChg chg="mod">
+          <ac:chgData name="Gopi U" userId="4820542927acb1bf" providerId="LiveId" clId="{172478D8-5494-471C-B60C-DD487D7977DB}" dt="2026-06-10T04:15:34.741" v="194"/>
+          <ac:spMkLst>
+            <pc:docMk/>
+            <pc:sldMk cId="0" sldId="260"/>
+            <ac:spMk id="2" creationId="{00000000-0000-0000-0000-000000000000}"/>
+          </ac:spMkLst>
+        </pc:spChg>
+        <pc:spChg chg="mod">
+          <ac:chgData name="Gopi U" userId="4820542927acb1bf" providerId="LiveId" clId="{172478D8-5494-471C-B60C-DD487D7977DB}" dt="2026-06-10T04:15:34.741" v="194"/>
+          <ac:spMkLst>
+            <pc:docMk/>
+            <pc:sldMk cId="0" sldId="260"/>
+            <ac:spMk id="3" creationId="{00000000-0000-0000-0000-000000000000}"/>
+          </ac:spMkLst>
+        </pc:spChg>
+        <pc:spChg chg="add mod">
+          <ac:chgData name="Gopi U" userId="4820542927acb1bf" providerId="LiveId" clId="{172478D8-5494-471C-B60C-DD487D7977DB}" dt="2026-06-10T04:48:28.008" v="600"/>
+          <ac:spMkLst>
+            <pc:docMk/>
+            <pc:sldMk cId="0" sldId="260"/>
+            <ac:spMk id="5" creationId="{0A33F8BB-6E07-DB99-DEFD-858D532397BF}"/>
+          </ac:spMkLst>
+        </pc:spChg>
+      </pc:sldChg>
+      <pc:sldChg chg="addSp modSp mod">
+        <pc:chgData name="Gopi U" userId="4820542927acb1bf" providerId="LiveId" clId="{172478D8-5494-471C-B60C-DD487D7977DB}" dt="2026-06-10T04:48:33.659" v="601"/>
+        <pc:sldMkLst>
+          <pc:docMk/>
+          <pc:sldMk cId="0" sldId="261"/>
+        </pc:sldMkLst>
+        <pc:spChg chg="mod">
+          <ac:chgData name="Gopi U" userId="4820542927acb1bf" providerId="LiveId" clId="{172478D8-5494-471C-B60C-DD487D7977DB}" dt="2026-06-10T04:15:34.741" v="194"/>
+          <ac:spMkLst>
+            <pc:docMk/>
+            <pc:sldMk cId="0" sldId="261"/>
+            <ac:spMk id="2" creationId="{00000000-0000-0000-0000-000000000000}"/>
+          </ac:spMkLst>
+        </pc:spChg>
+        <pc:spChg chg="mod">
+          <ac:chgData name="Gopi U" userId="4820542927acb1bf" providerId="LiveId" clId="{172478D8-5494-471C-B60C-DD487D7977DB}" dt="2026-06-10T04:15:34.741" v="194"/>
+          <ac:spMkLst>
+            <pc:docMk/>
+            <pc:sldMk cId="0" sldId="261"/>
+            <ac:spMk id="3" creationId="{00000000-0000-0000-0000-000000000000}"/>
+          </ac:spMkLst>
+        </pc:spChg>
+        <pc:spChg chg="add mod">
+          <ac:chgData name="Gopi U" userId="4820542927acb1bf" providerId="LiveId" clId="{172478D8-5494-471C-B60C-DD487D7977DB}" dt="2026-06-10T04:48:33.659" v="601"/>
+          <ac:spMkLst>
+            <pc:docMk/>
+            <pc:sldMk cId="0" sldId="261"/>
+            <ac:spMk id="5" creationId="{84921527-8882-03E8-52F3-748F476B373F}"/>
+          </ac:spMkLst>
+        </pc:spChg>
+      </pc:sldChg>
+      <pc:sldChg chg="addSp modSp mod">
+        <pc:chgData name="Gopi U" userId="4820542927acb1bf" providerId="LiveId" clId="{172478D8-5494-471C-B60C-DD487D7977DB}" dt="2026-06-10T04:48:38.378" v="602"/>
+        <pc:sldMkLst>
+          <pc:docMk/>
+          <pc:sldMk cId="0" sldId="262"/>
+        </pc:sldMkLst>
+        <pc:spChg chg="mod">
+          <ac:chgData name="Gopi U" userId="4820542927acb1bf" providerId="LiveId" clId="{172478D8-5494-471C-B60C-DD487D7977DB}" dt="2026-06-10T04:15:34.741" v="194"/>
+          <ac:spMkLst>
+            <pc:docMk/>
+            <pc:sldMk cId="0" sldId="262"/>
+            <ac:spMk id="2" creationId="{00000000-0000-0000-0000-000000000000}"/>
+          </ac:spMkLst>
+        </pc:spChg>
+        <pc:spChg chg="mod">
+          <ac:chgData name="Gopi U" userId="4820542927acb1bf" providerId="LiveId" clId="{172478D8-5494-471C-B60C-DD487D7977DB}" dt="2026-06-10T04:15:34.741" v="194"/>
+          <ac:spMkLst>
+            <pc:docMk/>
+            <pc:sldMk cId="0" sldId="262"/>
+            <ac:spMk id="3" creationId="{00000000-0000-0000-0000-000000000000}"/>
+          </ac:spMkLst>
+        </pc:spChg>
+        <pc:spChg chg="add mod">
+          <ac:chgData name="Gopi U" userId="4820542927acb1bf" providerId="LiveId" clId="{172478D8-5494-471C-B60C-DD487D7977DB}" dt="2026-06-10T04:48:38.378" v="602"/>
+          <ac:spMkLst>
+            <pc:docMk/>
+            <pc:sldMk cId="0" sldId="262"/>
+            <ac:spMk id="5" creationId="{03E9A1B8-7E84-9783-3F30-C8082519E1FA}"/>
+          </ac:spMkLst>
+        </pc:spChg>
+      </pc:sldChg>
+      <pc:sldChg chg="addSp modSp mod">
+        <pc:chgData name="Gopi U" userId="4820542927acb1bf" providerId="LiveId" clId="{172478D8-5494-471C-B60C-DD487D7977DB}" dt="2026-06-10T04:48:44.321" v="603"/>
+        <pc:sldMkLst>
+          <pc:docMk/>
+          <pc:sldMk cId="0" sldId="263"/>
+        </pc:sldMkLst>
+        <pc:spChg chg="mod">
+          <ac:chgData name="Gopi U" userId="4820542927acb1bf" providerId="LiveId" clId="{172478D8-5494-471C-B60C-DD487D7977DB}" dt="2026-06-10T04:15:34.741" v="194"/>
+          <ac:spMkLst>
+            <pc:docMk/>
+            <pc:sldMk cId="0" sldId="263"/>
+            <ac:spMk id="2" creationId="{00000000-0000-0000-0000-000000000000}"/>
+          </ac:spMkLst>
+        </pc:spChg>
+        <pc:spChg chg="mod">
+          <ac:chgData name="Gopi U" userId="4820542927acb1bf" providerId="LiveId" clId="{172478D8-5494-471C-B60C-DD487D7977DB}" dt="2026-06-10T04:15:34.741" v="194"/>
+          <ac:spMkLst>
+            <pc:docMk/>
+            <pc:sldMk cId="0" sldId="263"/>
+            <ac:spMk id="3" creationId="{00000000-0000-0000-0000-000000000000}"/>
+          </ac:spMkLst>
+        </pc:spChg>
+        <pc:spChg chg="add mod">
+          <ac:chgData name="Gopi U" userId="4820542927acb1bf" providerId="LiveId" clId="{172478D8-5494-471C-B60C-DD487D7977DB}" dt="2026-06-10T04:48:44.321" v="603"/>
+          <ac:spMkLst>
+            <pc:docMk/>
+            <pc:sldMk cId="0" sldId="263"/>
+            <ac:spMk id="5" creationId="{C39B23C8-C574-5DE5-E6C9-5974CC96C89A}"/>
+          </ac:spMkLst>
+        </pc:spChg>
+      </pc:sldChg>
+      <pc:sldChg chg="addSp modSp mod">
+        <pc:chgData name="Gopi U" userId="4820542927acb1bf" providerId="LiveId" clId="{172478D8-5494-471C-B60C-DD487D7977DB}" dt="2026-06-10T04:48:51.257" v="604"/>
+        <pc:sldMkLst>
+          <pc:docMk/>
+          <pc:sldMk cId="0" sldId="264"/>
+        </pc:sldMkLst>
+        <pc:spChg chg="mod">
+          <ac:chgData name="Gopi U" userId="4820542927acb1bf" providerId="LiveId" clId="{172478D8-5494-471C-B60C-DD487D7977DB}" dt="2026-06-10T04:15:34.741" v="194"/>
+          <ac:spMkLst>
+            <pc:docMk/>
+            <pc:sldMk cId="0" sldId="264"/>
+            <ac:spMk id="2" creationId="{00000000-0000-0000-0000-000000000000}"/>
+          </ac:spMkLst>
+        </pc:spChg>
+        <pc:spChg chg="mod">
+          <ac:chgData name="Gopi U" userId="4820542927acb1bf" providerId="LiveId" clId="{172478D8-5494-471C-B60C-DD487D7977DB}" dt="2026-06-10T04:15:34.741" v="194"/>
+          <ac:spMkLst>
+            <pc:docMk/>
+            <pc:sldMk cId="0" sldId="264"/>
+            <ac:spMk id="3" creationId="{00000000-0000-0000-0000-000000000000}"/>
+          </ac:spMkLst>
+        </pc:spChg>
+        <pc:spChg chg="add mod">
+          <ac:chgData name="Gopi U" userId="4820542927acb1bf" providerId="LiveId" clId="{172478D8-5494-471C-B60C-DD487D7977DB}" dt="2026-06-10T04:48:51.257" v="604"/>
+          <ac:spMkLst>
+            <pc:docMk/>
+            <pc:sldMk cId="0" sldId="264"/>
+            <ac:spMk id="5" creationId="{C2A8FC9D-06A0-8392-7CC6-49F2766A3237}"/>
+          </ac:spMkLst>
+        </pc:spChg>
+      </pc:sldChg>
+      <pc:sldChg chg="addSp modSp mod">
+        <pc:chgData name="Gopi U" userId="4820542927acb1bf" providerId="LiveId" clId="{172478D8-5494-471C-B60C-DD487D7977DB}" dt="2026-06-10T04:48:55.949" v="605"/>
+        <pc:sldMkLst>
+          <pc:docMk/>
+          <pc:sldMk cId="0" sldId="265"/>
+        </pc:sldMkLst>
+        <pc:spChg chg="mod">
+          <ac:chgData name="Gopi U" userId="4820542927acb1bf" providerId="LiveId" clId="{172478D8-5494-471C-B60C-DD487D7977DB}" dt="2026-06-10T04:15:34.741" v="194"/>
+          <ac:spMkLst>
+            <pc:docMk/>
+            <pc:sldMk cId="0" sldId="265"/>
+            <ac:spMk id="2" creationId="{00000000-0000-0000-0000-000000000000}"/>
+          </ac:spMkLst>
+        </pc:spChg>
+        <pc:spChg chg="mod">
+          <ac:chgData name="Gopi U" userId="4820542927acb1bf" providerId="LiveId" clId="{172478D8-5494-471C-B60C-DD487D7977DB}" dt="2026-06-10T04:15:34.741" v="194"/>
+          <ac:spMkLst>
+            <pc:docMk/>
+            <pc:sldMk cId="0" sldId="265"/>
+            <ac:spMk id="3" creationId="{00000000-0000-0000-0000-000000000000}"/>
+          </ac:spMkLst>
+        </pc:spChg>
+        <pc:spChg chg="add mod">
+          <ac:chgData name="Gopi U" userId="4820542927acb1bf" providerId="LiveId" clId="{172478D8-5494-471C-B60C-DD487D7977DB}" dt="2026-06-10T04:48:55.949" v="605"/>
+          <ac:spMkLst>
+            <pc:docMk/>
+            <pc:sldMk cId="0" sldId="265"/>
+            <ac:spMk id="5" creationId="{790E2C66-A346-47D8-CC9E-212BBF3991A2}"/>
+          </ac:spMkLst>
+        </pc:spChg>
+      </pc:sldChg>
+      <pc:sldChg chg="addSp modSp mod">
+        <pc:chgData name="Gopi U" userId="4820542927acb1bf" providerId="LiveId" clId="{172478D8-5494-471C-B60C-DD487D7977DB}" dt="2026-06-10T04:49:03.679" v="606"/>
+        <pc:sldMkLst>
+          <pc:docMk/>
+          <pc:sldMk cId="0" sldId="266"/>
+        </pc:sldMkLst>
+        <pc:spChg chg="mod">
+          <ac:chgData name="Gopi U" userId="4820542927acb1bf" providerId="LiveId" clId="{172478D8-5494-471C-B60C-DD487D7977DB}" dt="2026-06-10T04:15:34.741" v="194"/>
+          <ac:spMkLst>
+            <pc:docMk/>
+            <pc:sldMk cId="0" sldId="266"/>
+            <ac:spMk id="2" creationId="{00000000-0000-0000-0000-000000000000}"/>
+          </ac:spMkLst>
+        </pc:spChg>
+        <pc:spChg chg="mod">
+          <ac:chgData name="Gopi U" userId="4820542927acb1bf" providerId="LiveId" clId="{172478D8-5494-471C-B60C-DD487D7977DB}" dt="2026-06-10T04:15:34.741" v="194"/>
+          <ac:spMkLst>
+            <pc:docMk/>
+            <pc:sldMk cId="0" sldId="266"/>
+            <ac:spMk id="3" creationId="{00000000-0000-0000-0000-000000000000}"/>
+          </ac:spMkLst>
+        </pc:spChg>
+        <pc:spChg chg="add mod">
+          <ac:chgData name="Gopi U" userId="4820542927acb1bf" providerId="LiveId" clId="{172478D8-5494-471C-B60C-DD487D7977DB}" dt="2026-06-10T04:49:03.679" v="606"/>
+          <ac:spMkLst>
+            <pc:docMk/>
+            <pc:sldMk cId="0" sldId="266"/>
+            <ac:spMk id="5" creationId="{4AB71503-CB4E-6562-CDD0-61961C294B52}"/>
+          </ac:spMkLst>
+        </pc:spChg>
+      </pc:sldChg>
+      <pc:sldChg chg="addSp modSp mod">
+        <pc:chgData name="Gopi U" userId="4820542927acb1bf" providerId="LiveId" clId="{172478D8-5494-471C-B60C-DD487D7977DB}" dt="2026-06-10T04:49:11.821" v="607"/>
+        <pc:sldMkLst>
+          <pc:docMk/>
+          <pc:sldMk cId="0" sldId="267"/>
+        </pc:sldMkLst>
+        <pc:spChg chg="mod">
+          <ac:chgData name="Gopi U" userId="4820542927acb1bf" providerId="LiveId" clId="{172478D8-5494-471C-B60C-DD487D7977DB}" dt="2026-06-10T04:01:46.272" v="68" actId="207"/>
+          <ac:spMkLst>
+            <pc:docMk/>
+            <pc:sldMk cId="0" sldId="267"/>
+            <ac:spMk id="3" creationId="{00000000-0000-0000-0000-000000000000}"/>
+          </ac:spMkLst>
+        </pc:spChg>
+        <pc:spChg chg="add mod">
+          <ac:chgData name="Gopi U" userId="4820542927acb1bf" providerId="LiveId" clId="{172478D8-5494-471C-B60C-DD487D7977DB}" dt="2026-06-10T04:49:11.821" v="607"/>
+          <ac:spMkLst>
+            <pc:docMk/>
+            <pc:sldMk cId="0" sldId="267"/>
+            <ac:spMk id="5" creationId="{FE2750EB-D34A-E612-10AA-B3A0B54DB5E2}"/>
+          </ac:spMkLst>
+        </pc:spChg>
+      </pc:sldChg>
+      <pc:sldMasterChg chg="setBg modSldLayout">
+        <pc:chgData name="Gopi U" userId="4820542927acb1bf" providerId="LiveId" clId="{172478D8-5494-471C-B60C-DD487D7977DB}" dt="2026-06-10T04:55:48.147" v="634" actId="21"/>
+        <pc:sldMasterMkLst>
+          <pc:docMk/>
+          <pc:sldMasterMk cId="2336663901" sldId="2147483732"/>
+        </pc:sldMasterMkLst>
+        <pc:sldLayoutChg chg="addSp delSp modSp mod setBg">
+          <pc:chgData name="Gopi U" userId="4820542927acb1bf" providerId="LiveId" clId="{172478D8-5494-471C-B60C-DD487D7977DB}" dt="2026-06-10T04:55:48.147" v="634" actId="21"/>
+          <pc:sldLayoutMkLst>
+            <pc:docMk/>
+            <pc:sldMasterMk cId="2336663901" sldId="2147483732"/>
+            <pc:sldLayoutMk cId="3185242726" sldId="2147483733"/>
+          </pc:sldLayoutMkLst>
+          <pc:spChg chg="add mod">
+            <ac:chgData name="Gopi U" userId="4820542927acb1bf" providerId="LiveId" clId="{172478D8-5494-471C-B60C-DD487D7977DB}" dt="2026-06-10T04:51:29.135" v="619" actId="14100"/>
+            <ac:spMkLst>
+              <pc:docMk/>
+              <pc:sldMasterMk cId="2336663901" sldId="2147483732"/>
+              <pc:sldLayoutMk cId="3185242726" sldId="2147483733"/>
+              <ac:spMk id="9" creationId="{5EF3EF75-D6FC-29C9-B411-38F350CE8F85}"/>
+            </ac:spMkLst>
+          </pc:spChg>
+          <pc:spChg chg="add del mod">
+            <ac:chgData name="Gopi U" userId="4820542927acb1bf" providerId="LiveId" clId="{172478D8-5494-471C-B60C-DD487D7977DB}" dt="2026-06-10T04:55:18.355" v="632" actId="478"/>
+            <ac:spMkLst>
+              <pc:docMk/>
+              <pc:sldMasterMk cId="2336663901" sldId="2147483732"/>
+              <pc:sldLayoutMk cId="3185242726" sldId="2147483733"/>
+              <ac:spMk id="10" creationId="{6824EFBB-2CB6-C0AA-838D-8E74C073C58B}"/>
+            </ac:spMkLst>
+          </pc:spChg>
+          <pc:picChg chg="add del mod">
+            <ac:chgData name="Gopi U" userId="4820542927acb1bf" providerId="LiveId" clId="{172478D8-5494-471C-B60C-DD487D7977DB}" dt="2026-06-10T04:55:48.147" v="634" actId="21"/>
+            <ac:picMkLst>
+              <pc:docMk/>
+              <pc:sldMasterMk cId="2336663901" sldId="2147483732"/>
+              <pc:sldLayoutMk cId="3185242726" sldId="2147483733"/>
+              <ac:picMk id="8" creationId="{98BA8761-F686-E0B4-C48C-8B0556B426AD}"/>
+            </ac:picMkLst>
+          </pc:picChg>
+        </pc:sldLayoutChg>
+        <pc:sldLayoutChg chg="setBg">
+          <pc:chgData name="Gopi U" userId="4820542927acb1bf" providerId="LiveId" clId="{172478D8-5494-471C-B60C-DD487D7977DB}" dt="2026-06-10T04:19:00.386" v="198"/>
+          <pc:sldLayoutMkLst>
+            <pc:docMk/>
+            <pc:sldMasterMk cId="2336663901" sldId="2147483732"/>
+            <pc:sldLayoutMk cId="4220962547" sldId="2147483734"/>
+          </pc:sldLayoutMkLst>
+        </pc:sldLayoutChg>
+        <pc:sldLayoutChg chg="setBg">
+          <pc:chgData name="Gopi U" userId="4820542927acb1bf" providerId="LiveId" clId="{172478D8-5494-471C-B60C-DD487D7977DB}" dt="2026-06-10T04:19:00.386" v="198"/>
+          <pc:sldLayoutMkLst>
+            <pc:docMk/>
+            <pc:sldMasterMk cId="2336663901" sldId="2147483732"/>
+            <pc:sldLayoutMk cId="96258121" sldId="2147483735"/>
+          </pc:sldLayoutMkLst>
+        </pc:sldLayoutChg>
+        <pc:sldLayoutChg chg="setBg">
+          <pc:chgData name="Gopi U" userId="4820542927acb1bf" providerId="LiveId" clId="{172478D8-5494-471C-B60C-DD487D7977DB}" dt="2026-06-10T04:19:00.386" v="198"/>
+          <pc:sldLayoutMkLst>
+            <pc:docMk/>
+            <pc:sldMasterMk cId="2336663901" sldId="2147483732"/>
+            <pc:sldLayoutMk cId="3106999387" sldId="2147483736"/>
+          </pc:sldLayoutMkLst>
+        </pc:sldLayoutChg>
+        <pc:sldLayoutChg chg="setBg">
+          <pc:chgData name="Gopi U" userId="4820542927acb1bf" providerId="LiveId" clId="{172478D8-5494-471C-B60C-DD487D7977DB}" dt="2026-06-10T04:19:00.386" v="198"/>
+          <pc:sldLayoutMkLst>
+            <pc:docMk/>
+            <pc:sldMasterMk cId="2336663901" sldId="2147483732"/>
+            <pc:sldLayoutMk cId="2853961788" sldId="2147483737"/>
+          </pc:sldLayoutMkLst>
+        </pc:sldLayoutChg>
+        <pc:sldLayoutChg chg="setBg">
+          <pc:chgData name="Gopi U" userId="4820542927acb1bf" providerId="LiveId" clId="{172478D8-5494-471C-B60C-DD487D7977DB}" dt="2026-06-10T04:19:00.386" v="198"/>
+          <pc:sldLayoutMkLst>
+            <pc:docMk/>
+            <pc:sldMasterMk cId="2336663901" sldId="2147483732"/>
+            <pc:sldLayoutMk cId="1933822052" sldId="2147483738"/>
+          </pc:sldLayoutMkLst>
+        </pc:sldLayoutChg>
+        <pc:sldLayoutChg chg="setBg">
+          <pc:chgData name="Gopi U" userId="4820542927acb1bf" providerId="LiveId" clId="{172478D8-5494-471C-B60C-DD487D7977DB}" dt="2026-06-10T04:19:00.386" v="198"/>
+          <pc:sldLayoutMkLst>
+            <pc:docMk/>
+            <pc:sldMasterMk cId="2336663901" sldId="2147483732"/>
+            <pc:sldLayoutMk cId="1267451534" sldId="2147483739"/>
+          </pc:sldLayoutMkLst>
+        </pc:sldLayoutChg>
+        <pc:sldLayoutChg chg="setBg">
+          <pc:chgData name="Gopi U" userId="4820542927acb1bf" providerId="LiveId" clId="{172478D8-5494-471C-B60C-DD487D7977DB}" dt="2026-06-10T04:19:00.386" v="198"/>
+          <pc:sldLayoutMkLst>
+            <pc:docMk/>
+            <pc:sldMasterMk cId="2336663901" sldId="2147483732"/>
+            <pc:sldLayoutMk cId="1454777798" sldId="2147483740"/>
+          </pc:sldLayoutMkLst>
+        </pc:sldLayoutChg>
+        <pc:sldLayoutChg chg="setBg">
+          <pc:chgData name="Gopi U" userId="4820542927acb1bf" providerId="LiveId" clId="{172478D8-5494-471C-B60C-DD487D7977DB}" dt="2026-06-10T04:19:00.386" v="198"/>
+          <pc:sldLayoutMkLst>
+            <pc:docMk/>
+            <pc:sldMasterMk cId="2336663901" sldId="2147483732"/>
+            <pc:sldLayoutMk cId="3264592300" sldId="2147483741"/>
+          </pc:sldLayoutMkLst>
+        </pc:sldLayoutChg>
+        <pc:sldLayoutChg chg="setBg">
+          <pc:chgData name="Gopi U" userId="4820542927acb1bf" providerId="LiveId" clId="{172478D8-5494-471C-B60C-DD487D7977DB}" dt="2026-06-10T04:19:00.386" v="198"/>
+          <pc:sldLayoutMkLst>
+            <pc:docMk/>
+            <pc:sldMasterMk cId="2336663901" sldId="2147483732"/>
+            <pc:sldLayoutMk cId="2529880679" sldId="2147483742"/>
+          </pc:sldLayoutMkLst>
+        </pc:sldLayoutChg>
+        <pc:sldLayoutChg chg="setBg">
+          <pc:chgData name="Gopi U" userId="4820542927acb1bf" providerId="LiveId" clId="{172478D8-5494-471C-B60C-DD487D7977DB}" dt="2026-06-10T04:19:00.386" v="198"/>
+          <pc:sldLayoutMkLst>
+            <pc:docMk/>
+            <pc:sldMasterMk cId="2336663901" sldId="2147483732"/>
+            <pc:sldLayoutMk cId="3053561534" sldId="2147483743"/>
+          </pc:sldLayoutMkLst>
+        </pc:sldLayoutChg>
+      </pc:sldMasterChg>
+    </pc:docChg>
+  </pc:docChgLst>
+</pc:chgInfo>
+</file>
+
+<file path=ppt/notesMasters/notesMaster1.xml><?xml version="1.0" encoding="utf-8"?>
+<p:notesMaster xmlns:a="http://schemas.openxmlformats.org/drawingml/2006/main" xmlns:r="http://schemas.openxmlformats.org/officeDocument/2006/relationships" xmlns:p="http://schemas.openxmlformats.org/presentationml/2006/main">
+  <p:cSld>
+    <p:bg>
+      <p:bgRef idx="1001">
+        <a:schemeClr val="bg1"/>
+      </p:bgRef>
+    </p:bg>
+    <p:spTree>
+      <p:nvGrpSpPr>
+        <p:cNvPr id="1" name=""/>
+        <p:cNvGrpSpPr/>
+        <p:nvPr/>
+      </p:nvGrpSpPr>
+      <p:grpSpPr>
+        <a:xfrm>
+          <a:off x="0" y="0"/>
+          <a:ext cx="0" cy="0"/>
+          <a:chOff x="0" y="0"/>
+          <a:chExt cx="0" cy="0"/>
+        </a:xfrm>
+      </p:grpSpPr>
+      <p:sp>
+        <p:nvSpPr>
+          <p:cNvPr id="2" name="Header Placeholder 1"/>
+          <p:cNvSpPr>
+            <a:spLocks noGrp="1"/>
+          </p:cNvSpPr>
+          <p:nvPr>
+            <p:ph type="hdr" sz="quarter"/>
+          </p:nvPr>
+        </p:nvSpPr>
+        <p:spPr>
+          <a:xfrm>
+            <a:off x="0" y="0"/>
+            <a:ext cx="2971800" cy="458788"/>
+          </a:xfrm>
+          <a:prstGeom prst="rect">
+            <a:avLst/>
+          </a:prstGeom>
+        </p:spPr>
+        <p:txBody>
+          <a:bodyPr vert="horz" lIns="91440" tIns="45720" rIns="91440" bIns="45720" rtlCol="0"/>
+          <a:lstStyle>
+            <a:lvl1pPr algn="l">
+              <a:defRPr sz="1200"/>
+            </a:lvl1pPr>
+          </a:lstStyle>
+          <a:p>
+            <a:endParaRPr lang="en-IN"/>
+          </a:p>
+        </p:txBody>
+      </p:sp>
+      <p:sp>
+        <p:nvSpPr>
+          <p:cNvPr id="3" name="Date Placeholder 2"/>
+          <p:cNvSpPr>
+            <a:spLocks noGrp="1"/>
+          </p:cNvSpPr>
+          <p:nvPr>
+            <p:ph type="dt" idx="1"/>
+          </p:nvPr>
+        </p:nvSpPr>
+        <p:spPr>
+          <a:xfrm>
+            <a:off x="3884613" y="0"/>
+            <a:ext cx="2971800" cy="458788"/>
+          </a:xfrm>
+          <a:prstGeom prst="rect">
+            <a:avLst/>
+          </a:prstGeom>
+        </p:spPr>
+        <p:txBody>
+          <a:bodyPr vert="horz" lIns="91440" tIns="45720" rIns="91440" bIns="45720" rtlCol="0"/>
+          <a:lstStyle>
+            <a:lvl1pPr algn="r">
+              <a:defRPr sz="1200"/>
+            </a:lvl1pPr>
+          </a:lstStyle>
+          <a:p>
+            <a:fld id="{E8886826-FC75-480D-8155-D752C072DD4A}" type="datetimeFigureOut">
+              <a:rPr lang="en-IN" smtClean="0"/>
+              <a:t>10-06-2026</a:t>
+            </a:fld>
+            <a:endParaRPr lang="en-IN"/>
+          </a:p>
+        </p:txBody>
+      </p:sp>
+      <p:sp>
+        <p:nvSpPr>
+          <p:cNvPr id="4" name="Slide Image Placeholder 3"/>
+          <p:cNvSpPr>
+            <a:spLocks noGrp="1" noRot="1" noChangeAspect="1"/>
+          </p:cNvSpPr>
+          <p:nvPr>
+            <p:ph type="sldImg" idx="2"/>
+          </p:nvPr>
+        </p:nvSpPr>
+        <p:spPr>
+          <a:xfrm>
+            <a:off x="685800" y="1143000"/>
+            <a:ext cx="5486400" cy="3086100"/>
+          </a:xfrm>
+          <a:prstGeom prst="rect">
+            <a:avLst/>
+          </a:prstGeom>
+          <a:noFill/>
+          <a:ln w="12700">
+            <a:solidFill>
+              <a:prstClr val="black"/>
+            </a:solidFill>
+          </a:ln>
+        </p:spPr>
+        <p:txBody>
+          <a:bodyPr vert="horz" lIns="91440" tIns="45720" rIns="91440" bIns="45720" rtlCol="0" anchor="ctr"/>
+          <a:lstStyle/>
+          <a:p>
+            <a:endParaRPr lang="en-IN"/>
+          </a:p>
+        </p:txBody>
+      </p:sp>
+      <p:sp>
+        <p:nvSpPr>
+          <p:cNvPr id="5" name="Notes Placeholder 4"/>
+          <p:cNvSpPr>
+            <a:spLocks noGrp="1"/>
+          </p:cNvSpPr>
+          <p:nvPr>
+            <p:ph type="body" sz="quarter" idx="3"/>
+          </p:nvPr>
+        </p:nvSpPr>
+        <p:spPr>
+          <a:xfrm>
+            <a:off x="685800" y="4400550"/>
+            <a:ext cx="5486400" cy="3600450"/>
+          </a:xfrm>
+          <a:prstGeom prst="rect">
+            <a:avLst/>
+          </a:prstGeom>
+        </p:spPr>
+        <p:txBody>
+          <a:bodyPr vert="horz" lIns="91440" tIns="45720" rIns="91440" bIns="45720" rtlCol="0"/>
+          <a:lstStyle/>
+          <a:p>
+            <a:pPr lvl="0"/>
+            <a:r>
+              <a:rPr lang="en-US"/>
+              <a:t>Click to edit Master text styles</a:t>
+            </a:r>
+          </a:p>
+          <a:p>
+            <a:pPr lvl="1"/>
+            <a:r>
+              <a:rPr lang="en-US"/>
+              <a:t>Second level</a:t>
+            </a:r>
+          </a:p>
+          <a:p>
+            <a:pPr lvl="2"/>
+            <a:r>
+              <a:rPr lang="en-US"/>
+              <a:t>Third level</a:t>
+            </a:r>
+          </a:p>
+          <a:p>
+            <a:pPr lvl="3"/>
+            <a:r>
+              <a:rPr lang="en-US"/>
+              <a:t>Fourth level</a:t>
+            </a:r>
+          </a:p>
+          <a:p>
+            <a:pPr lvl="4"/>
+            <a:r>
+              <a:rPr lang="en-US"/>
+              <a:t>Fifth level</a:t>
+            </a:r>
+            <a:endParaRPr lang="en-IN"/>
+          </a:p>
+        </p:txBody>
+      </p:sp>
+      <p:sp>
+        <p:nvSpPr>
+          <p:cNvPr id="6" name="Footer Placeholder 5"/>
+          <p:cNvSpPr>
+            <a:spLocks noGrp="1"/>
+          </p:cNvSpPr>
+          <p:nvPr>
+            <p:ph type="ftr" sz="quarter" idx="4"/>
+          </p:nvPr>
+        </p:nvSpPr>
+        <p:spPr>
+          <a:xfrm>
+            <a:off x="0" y="8685213"/>
+            <a:ext cx="2971800" cy="458787"/>
+          </a:xfrm>
+          <a:prstGeom prst="rect">
+            <a:avLst/>
+          </a:prstGeom>
+        </p:spPr>
+        <p:txBody>
+          <a:bodyPr vert="horz" lIns="91440" tIns="45720" rIns="91440" bIns="45720" rtlCol="0" anchor="b"/>
+          <a:lstStyle>
+            <a:lvl1pPr algn="l">
+              <a:defRPr sz="1200"/>
+            </a:lvl1pPr>
+          </a:lstStyle>
+          <a:p>
+            <a:endParaRPr lang="en-IN"/>
+          </a:p>
+        </p:txBody>
+      </p:sp>
+      <p:sp>
+        <p:nvSpPr>
+          <p:cNvPr id="7" name="Slide Number Placeholder 6"/>
+          <p:cNvSpPr>
+            <a:spLocks noGrp="1"/>
+          </p:cNvSpPr>
+          <p:nvPr>
+            <p:ph type="sldNum" sz="quarter" idx="5"/>
+          </p:nvPr>
+        </p:nvSpPr>
+        <p:spPr>
+          <a:xfrm>
+            <a:off x="3884613" y="8685213"/>
+            <a:ext cx="2971800" cy="458787"/>
+          </a:xfrm>
+          <a:prstGeom prst="rect">
+            <a:avLst/>
+          </a:prstGeom>
+        </p:spPr>
+        <p:txBody>
+          <a:bodyPr vert="horz" lIns="91440" tIns="45720" rIns="91440" bIns="45720" rtlCol="0" anchor="b"/>
+          <a:lstStyle>
+            <a:lvl1pPr algn="r">
+              <a:defRPr sz="1200"/>
+            </a:lvl1pPr>
+          </a:lstStyle>
+          <a:p>
+            <a:fld id="{63E33C2C-97D3-4C28-98BB-310BF4F05E83}" type="slidenum">
+              <a:rPr lang="en-IN" smtClean="0"/>
+              <a:t>‹#›</a:t>
+            </a:fld>
+            <a:endParaRPr lang="en-IN"/>
+          </a:p>
+        </p:txBody>
+      </p:sp>
+    </p:spTree>
+    <p:extLst>
+      <p:ext uri="{BB962C8B-B14F-4D97-AF65-F5344CB8AC3E}">
+        <p14:creationId xmlns:p14="http://schemas.microsoft.com/office/powerpoint/2010/main" val="2833020021"/>
+      </p:ext>
+    </p:extLst>
+  </p:cSld>
+  <p:clrMap bg1="lt1" tx1="dk1" bg2="lt2" tx2="dk2" accent1="accent1" accent2="accent2" accent3="accent3" accent4="accent4" accent5="accent5" accent6="accent6" hlink="hlink" folHlink="folHlink"/>
+  <p:notesStyle>
+    <a:lvl1pPr marL="0" algn="l" defTabSz="914400" rtl="0" eaLnBrk="1" latinLnBrk="0" hangingPunct="1">
+      <a:defRPr sz="1200" kern="1200">
+        <a:solidFill>
+          <a:schemeClr val="tx1"/>
+        </a:solidFill>
+        <a:latin typeface="+mn-lt"/>
+        <a:ea typeface="+mn-ea"/>
+        <a:cs typeface="+mn-cs"/>
+      </a:defRPr>
+    </a:lvl1pPr>
+    <a:lvl2pPr marL="457200" algn="l" defTabSz="914400" rtl="0" eaLnBrk="1" latinLnBrk="0" hangingPunct="1">
+      <a:defRPr sz="1200" kern="1200">
+        <a:solidFill>
+          <a:schemeClr val="tx1"/>
+        </a:solidFill>
+        <a:latin typeface="+mn-lt"/>
+        <a:ea typeface="+mn-ea"/>
+        <a:cs typeface="+mn-cs"/>
+      </a:defRPr>
+    </a:lvl2pPr>
+    <a:lvl3pPr marL="914400" algn="l" defTabSz="914400" rtl="0" eaLnBrk="1" latinLnBrk="0" hangingPunct="1">
+      <a:defRPr sz="1200" kern="1200">
+        <a:solidFill>
+          <a:schemeClr val="tx1"/>
+        </a:solidFill>
+        <a:latin typeface="+mn-lt"/>
+        <a:ea typeface="+mn-ea"/>
+        <a:cs typeface="+mn-cs"/>
+      </a:defRPr>
+    </a:lvl3pPr>
+    <a:lvl4pPr marL="1371600" algn="l" defTabSz="914400" rtl="0" eaLnBrk="1" latinLnBrk="0" hangingPunct="1">
+      <a:defRPr sz="1200" kern="1200">
+        <a:solidFill>
+          <a:schemeClr val="tx1"/>
+        </a:solidFill>
+        <a:latin typeface="+mn-lt"/>
+        <a:ea typeface="+mn-ea"/>
+        <a:cs typeface="+mn-cs"/>
+      </a:defRPr>
+    </a:lvl4pPr>
+    <a:lvl5pPr marL="1828800" algn="l" defTabSz="914400" rtl="0" eaLnBrk="1" latinLnBrk="0" hangingPunct="1">
+      <a:defRPr sz="1200" kern="1200">
+        <a:solidFill>
+          <a:schemeClr val="tx1"/>
+        </a:solidFill>
+        <a:latin typeface="+mn-lt"/>
+        <a:ea typeface="+mn-ea"/>
+        <a:cs typeface="+mn-cs"/>
+      </a:defRPr>
+    </a:lvl5pPr>
+    <a:lvl6pPr marL="2286000" algn="l" defTabSz="914400" rtl="0" eaLnBrk="1" latinLnBrk="0" hangingPunct="1">
+      <a:defRPr sz="1200" kern="1200">
+        <a:solidFill>
+          <a:schemeClr val="tx1"/>
+        </a:solidFill>
+        <a:latin typeface="+mn-lt"/>
+        <a:ea typeface="+mn-ea"/>
+        <a:cs typeface="+mn-cs"/>
+      </a:defRPr>
+    </a:lvl6pPr>
+    <a:lvl7pPr marL="2743200" algn="l" defTabSz="914400" rtl="0" eaLnBrk="1" latinLnBrk="0" hangingPunct="1">
+      <a:defRPr sz="1200" kern="1200">
+        <a:solidFill>
+          <a:schemeClr val="tx1"/>
+        </a:solidFill>
+        <a:latin typeface="+mn-lt"/>
+        <a:ea typeface="+mn-ea"/>
+        <a:cs typeface="+mn-cs"/>
+      </a:defRPr>
+    </a:lvl7pPr>
+    <a:lvl8pPr marL="3200400" algn="l" defTabSz="914400" rtl="0" eaLnBrk="1" latinLnBrk="0" hangingPunct="1">
+      <a:defRPr sz="1200" kern="1200">
+        <a:solidFill>
+          <a:schemeClr val="tx1"/>
+        </a:solidFill>
+        <a:latin typeface="+mn-lt"/>
+        <a:ea typeface="+mn-ea"/>
+        <a:cs typeface="+mn-cs"/>
+      </a:defRPr>
+    </a:lvl8pPr>
+    <a:lvl9pPr marL="3657600" algn="l" defTabSz="914400" rtl="0" eaLnBrk="1" latinLnBrk="0" hangingPunct="1">
+      <a:defRPr sz="1200" kern="1200">
+        <a:solidFill>
+          <a:schemeClr val="tx1"/>
+        </a:solidFill>
+        <a:latin typeface="+mn-lt"/>
+        <a:ea typeface="+mn-ea"/>
+        <a:cs typeface="+mn-cs"/>
+      </a:defRPr>
+    </a:lvl9pPr>
+  </p:notesStyle>
+</p:notesMaster>
 </file>
 
 <file path=ppt/slideLayouts/slideLayout1.xml><?xml version="1.0" encoding="utf-8"?>
@@ -147,19 +1072,23 @@
         </p:nvSpPr>
         <p:spPr>
           <a:xfrm>
-            <a:off x="685800" y="2130425"/>
-            <a:ext cx="7772400" cy="1470025"/>
+            <a:off x="1523603" y="1122363"/>
+            <a:ext cx="9141619" cy="2387600"/>
           </a:xfrm>
         </p:spPr>
         <p:txBody>
-          <a:bodyPr/>
-          <a:lstStyle/>
-          <a:p>
-            <a:r>
-              <a:rPr lang="en-US" smtClean="0"/>
+          <a:bodyPr anchor="b"/>
+          <a:lstStyle>
+            <a:lvl1pPr algn="ctr">
+              <a:defRPr sz="5998"/>
+            </a:lvl1pPr>
+          </a:lstStyle>
+          <a:p>
+            <a:r>
+              <a:rPr lang="en-US"/>
               <a:t>Click to edit Master title style</a:t>
             </a:r>
-            <a:endParaRPr lang="en-US"/>
+            <a:endParaRPr lang="en-US" dirty="0"/>
           </a:p>
         </p:txBody>
       </p:sp>
@@ -175,8 +1104,8 @@
         </p:nvSpPr>
         <p:spPr>
           <a:xfrm>
-            <a:off x="1371600" y="3886200"/>
-            <a:ext cx="6400800" cy="1752600"/>
+            <a:off x="1523603" y="3602038"/>
+            <a:ext cx="9141619" cy="1655762"/>
           </a:xfrm>
         </p:spPr>
         <p:txBody>
@@ -184,122 +1113,68 @@
           <a:lstStyle>
             <a:lvl1pPr marL="0" indent="0" algn="ctr">
               <a:buNone/>
-              <a:defRPr>
-                <a:solidFill>
-                  <a:schemeClr val="tx1">
-                    <a:tint val="75000"/>
-                  </a:schemeClr>
-                </a:solidFill>
-              </a:defRPr>
+              <a:defRPr sz="2399"/>
             </a:lvl1pPr>
-            <a:lvl2pPr marL="457200" indent="0" algn="ctr">
+            <a:lvl2pPr marL="457063" indent="0" algn="ctr">
               <a:buNone/>
-              <a:defRPr>
-                <a:solidFill>
-                  <a:schemeClr val="tx1">
-                    <a:tint val="75000"/>
-                  </a:schemeClr>
-                </a:solidFill>
-              </a:defRPr>
+              <a:defRPr sz="1999"/>
             </a:lvl2pPr>
-            <a:lvl3pPr marL="914400" indent="0" algn="ctr">
+            <a:lvl3pPr marL="914126" indent="0" algn="ctr">
               <a:buNone/>
-              <a:defRPr>
-                <a:solidFill>
-                  <a:schemeClr val="tx1">
-                    <a:tint val="75000"/>
-                  </a:schemeClr>
-                </a:solidFill>
-              </a:defRPr>
+              <a:defRPr sz="1799"/>
             </a:lvl3pPr>
-            <a:lvl4pPr marL="1371600" indent="0" algn="ctr">
+            <a:lvl4pPr marL="1371189" indent="0" algn="ctr">
               <a:buNone/>
-              <a:defRPr>
-                <a:solidFill>
-                  <a:schemeClr val="tx1">
-                    <a:tint val="75000"/>
-                  </a:schemeClr>
-                </a:solidFill>
-              </a:defRPr>
+              <a:defRPr sz="1600"/>
             </a:lvl4pPr>
-            <a:lvl5pPr marL="1828800" indent="0" algn="ctr">
+            <a:lvl5pPr marL="1828251" indent="0" algn="ctr">
               <a:buNone/>
-              <a:defRPr>
-                <a:solidFill>
-                  <a:schemeClr val="tx1">
-                    <a:tint val="75000"/>
-                  </a:schemeClr>
-                </a:solidFill>
-              </a:defRPr>
+              <a:defRPr sz="1600"/>
             </a:lvl5pPr>
-            <a:lvl6pPr marL="2286000" indent="0" algn="ctr">
+            <a:lvl6pPr marL="2285314" indent="0" algn="ctr">
               <a:buNone/>
-              <a:defRPr>
-                <a:solidFill>
-                  <a:schemeClr val="tx1">
-                    <a:tint val="75000"/>
-                  </a:schemeClr>
-                </a:solidFill>
-              </a:defRPr>
+              <a:defRPr sz="1600"/>
             </a:lvl6pPr>
-            <a:lvl7pPr marL="2743200" indent="0" algn="ctr">
+            <a:lvl7pPr marL="2742377" indent="0" algn="ctr">
               <a:buNone/>
-              <a:defRPr>
-                <a:solidFill>
-                  <a:schemeClr val="tx1">
-                    <a:tint val="75000"/>
-                  </a:schemeClr>
-                </a:solidFill>
-              </a:defRPr>
+              <a:defRPr sz="1600"/>
             </a:lvl7pPr>
-            <a:lvl8pPr marL="3200400" indent="0" algn="ctr">
+            <a:lvl8pPr marL="3199440" indent="0" algn="ctr">
               <a:buNone/>
-              <a:defRPr>
-                <a:solidFill>
-                  <a:schemeClr val="tx1">
-                    <a:tint val="75000"/>
-                  </a:schemeClr>
-                </a:solidFill>
-              </a:defRPr>
+              <a:defRPr sz="1600"/>
             </a:lvl8pPr>
-            <a:lvl9pPr marL="3657600" indent="0" algn="ctr">
+            <a:lvl9pPr marL="3656503" indent="0" algn="ctr">
               <a:buNone/>
-              <a:defRPr>
-                <a:solidFill>
-                  <a:schemeClr val="tx1">
-                    <a:tint val="75000"/>
-                  </a:schemeClr>
-                </a:solidFill>
-              </a:defRPr>
+              <a:defRPr sz="1600"/>
             </a:lvl9pPr>
           </a:lstStyle>
           <a:p>
             <a:r>
+              <a:rPr lang="en-US"/>
+              <a:t>Click to edit Master subtitle style</a:t>
+            </a:r>
+            <a:endParaRPr lang="en-US" dirty="0"/>
+          </a:p>
+        </p:txBody>
+      </p:sp>
+      <p:sp>
+        <p:nvSpPr>
+          <p:cNvPr id="4" name="Date Placeholder 3"/>
+          <p:cNvSpPr>
+            <a:spLocks noGrp="1"/>
+          </p:cNvSpPr>
+          <p:nvPr>
+            <p:ph type="dt" sz="half" idx="10"/>
+          </p:nvPr>
+        </p:nvSpPr>
+        <p:spPr/>
+        <p:txBody>
+          <a:bodyPr/>
+          <a:lstStyle/>
+          <a:p>
+            <a:fld id="{886E1BDE-23CB-4BC3-9D3A-7F7146A86BC5}" type="datetime1">
               <a:rPr lang="en-US" smtClean="0"/>
-              <a:t>Click to edit Master subtitle style</a:t>
-            </a:r>
-            <a:endParaRPr lang="en-US"/>
-          </a:p>
-        </p:txBody>
-      </p:sp>
-      <p:sp>
-        <p:nvSpPr>
-          <p:cNvPr id="4" name="Date Placeholder 3"/>
-          <p:cNvSpPr>
-            <a:spLocks noGrp="1"/>
-          </p:cNvSpPr>
-          <p:nvPr>
-            <p:ph type="dt" sz="half" idx="10"/>
-          </p:nvPr>
-        </p:nvSpPr>
-        <p:spPr/>
-        <p:txBody>
-          <a:bodyPr/>
-          <a:lstStyle/>
-          <a:p>
-            <a:fld id="{5BCAD085-E8A6-8845-BD4E-CB4CCA059FC4}" type="datetimeFigureOut">
-              <a:rPr lang="en-US" smtClean="0"/>
-              <a:t>1/27/13</a:t>
+              <a:t>6/10/2026</a:t>
             </a:fld>
             <a:endParaRPr lang="en-US"/>
           </a:p>
@@ -320,7 +1195,7 @@
           <a:bodyPr/>
           <a:lstStyle/>
           <a:p>
-            <a:endParaRPr lang="en-US"/>
+            <a:endParaRPr lang="en-US" dirty="0"/>
           </a:p>
         </p:txBody>
       </p:sp>
@@ -350,7 +1225,7 @@
     </p:spTree>
     <p:extLst>
       <p:ext uri="{BB962C8B-B14F-4D97-AF65-F5344CB8AC3E}">
-        <p14:creationId xmlns:p14="http://schemas.microsoft.com/office/powerpoint/2010/main" val="3168075583"/>
+        <p14:creationId xmlns:p14="http://schemas.microsoft.com/office/powerpoint/2010/main" val="3185242726"/>
       </p:ext>
     </p:extLst>
   </p:cSld>
@@ -393,83 +1268,83 @@
           <a:lstStyle/>
           <a:p>
             <a:r>
+              <a:rPr lang="en-US"/>
+              <a:t>Click to edit Master title style</a:t>
+            </a:r>
+            <a:endParaRPr lang="en-US" dirty="0"/>
+          </a:p>
+        </p:txBody>
+      </p:sp>
+      <p:sp>
+        <p:nvSpPr>
+          <p:cNvPr id="3" name="Vertical Text Placeholder 2"/>
+          <p:cNvSpPr>
+            <a:spLocks noGrp="1"/>
+          </p:cNvSpPr>
+          <p:nvPr>
+            <p:ph type="body" orient="vert" idx="1"/>
+          </p:nvPr>
+        </p:nvSpPr>
+        <p:spPr/>
+        <p:txBody>
+          <a:bodyPr vert="eaVert"/>
+          <a:lstStyle/>
+          <a:p>
+            <a:pPr lvl="0"/>
+            <a:r>
+              <a:rPr lang="en-US"/>
+              <a:t>Click to edit Master text styles</a:t>
+            </a:r>
+          </a:p>
+          <a:p>
+            <a:pPr lvl="1"/>
+            <a:r>
+              <a:rPr lang="en-US"/>
+              <a:t>Second level</a:t>
+            </a:r>
+          </a:p>
+          <a:p>
+            <a:pPr lvl="2"/>
+            <a:r>
+              <a:rPr lang="en-US"/>
+              <a:t>Third level</a:t>
+            </a:r>
+          </a:p>
+          <a:p>
+            <a:pPr lvl="3"/>
+            <a:r>
+              <a:rPr lang="en-US"/>
+              <a:t>Fourth level</a:t>
+            </a:r>
+          </a:p>
+          <a:p>
+            <a:pPr lvl="4"/>
+            <a:r>
+              <a:rPr lang="en-US"/>
+              <a:t>Fifth level</a:t>
+            </a:r>
+            <a:endParaRPr lang="en-US" dirty="0"/>
+          </a:p>
+        </p:txBody>
+      </p:sp>
+      <p:sp>
+        <p:nvSpPr>
+          <p:cNvPr id="4" name="Date Placeholder 3"/>
+          <p:cNvSpPr>
+            <a:spLocks noGrp="1"/>
+          </p:cNvSpPr>
+          <p:nvPr>
+            <p:ph type="dt" sz="half" idx="10"/>
+          </p:nvPr>
+        </p:nvSpPr>
+        <p:spPr/>
+        <p:txBody>
+          <a:bodyPr/>
+          <a:lstStyle/>
+          <a:p>
+            <a:fld id="{FAC8FD60-2122-473E-BECF-4876D2F9D457}" type="datetime1">
               <a:rPr lang="en-US" smtClean="0"/>
-              <a:t>Click to edit Master title style</a:t>
-            </a:r>
-            <a:endParaRPr lang="en-US"/>
-          </a:p>
-        </p:txBody>
-      </p:sp>
-      <p:sp>
-        <p:nvSpPr>
-          <p:cNvPr id="3" name="Vertical Text Placeholder 2"/>
-          <p:cNvSpPr>
-            <a:spLocks noGrp="1"/>
-          </p:cNvSpPr>
-          <p:nvPr>
-            <p:ph type="body" orient="vert" idx="1"/>
-          </p:nvPr>
-        </p:nvSpPr>
-        <p:spPr/>
-        <p:txBody>
-          <a:bodyPr vert="eaVert"/>
-          <a:lstStyle/>
-          <a:p>
-            <a:pPr lvl="0"/>
-            <a:r>
-              <a:rPr lang="en-US" smtClean="0"/>
-              <a:t>Click to edit Master text styles</a:t>
-            </a:r>
-          </a:p>
-          <a:p>
-            <a:pPr lvl="1"/>
-            <a:r>
-              <a:rPr lang="en-US" smtClean="0"/>
-              <a:t>Second level</a:t>
-            </a:r>
-          </a:p>
-          <a:p>
-            <a:pPr lvl="2"/>
-            <a:r>
-              <a:rPr lang="en-US" smtClean="0"/>
-              <a:t>Third level</a:t>
-            </a:r>
-          </a:p>
-          <a:p>
-            <a:pPr lvl="3"/>
-            <a:r>
-              <a:rPr lang="en-US" smtClean="0"/>
-              <a:t>Fourth level</a:t>
-            </a:r>
-          </a:p>
-          <a:p>
-            <a:pPr lvl="4"/>
-            <a:r>
-              <a:rPr lang="en-US" smtClean="0"/>
-              <a:t>Fifth level</a:t>
-            </a:r>
-            <a:endParaRPr lang="en-US"/>
-          </a:p>
-        </p:txBody>
-      </p:sp>
-      <p:sp>
-        <p:nvSpPr>
-          <p:cNvPr id="4" name="Date Placeholder 3"/>
-          <p:cNvSpPr>
-            <a:spLocks noGrp="1"/>
-          </p:cNvSpPr>
-          <p:nvPr>
-            <p:ph type="dt" sz="half" idx="10"/>
-          </p:nvPr>
-        </p:nvSpPr>
-        <p:spPr/>
-        <p:txBody>
-          <a:bodyPr/>
-          <a:lstStyle/>
-          <a:p>
-            <a:fld id="{5BCAD085-E8A6-8845-BD4E-CB4CCA059FC4}" type="datetimeFigureOut">
-              <a:rPr lang="en-US" smtClean="0"/>
-              <a:t>1/27/13</a:t>
+              <a:t>6/10/2026</a:t>
             </a:fld>
             <a:endParaRPr lang="en-US"/>
           </a:p>
@@ -520,7 +1395,7 @@
     </p:spTree>
     <p:extLst>
       <p:ext uri="{BB962C8B-B14F-4D97-AF65-F5344CB8AC3E}">
-        <p14:creationId xmlns:p14="http://schemas.microsoft.com/office/powerpoint/2010/main" val="2910927964"/>
+        <p14:creationId xmlns:p14="http://schemas.microsoft.com/office/powerpoint/2010/main" val="2529880679"/>
       </p:ext>
     </p:extLst>
   </p:cSld>
@@ -559,8 +1434,8 @@
         </p:nvSpPr>
         <p:spPr>
           <a:xfrm>
-            <a:off x="6629400" y="274638"/>
-            <a:ext cx="2057400" cy="5851525"/>
+            <a:off x="8722628" y="365125"/>
+            <a:ext cx="2628215" cy="5811838"/>
           </a:xfrm>
         </p:spPr>
         <p:txBody>
@@ -568,10 +1443,10 @@
           <a:lstStyle/>
           <a:p>
             <a:r>
-              <a:rPr lang="en-US" smtClean="0"/>
+              <a:rPr lang="en-US"/>
               <a:t>Click to edit Master title style</a:t>
             </a:r>
-            <a:endParaRPr lang="en-US"/>
+            <a:endParaRPr lang="en-US" dirty="0"/>
           </a:p>
         </p:txBody>
       </p:sp>
@@ -587,8 +1462,8 @@
         </p:nvSpPr>
         <p:spPr>
           <a:xfrm>
-            <a:off x="457200" y="274638"/>
-            <a:ext cx="6019800" cy="5851525"/>
+            <a:off x="837982" y="365125"/>
+            <a:ext cx="7732286" cy="5811838"/>
           </a:xfrm>
         </p:spPr>
         <p:txBody>
@@ -597,59 +1472,59 @@
           <a:p>
             <a:pPr lvl="0"/>
             <a:r>
+              <a:rPr lang="en-US"/>
+              <a:t>Click to edit Master text styles</a:t>
+            </a:r>
+          </a:p>
+          <a:p>
+            <a:pPr lvl="1"/>
+            <a:r>
+              <a:rPr lang="en-US"/>
+              <a:t>Second level</a:t>
+            </a:r>
+          </a:p>
+          <a:p>
+            <a:pPr lvl="2"/>
+            <a:r>
+              <a:rPr lang="en-US"/>
+              <a:t>Third level</a:t>
+            </a:r>
+          </a:p>
+          <a:p>
+            <a:pPr lvl="3"/>
+            <a:r>
+              <a:rPr lang="en-US"/>
+              <a:t>Fourth level</a:t>
+            </a:r>
+          </a:p>
+          <a:p>
+            <a:pPr lvl="4"/>
+            <a:r>
+              <a:rPr lang="en-US"/>
+              <a:t>Fifth level</a:t>
+            </a:r>
+            <a:endParaRPr lang="en-US" dirty="0"/>
+          </a:p>
+        </p:txBody>
+      </p:sp>
+      <p:sp>
+        <p:nvSpPr>
+          <p:cNvPr id="4" name="Date Placeholder 3"/>
+          <p:cNvSpPr>
+            <a:spLocks noGrp="1"/>
+          </p:cNvSpPr>
+          <p:nvPr>
+            <p:ph type="dt" sz="half" idx="10"/>
+          </p:nvPr>
+        </p:nvSpPr>
+        <p:spPr/>
+        <p:txBody>
+          <a:bodyPr/>
+          <a:lstStyle/>
+          <a:p>
+            <a:fld id="{238EF0CA-CEAC-4CA2-8617-9284908174E6}" type="datetime1">
               <a:rPr lang="en-US" smtClean="0"/>
-              <a:t>Click to edit Master text styles</a:t>
-            </a:r>
-          </a:p>
-          <a:p>
-            <a:pPr lvl="1"/>
-            <a:r>
-              <a:rPr lang="en-US" smtClean="0"/>
-              <a:t>Second level</a:t>
-            </a:r>
-          </a:p>
-          <a:p>
-            <a:pPr lvl="2"/>
-            <a:r>
-              <a:rPr lang="en-US" smtClean="0"/>
-              <a:t>Third level</a:t>
-            </a:r>
-          </a:p>
-          <a:p>
-            <a:pPr lvl="3"/>
-            <a:r>
-              <a:rPr lang="en-US" smtClean="0"/>
-              <a:t>Fourth level</a:t>
-            </a:r>
-          </a:p>
-          <a:p>
-            <a:pPr lvl="4"/>
-            <a:r>
-              <a:rPr lang="en-US" smtClean="0"/>
-              <a:t>Fifth level</a:t>
-            </a:r>
-            <a:endParaRPr lang="en-US"/>
-          </a:p>
-        </p:txBody>
-      </p:sp>
-      <p:sp>
-        <p:nvSpPr>
-          <p:cNvPr id="4" name="Date Placeholder 3"/>
-          <p:cNvSpPr>
-            <a:spLocks noGrp="1"/>
-          </p:cNvSpPr>
-          <p:nvPr>
-            <p:ph type="dt" sz="half" idx="10"/>
-          </p:nvPr>
-        </p:nvSpPr>
-        <p:spPr/>
-        <p:txBody>
-          <a:bodyPr/>
-          <a:lstStyle/>
-          <a:p>
-            <a:fld id="{5BCAD085-E8A6-8845-BD4E-CB4CCA059FC4}" type="datetimeFigureOut">
-              <a:rPr lang="en-US" smtClean="0"/>
-              <a:t>1/27/13</a:t>
+              <a:t>6/10/2026</a:t>
             </a:fld>
             <a:endParaRPr lang="en-US"/>
           </a:p>
@@ -700,7 +1575,7 @@
     </p:spTree>
     <p:extLst>
       <p:ext uri="{BB962C8B-B14F-4D97-AF65-F5344CB8AC3E}">
-        <p14:creationId xmlns:p14="http://schemas.microsoft.com/office/powerpoint/2010/main" val="3612223792"/>
+        <p14:creationId xmlns:p14="http://schemas.microsoft.com/office/powerpoint/2010/main" val="3053561534"/>
       </p:ext>
     </p:extLst>
   </p:cSld>
@@ -743,83 +1618,83 @@
           <a:lstStyle/>
           <a:p>
             <a:r>
+              <a:rPr lang="en-US"/>
+              <a:t>Click to edit Master title style</a:t>
+            </a:r>
+            <a:endParaRPr lang="en-US" dirty="0"/>
+          </a:p>
+        </p:txBody>
+      </p:sp>
+      <p:sp>
+        <p:nvSpPr>
+          <p:cNvPr id="3" name="Content Placeholder 2"/>
+          <p:cNvSpPr>
+            <a:spLocks noGrp="1"/>
+          </p:cNvSpPr>
+          <p:nvPr>
+            <p:ph idx="1"/>
+          </p:nvPr>
+        </p:nvSpPr>
+        <p:spPr/>
+        <p:txBody>
+          <a:bodyPr/>
+          <a:lstStyle/>
+          <a:p>
+            <a:pPr lvl="0"/>
+            <a:r>
+              <a:rPr lang="en-US"/>
+              <a:t>Click to edit Master text styles</a:t>
+            </a:r>
+          </a:p>
+          <a:p>
+            <a:pPr lvl="1"/>
+            <a:r>
+              <a:rPr lang="en-US"/>
+              <a:t>Second level</a:t>
+            </a:r>
+          </a:p>
+          <a:p>
+            <a:pPr lvl="2"/>
+            <a:r>
+              <a:rPr lang="en-US"/>
+              <a:t>Third level</a:t>
+            </a:r>
+          </a:p>
+          <a:p>
+            <a:pPr lvl="3"/>
+            <a:r>
+              <a:rPr lang="en-US"/>
+              <a:t>Fourth level</a:t>
+            </a:r>
+          </a:p>
+          <a:p>
+            <a:pPr lvl="4"/>
+            <a:r>
+              <a:rPr lang="en-US"/>
+              <a:t>Fifth level</a:t>
+            </a:r>
+            <a:endParaRPr lang="en-US" dirty="0"/>
+          </a:p>
+        </p:txBody>
+      </p:sp>
+      <p:sp>
+        <p:nvSpPr>
+          <p:cNvPr id="4" name="Date Placeholder 3"/>
+          <p:cNvSpPr>
+            <a:spLocks noGrp="1"/>
+          </p:cNvSpPr>
+          <p:nvPr>
+            <p:ph type="dt" sz="half" idx="10"/>
+          </p:nvPr>
+        </p:nvSpPr>
+        <p:spPr/>
+        <p:txBody>
+          <a:bodyPr/>
+          <a:lstStyle/>
+          <a:p>
+            <a:fld id="{7F05DDD2-C819-4658-9FD9-6F1E3B2DFA73}" type="datetime1">
               <a:rPr lang="en-US" smtClean="0"/>
-              <a:t>Click to edit Master title style</a:t>
-            </a:r>
-            <a:endParaRPr lang="en-US"/>
-          </a:p>
-        </p:txBody>
-      </p:sp>
-      <p:sp>
-        <p:nvSpPr>
-          <p:cNvPr id="3" name="Content Placeholder 2"/>
-          <p:cNvSpPr>
-            <a:spLocks noGrp="1"/>
-          </p:cNvSpPr>
-          <p:nvPr>
-            <p:ph idx="1"/>
-          </p:nvPr>
-        </p:nvSpPr>
-        <p:spPr/>
-        <p:txBody>
-          <a:bodyPr/>
-          <a:lstStyle/>
-          <a:p>
-            <a:pPr lvl="0"/>
-            <a:r>
-              <a:rPr lang="en-US" smtClean="0"/>
-              <a:t>Click to edit Master text styles</a:t>
-            </a:r>
-          </a:p>
-          <a:p>
-            <a:pPr lvl="1"/>
-            <a:r>
-              <a:rPr lang="en-US" smtClean="0"/>
-              <a:t>Second level</a:t>
-            </a:r>
-          </a:p>
-          <a:p>
-            <a:pPr lvl="2"/>
-            <a:r>
-              <a:rPr lang="en-US" smtClean="0"/>
-              <a:t>Third level</a:t>
-            </a:r>
-          </a:p>
-          <a:p>
-            <a:pPr lvl="3"/>
-            <a:r>
-              <a:rPr lang="en-US" smtClean="0"/>
-              <a:t>Fourth level</a:t>
-            </a:r>
-          </a:p>
-          <a:p>
-            <a:pPr lvl="4"/>
-            <a:r>
-              <a:rPr lang="en-US" smtClean="0"/>
-              <a:t>Fifth level</a:t>
-            </a:r>
-            <a:endParaRPr lang="en-US"/>
-          </a:p>
-        </p:txBody>
-      </p:sp>
-      <p:sp>
-        <p:nvSpPr>
-          <p:cNvPr id="4" name="Date Placeholder 3"/>
-          <p:cNvSpPr>
-            <a:spLocks noGrp="1"/>
-          </p:cNvSpPr>
-          <p:nvPr>
-            <p:ph type="dt" sz="half" idx="10"/>
-          </p:nvPr>
-        </p:nvSpPr>
-        <p:spPr/>
-        <p:txBody>
-          <a:bodyPr/>
-          <a:lstStyle/>
-          <a:p>
-            <a:fld id="{5BCAD085-E8A6-8845-BD4E-CB4CCA059FC4}" type="datetimeFigureOut">
-              <a:rPr lang="en-US" smtClean="0"/>
-              <a:t>1/27/13</a:t>
+              <a:t>6/10/2026</a:t>
             </a:fld>
             <a:endParaRPr lang="en-US"/>
           </a:p>
@@ -870,7 +1745,7 @@
     </p:spTree>
     <p:extLst>
       <p:ext uri="{BB962C8B-B14F-4D97-AF65-F5344CB8AC3E}">
-        <p14:creationId xmlns:p14="http://schemas.microsoft.com/office/powerpoint/2010/main" val="2614314258"/>
+        <p14:creationId xmlns:p14="http://schemas.microsoft.com/office/powerpoint/2010/main" val="4220962547"/>
       </p:ext>
     </p:extLst>
   </p:cSld>
@@ -909,23 +1784,23 @@
         </p:nvSpPr>
         <p:spPr>
           <a:xfrm>
-            <a:off x="722313" y="4406900"/>
-            <a:ext cx="7772400" cy="1362075"/>
+            <a:off x="831633" y="1709739"/>
+            <a:ext cx="10512862" cy="2852737"/>
           </a:xfrm>
         </p:spPr>
         <p:txBody>
-          <a:bodyPr anchor="t"/>
+          <a:bodyPr anchor="b"/>
           <a:lstStyle>
-            <a:lvl1pPr algn="l">
-              <a:defRPr sz="4000" b="1" cap="all"/>
+            <a:lvl1pPr>
+              <a:defRPr sz="5998"/>
             </a:lvl1pPr>
           </a:lstStyle>
           <a:p>
             <a:r>
-              <a:rPr lang="en-US" smtClean="0"/>
+              <a:rPr lang="en-US"/>
               <a:t>Click to edit Master title style</a:t>
             </a:r>
-            <a:endParaRPr lang="en-US"/>
+            <a:endParaRPr lang="en-US" dirty="0"/>
           </a:p>
         </p:txBody>
       </p:sp>
@@ -941,99 +1816,99 @@
         </p:nvSpPr>
         <p:spPr>
           <a:xfrm>
-            <a:off x="722313" y="2906713"/>
-            <a:ext cx="7772400" cy="1500187"/>
+            <a:off x="831633" y="4589464"/>
+            <a:ext cx="10512862" cy="1500187"/>
           </a:xfrm>
         </p:spPr>
         <p:txBody>
-          <a:bodyPr anchor="b"/>
+          <a:bodyPr/>
           <a:lstStyle>
             <a:lvl1pPr marL="0" indent="0">
               <a:buNone/>
-              <a:defRPr sz="2000">
+              <a:defRPr sz="2399">
                 <a:solidFill>
                   <a:schemeClr val="tx1">
-                    <a:tint val="75000"/>
+                    <a:tint val="82000"/>
                   </a:schemeClr>
                 </a:solidFill>
               </a:defRPr>
             </a:lvl1pPr>
-            <a:lvl2pPr marL="457200" indent="0">
+            <a:lvl2pPr marL="457063" indent="0">
               <a:buNone/>
-              <a:defRPr sz="1800">
+              <a:defRPr sz="1999">
                 <a:solidFill>
                   <a:schemeClr val="tx1">
-                    <a:tint val="75000"/>
+                    <a:tint val="82000"/>
                   </a:schemeClr>
                 </a:solidFill>
               </a:defRPr>
             </a:lvl2pPr>
-            <a:lvl3pPr marL="914400" indent="0">
+            <a:lvl3pPr marL="914126" indent="0">
+              <a:buNone/>
+              <a:defRPr sz="1799">
+                <a:solidFill>
+                  <a:schemeClr val="tx1">
+                    <a:tint val="82000"/>
+                  </a:schemeClr>
+                </a:solidFill>
+              </a:defRPr>
+            </a:lvl3pPr>
+            <a:lvl4pPr marL="1371189" indent="0">
               <a:buNone/>
               <a:defRPr sz="1600">
                 <a:solidFill>
                   <a:schemeClr val="tx1">
-                    <a:tint val="75000"/>
-                  </a:schemeClr>
-                </a:solidFill>
-              </a:defRPr>
-            </a:lvl3pPr>
-            <a:lvl4pPr marL="1371600" indent="0">
-              <a:buNone/>
-              <a:defRPr sz="1400">
-                <a:solidFill>
-                  <a:schemeClr val="tx1">
-                    <a:tint val="75000"/>
+                    <a:tint val="82000"/>
                   </a:schemeClr>
                 </a:solidFill>
               </a:defRPr>
             </a:lvl4pPr>
-            <a:lvl5pPr marL="1828800" indent="0">
+            <a:lvl5pPr marL="1828251" indent="0">
               <a:buNone/>
-              <a:defRPr sz="1400">
+              <a:defRPr sz="1600">
                 <a:solidFill>
                   <a:schemeClr val="tx1">
-                    <a:tint val="75000"/>
+                    <a:tint val="82000"/>
                   </a:schemeClr>
                 </a:solidFill>
               </a:defRPr>
             </a:lvl5pPr>
-            <a:lvl6pPr marL="2286000" indent="0">
+            <a:lvl6pPr marL="2285314" indent="0">
               <a:buNone/>
-              <a:defRPr sz="1400">
+              <a:defRPr sz="1600">
                 <a:solidFill>
                   <a:schemeClr val="tx1">
-                    <a:tint val="75000"/>
+                    <a:tint val="82000"/>
                   </a:schemeClr>
                 </a:solidFill>
               </a:defRPr>
             </a:lvl6pPr>
-            <a:lvl7pPr marL="2743200" indent="0">
+            <a:lvl7pPr marL="2742377" indent="0">
               <a:buNone/>
-              <a:defRPr sz="1400">
+              <a:defRPr sz="1600">
                 <a:solidFill>
                   <a:schemeClr val="tx1">
-                    <a:tint val="75000"/>
+                    <a:tint val="82000"/>
                   </a:schemeClr>
                 </a:solidFill>
               </a:defRPr>
             </a:lvl7pPr>
-            <a:lvl8pPr marL="3200400" indent="0">
+            <a:lvl8pPr marL="3199440" indent="0">
               <a:buNone/>
-              <a:defRPr sz="1400">
+              <a:defRPr sz="1600">
                 <a:solidFill>
                   <a:schemeClr val="tx1">
-                    <a:tint val="75000"/>
+                    <a:tint val="82000"/>
                   </a:schemeClr>
                 </a:solidFill>
               </a:defRPr>
             </a:lvl8pPr>
-            <a:lvl9pPr marL="3657600" indent="0">
+            <a:lvl9pPr marL="3656503" indent="0">
               <a:buNone/>
-              <a:defRPr sz="1400">
+              <a:defRPr sz="1600">
                 <a:solidFill>
                   <a:schemeClr val="tx1">
-                    <a:tint val="75000"/>
+                    <a:tint val="82000"/>
                   </a:schemeClr>
                 </a:solidFill>
               </a:defRPr>
@@ -1042,30 +1917,30 @@
           <a:p>
             <a:pPr lvl="0"/>
             <a:r>
+              <a:rPr lang="en-US"/>
+              <a:t>Click to edit Master text styles</a:t>
+            </a:r>
+          </a:p>
+        </p:txBody>
+      </p:sp>
+      <p:sp>
+        <p:nvSpPr>
+          <p:cNvPr id="4" name="Date Placeholder 3"/>
+          <p:cNvSpPr>
+            <a:spLocks noGrp="1"/>
+          </p:cNvSpPr>
+          <p:nvPr>
+            <p:ph type="dt" sz="half" idx="10"/>
+          </p:nvPr>
+        </p:nvSpPr>
+        <p:spPr/>
+        <p:txBody>
+          <a:bodyPr/>
+          <a:lstStyle/>
+          <a:p>
+            <a:fld id="{71FA1B0A-55DB-4C83-9DDE-1C4D8DA8E719}" type="datetime1">
               <a:rPr lang="en-US" smtClean="0"/>
-              <a:t>Click to edit Master text styles</a:t>
-            </a:r>
-          </a:p>
-        </p:txBody>
-      </p:sp>
-      <p:sp>
-        <p:nvSpPr>
-          <p:cNvPr id="4" name="Date Placeholder 3"/>
-          <p:cNvSpPr>
-            <a:spLocks noGrp="1"/>
-          </p:cNvSpPr>
-          <p:nvPr>
-            <p:ph type="dt" sz="half" idx="10"/>
-          </p:nvPr>
-        </p:nvSpPr>
-        <p:spPr/>
-        <p:txBody>
-          <a:bodyPr/>
-          <a:lstStyle/>
-          <a:p>
-            <a:fld id="{5BCAD085-E8A6-8845-BD4E-CB4CCA059FC4}" type="datetimeFigureOut">
-              <a:rPr lang="en-US" smtClean="0"/>
-              <a:t>1/27/13</a:t>
+              <a:t>6/10/2026</a:t>
             </a:fld>
             <a:endParaRPr lang="en-US"/>
           </a:p>
@@ -1116,7 +1991,7 @@
     </p:spTree>
     <p:extLst>
       <p:ext uri="{BB962C8B-B14F-4D97-AF65-F5344CB8AC3E}">
-        <p14:creationId xmlns:p14="http://schemas.microsoft.com/office/powerpoint/2010/main" val="960648375"/>
+        <p14:creationId xmlns:p14="http://schemas.microsoft.com/office/powerpoint/2010/main" val="96258121"/>
       </p:ext>
     </p:extLst>
   </p:cSld>
@@ -1159,10 +2034,10 @@
           <a:lstStyle/>
           <a:p>
             <a:r>
-              <a:rPr lang="en-US" smtClean="0"/>
+              <a:rPr lang="en-US"/>
               <a:t>Click to edit Master title style</a:t>
             </a:r>
-            <a:endParaRPr lang="en-US"/>
+            <a:endParaRPr lang="en-US" dirty="0"/>
           </a:p>
         </p:txBody>
       </p:sp>
@@ -1178,76 +2053,48 @@
         </p:nvSpPr>
         <p:spPr>
           <a:xfrm>
-            <a:off x="457200" y="1600200"/>
-            <a:ext cx="4038600" cy="4525963"/>
+            <a:off x="837982" y="1825625"/>
+            <a:ext cx="5180251" cy="4351338"/>
           </a:xfrm>
         </p:spPr>
         <p:txBody>
           <a:bodyPr/>
-          <a:lstStyle>
-            <a:lvl1pPr>
-              <a:defRPr sz="2800"/>
-            </a:lvl1pPr>
-            <a:lvl2pPr>
-              <a:defRPr sz="2400"/>
-            </a:lvl2pPr>
-            <a:lvl3pPr>
-              <a:defRPr sz="2000"/>
-            </a:lvl3pPr>
-            <a:lvl4pPr>
-              <a:defRPr sz="1800"/>
-            </a:lvl4pPr>
-            <a:lvl5pPr>
-              <a:defRPr sz="1800"/>
-            </a:lvl5pPr>
-            <a:lvl6pPr>
-              <a:defRPr sz="1800"/>
-            </a:lvl6pPr>
-            <a:lvl7pPr>
-              <a:defRPr sz="1800"/>
-            </a:lvl7pPr>
-            <a:lvl8pPr>
-              <a:defRPr sz="1800"/>
-            </a:lvl8pPr>
-            <a:lvl9pPr>
-              <a:defRPr sz="1800"/>
-            </a:lvl9pPr>
-          </a:lstStyle>
+          <a:lstStyle/>
           <a:p>
             <a:pPr lvl="0"/>
             <a:r>
-              <a:rPr lang="en-US" smtClean="0"/>
+              <a:rPr lang="en-US"/>
               <a:t>Click to edit Master text styles</a:t>
             </a:r>
           </a:p>
           <a:p>
             <a:pPr lvl="1"/>
             <a:r>
-              <a:rPr lang="en-US" smtClean="0"/>
+              <a:rPr lang="en-US"/>
               <a:t>Second level</a:t>
             </a:r>
           </a:p>
           <a:p>
             <a:pPr lvl="2"/>
             <a:r>
-              <a:rPr lang="en-US" smtClean="0"/>
+              <a:rPr lang="en-US"/>
               <a:t>Third level</a:t>
             </a:r>
           </a:p>
           <a:p>
             <a:pPr lvl="3"/>
             <a:r>
-              <a:rPr lang="en-US" smtClean="0"/>
+              <a:rPr lang="en-US"/>
               <a:t>Fourth level</a:t>
             </a:r>
           </a:p>
           <a:p>
             <a:pPr lvl="4"/>
             <a:r>
-              <a:rPr lang="en-US" smtClean="0"/>
+              <a:rPr lang="en-US"/>
               <a:t>Fifth level</a:t>
             </a:r>
-            <a:endParaRPr lang="en-US"/>
+            <a:endParaRPr lang="en-US" dirty="0"/>
           </a:p>
         </p:txBody>
       </p:sp>
@@ -1263,97 +2110,69 @@
         </p:nvSpPr>
         <p:spPr>
           <a:xfrm>
-            <a:off x="4648200" y="1600200"/>
-            <a:ext cx="4038600" cy="4525963"/>
+            <a:off x="6170592" y="1825625"/>
+            <a:ext cx="5180251" cy="4351338"/>
           </a:xfrm>
         </p:spPr>
         <p:txBody>
           <a:bodyPr/>
-          <a:lstStyle>
-            <a:lvl1pPr>
-              <a:defRPr sz="2800"/>
-            </a:lvl1pPr>
-            <a:lvl2pPr>
-              <a:defRPr sz="2400"/>
-            </a:lvl2pPr>
-            <a:lvl3pPr>
-              <a:defRPr sz="2000"/>
-            </a:lvl3pPr>
-            <a:lvl4pPr>
-              <a:defRPr sz="1800"/>
-            </a:lvl4pPr>
-            <a:lvl5pPr>
-              <a:defRPr sz="1800"/>
-            </a:lvl5pPr>
-            <a:lvl6pPr>
-              <a:defRPr sz="1800"/>
-            </a:lvl6pPr>
-            <a:lvl7pPr>
-              <a:defRPr sz="1800"/>
-            </a:lvl7pPr>
-            <a:lvl8pPr>
-              <a:defRPr sz="1800"/>
-            </a:lvl8pPr>
-            <a:lvl9pPr>
-              <a:defRPr sz="1800"/>
-            </a:lvl9pPr>
-          </a:lstStyle>
+          <a:lstStyle/>
           <a:p>
             <a:pPr lvl="0"/>
             <a:r>
+              <a:rPr lang="en-US"/>
+              <a:t>Click to edit Master text styles</a:t>
+            </a:r>
+          </a:p>
+          <a:p>
+            <a:pPr lvl="1"/>
+            <a:r>
+              <a:rPr lang="en-US"/>
+              <a:t>Second level</a:t>
+            </a:r>
+          </a:p>
+          <a:p>
+            <a:pPr lvl="2"/>
+            <a:r>
+              <a:rPr lang="en-US"/>
+              <a:t>Third level</a:t>
+            </a:r>
+          </a:p>
+          <a:p>
+            <a:pPr lvl="3"/>
+            <a:r>
+              <a:rPr lang="en-US"/>
+              <a:t>Fourth level</a:t>
+            </a:r>
+          </a:p>
+          <a:p>
+            <a:pPr lvl="4"/>
+            <a:r>
+              <a:rPr lang="en-US"/>
+              <a:t>Fifth level</a:t>
+            </a:r>
+            <a:endParaRPr lang="en-US" dirty="0"/>
+          </a:p>
+        </p:txBody>
+      </p:sp>
+      <p:sp>
+        <p:nvSpPr>
+          <p:cNvPr id="5" name="Date Placeholder 4"/>
+          <p:cNvSpPr>
+            <a:spLocks noGrp="1"/>
+          </p:cNvSpPr>
+          <p:nvPr>
+            <p:ph type="dt" sz="half" idx="10"/>
+          </p:nvPr>
+        </p:nvSpPr>
+        <p:spPr/>
+        <p:txBody>
+          <a:bodyPr/>
+          <a:lstStyle/>
+          <a:p>
+            <a:fld id="{A82E9682-BC6F-49D3-8EBB-EBC0E694411C}" type="datetime1">
               <a:rPr lang="en-US" smtClean="0"/>
-              <a:t>Click to edit Master text styles</a:t>
-            </a:r>
-          </a:p>
-          <a:p>
-            <a:pPr lvl="1"/>
-            <a:r>
-              <a:rPr lang="en-US" smtClean="0"/>
-              <a:t>Second level</a:t>
-            </a:r>
-          </a:p>
-          <a:p>
-            <a:pPr lvl="2"/>
-            <a:r>
-              <a:rPr lang="en-US" smtClean="0"/>
-              <a:t>Third level</a:t>
-            </a:r>
-          </a:p>
-          <a:p>
-            <a:pPr lvl="3"/>
-            <a:r>
-              <a:rPr lang="en-US" smtClean="0"/>
-              <a:t>Fourth level</a:t>
-            </a:r>
-          </a:p>
-          <a:p>
-            <a:pPr lvl="4"/>
-            <a:r>
-              <a:rPr lang="en-US" smtClean="0"/>
-              <a:t>Fifth level</a:t>
-            </a:r>
-            <a:endParaRPr lang="en-US"/>
-          </a:p>
-        </p:txBody>
-      </p:sp>
-      <p:sp>
-        <p:nvSpPr>
-          <p:cNvPr id="5" name="Date Placeholder 4"/>
-          <p:cNvSpPr>
-            <a:spLocks noGrp="1"/>
-          </p:cNvSpPr>
-          <p:nvPr>
-            <p:ph type="dt" sz="half" idx="10"/>
-          </p:nvPr>
-        </p:nvSpPr>
-        <p:spPr/>
-        <p:txBody>
-          <a:bodyPr/>
-          <a:lstStyle/>
-          <a:p>
-            <a:fld id="{5BCAD085-E8A6-8845-BD4E-CB4CCA059FC4}" type="datetimeFigureOut">
-              <a:rPr lang="en-US" smtClean="0"/>
-              <a:t>1/27/13</a:t>
+              <a:t>6/10/2026</a:t>
             </a:fld>
             <a:endParaRPr lang="en-US"/>
           </a:p>
@@ -1404,7 +2223,7 @@
     </p:spTree>
     <p:extLst>
       <p:ext uri="{BB962C8B-B14F-4D97-AF65-F5344CB8AC3E}">
-        <p14:creationId xmlns:p14="http://schemas.microsoft.com/office/powerpoint/2010/main" val="2782244947"/>
+        <p14:creationId xmlns:p14="http://schemas.microsoft.com/office/powerpoint/2010/main" val="3106999387"/>
       </p:ext>
     </p:extLst>
   </p:cSld>
@@ -1441,37 +2260,38 @@
             <p:ph type="title"/>
           </p:nvPr>
         </p:nvSpPr>
-        <p:spPr/>
-        <p:txBody>
-          <a:bodyPr/>
-          <a:lstStyle>
-            <a:lvl1pPr>
-              <a:defRPr/>
-            </a:lvl1pPr>
-          </a:lstStyle>
-          <a:p>
-            <a:r>
-              <a:rPr lang="en-US" smtClean="0"/>
-              <a:t>Click to edit Master title style</a:t>
-            </a:r>
-            <a:endParaRPr lang="en-US"/>
-          </a:p>
-        </p:txBody>
-      </p:sp>
-      <p:sp>
-        <p:nvSpPr>
-          <p:cNvPr id="3" name="Text Placeholder 2"/>
-          <p:cNvSpPr>
-            <a:spLocks noGrp="1"/>
-          </p:cNvSpPr>
-          <p:nvPr>
-            <p:ph type="body" idx="1"/>
-          </p:nvPr>
-        </p:nvSpPr>
         <p:spPr>
           <a:xfrm>
-            <a:off x="457200" y="1535113"/>
-            <a:ext cx="4040188" cy="639762"/>
+            <a:off x="839569" y="365126"/>
+            <a:ext cx="10512862" cy="1325563"/>
+          </a:xfrm>
+        </p:spPr>
+        <p:txBody>
+          <a:bodyPr/>
+          <a:lstStyle/>
+          <a:p>
+            <a:r>
+              <a:rPr lang="en-US"/>
+              <a:t>Click to edit Master title style</a:t>
+            </a:r>
+            <a:endParaRPr lang="en-US" dirty="0"/>
+          </a:p>
+        </p:txBody>
+      </p:sp>
+      <p:sp>
+        <p:nvSpPr>
+          <p:cNvPr id="3" name="Text Placeholder 2"/>
+          <p:cNvSpPr>
+            <a:spLocks noGrp="1"/>
+          </p:cNvSpPr>
+          <p:nvPr>
+            <p:ph type="body" idx="1"/>
+          </p:nvPr>
+        </p:nvSpPr>
+        <p:spPr>
+          <a:xfrm>
+            <a:off x="839570" y="1681163"/>
+            <a:ext cx="5156444" cy="823912"/>
           </a:xfrm>
         </p:spPr>
         <p:txBody>
@@ -1479,37 +2299,37 @@
           <a:lstStyle>
             <a:lvl1pPr marL="0" indent="0">
               <a:buNone/>
-              <a:defRPr sz="2400" b="1"/>
+              <a:defRPr sz="2399" b="1"/>
             </a:lvl1pPr>
-            <a:lvl2pPr marL="457200" indent="0">
+            <a:lvl2pPr marL="457063" indent="0">
               <a:buNone/>
-              <a:defRPr sz="2000" b="1"/>
+              <a:defRPr sz="1999" b="1"/>
             </a:lvl2pPr>
-            <a:lvl3pPr marL="914400" indent="0">
+            <a:lvl3pPr marL="914126" indent="0">
               <a:buNone/>
-              <a:defRPr sz="1800" b="1"/>
+              <a:defRPr sz="1799" b="1"/>
             </a:lvl3pPr>
-            <a:lvl4pPr marL="1371600" indent="0">
+            <a:lvl4pPr marL="1371189" indent="0">
               <a:buNone/>
               <a:defRPr sz="1600" b="1"/>
             </a:lvl4pPr>
-            <a:lvl5pPr marL="1828800" indent="0">
+            <a:lvl5pPr marL="1828251" indent="0">
               <a:buNone/>
               <a:defRPr sz="1600" b="1"/>
             </a:lvl5pPr>
-            <a:lvl6pPr marL="2286000" indent="0">
+            <a:lvl6pPr marL="2285314" indent="0">
               <a:buNone/>
               <a:defRPr sz="1600" b="1"/>
             </a:lvl6pPr>
-            <a:lvl7pPr marL="2743200" indent="0">
+            <a:lvl7pPr marL="2742377" indent="0">
               <a:buNone/>
               <a:defRPr sz="1600" b="1"/>
             </a:lvl7pPr>
-            <a:lvl8pPr marL="3200400" indent="0">
+            <a:lvl8pPr marL="3199440" indent="0">
               <a:buNone/>
               <a:defRPr sz="1600" b="1"/>
             </a:lvl8pPr>
-            <a:lvl9pPr marL="3657600" indent="0">
+            <a:lvl9pPr marL="3656503" indent="0">
               <a:buNone/>
               <a:defRPr sz="1600" b="1"/>
             </a:lvl9pPr>
@@ -1517,7 +2337,7 @@
           <a:p>
             <a:pPr lvl="0"/>
             <a:r>
-              <a:rPr lang="en-US" smtClean="0"/>
+              <a:rPr lang="en-US"/>
               <a:t>Click to edit Master text styles</a:t>
             </a:r>
           </a:p>
@@ -1535,76 +2355,48 @@
         </p:nvSpPr>
         <p:spPr>
           <a:xfrm>
-            <a:off x="457200" y="2174875"/>
-            <a:ext cx="4040188" cy="3951288"/>
+            <a:off x="839570" y="2505075"/>
+            <a:ext cx="5156444" cy="3684588"/>
           </a:xfrm>
         </p:spPr>
         <p:txBody>
           <a:bodyPr/>
-          <a:lstStyle>
-            <a:lvl1pPr>
-              <a:defRPr sz="2400"/>
-            </a:lvl1pPr>
-            <a:lvl2pPr>
-              <a:defRPr sz="2000"/>
-            </a:lvl2pPr>
-            <a:lvl3pPr>
-              <a:defRPr sz="1800"/>
-            </a:lvl3pPr>
-            <a:lvl4pPr>
-              <a:defRPr sz="1600"/>
-            </a:lvl4pPr>
-            <a:lvl5pPr>
-              <a:defRPr sz="1600"/>
-            </a:lvl5pPr>
-            <a:lvl6pPr>
-              <a:defRPr sz="1600"/>
-            </a:lvl6pPr>
-            <a:lvl7pPr>
-              <a:defRPr sz="1600"/>
-            </a:lvl7pPr>
-            <a:lvl8pPr>
-              <a:defRPr sz="1600"/>
-            </a:lvl8pPr>
-            <a:lvl9pPr>
-              <a:defRPr sz="1600"/>
-            </a:lvl9pPr>
-          </a:lstStyle>
+          <a:lstStyle/>
           <a:p>
             <a:pPr lvl="0"/>
             <a:r>
-              <a:rPr lang="en-US" smtClean="0"/>
+              <a:rPr lang="en-US"/>
               <a:t>Click to edit Master text styles</a:t>
             </a:r>
           </a:p>
           <a:p>
             <a:pPr lvl="1"/>
             <a:r>
-              <a:rPr lang="en-US" smtClean="0"/>
+              <a:rPr lang="en-US"/>
               <a:t>Second level</a:t>
             </a:r>
           </a:p>
           <a:p>
             <a:pPr lvl="2"/>
             <a:r>
-              <a:rPr lang="en-US" smtClean="0"/>
+              <a:rPr lang="en-US"/>
               <a:t>Third level</a:t>
             </a:r>
           </a:p>
           <a:p>
             <a:pPr lvl="3"/>
             <a:r>
-              <a:rPr lang="en-US" smtClean="0"/>
+              <a:rPr lang="en-US"/>
               <a:t>Fourth level</a:t>
             </a:r>
           </a:p>
           <a:p>
             <a:pPr lvl="4"/>
             <a:r>
-              <a:rPr lang="en-US" smtClean="0"/>
+              <a:rPr lang="en-US"/>
               <a:t>Fifth level</a:t>
             </a:r>
-            <a:endParaRPr lang="en-US"/>
+            <a:endParaRPr lang="en-US" dirty="0"/>
           </a:p>
         </p:txBody>
       </p:sp>
@@ -1620,8 +2412,8 @@
         </p:nvSpPr>
         <p:spPr>
           <a:xfrm>
-            <a:off x="4645025" y="1535113"/>
-            <a:ext cx="4041775" cy="639762"/>
+            <a:off x="6170593" y="1681163"/>
+            <a:ext cx="5181838" cy="823912"/>
           </a:xfrm>
         </p:spPr>
         <p:txBody>
@@ -1629,37 +2421,37 @@
           <a:lstStyle>
             <a:lvl1pPr marL="0" indent="0">
               <a:buNone/>
-              <a:defRPr sz="2400" b="1"/>
+              <a:defRPr sz="2399" b="1"/>
             </a:lvl1pPr>
-            <a:lvl2pPr marL="457200" indent="0">
+            <a:lvl2pPr marL="457063" indent="0">
               <a:buNone/>
-              <a:defRPr sz="2000" b="1"/>
+              <a:defRPr sz="1999" b="1"/>
             </a:lvl2pPr>
-            <a:lvl3pPr marL="914400" indent="0">
+            <a:lvl3pPr marL="914126" indent="0">
               <a:buNone/>
-              <a:defRPr sz="1800" b="1"/>
+              <a:defRPr sz="1799" b="1"/>
             </a:lvl3pPr>
-            <a:lvl4pPr marL="1371600" indent="0">
+            <a:lvl4pPr marL="1371189" indent="0">
               <a:buNone/>
               <a:defRPr sz="1600" b="1"/>
             </a:lvl4pPr>
-            <a:lvl5pPr marL="1828800" indent="0">
+            <a:lvl5pPr marL="1828251" indent="0">
               <a:buNone/>
               <a:defRPr sz="1600" b="1"/>
             </a:lvl5pPr>
-            <a:lvl6pPr marL="2286000" indent="0">
+            <a:lvl6pPr marL="2285314" indent="0">
               <a:buNone/>
               <a:defRPr sz="1600" b="1"/>
             </a:lvl6pPr>
-            <a:lvl7pPr marL="2743200" indent="0">
+            <a:lvl7pPr marL="2742377" indent="0">
               <a:buNone/>
               <a:defRPr sz="1600" b="1"/>
             </a:lvl7pPr>
-            <a:lvl8pPr marL="3200400" indent="0">
+            <a:lvl8pPr marL="3199440" indent="0">
               <a:buNone/>
               <a:defRPr sz="1600" b="1"/>
             </a:lvl8pPr>
-            <a:lvl9pPr marL="3657600" indent="0">
+            <a:lvl9pPr marL="3656503" indent="0">
               <a:buNone/>
               <a:defRPr sz="1600" b="1"/>
             </a:lvl9pPr>
@@ -1667,7 +2459,7 @@
           <a:p>
             <a:pPr lvl="0"/>
             <a:r>
-              <a:rPr lang="en-US" smtClean="0"/>
+              <a:rPr lang="en-US"/>
               <a:t>Click to edit Master text styles</a:t>
             </a:r>
           </a:p>
@@ -1685,97 +2477,69 @@
         </p:nvSpPr>
         <p:spPr>
           <a:xfrm>
-            <a:off x="4645025" y="2174875"/>
-            <a:ext cx="4041775" cy="3951288"/>
+            <a:off x="6170593" y="2505075"/>
+            <a:ext cx="5181838" cy="3684588"/>
           </a:xfrm>
         </p:spPr>
         <p:txBody>
           <a:bodyPr/>
-          <a:lstStyle>
-            <a:lvl1pPr>
-              <a:defRPr sz="2400"/>
-            </a:lvl1pPr>
-            <a:lvl2pPr>
-              <a:defRPr sz="2000"/>
-            </a:lvl2pPr>
-            <a:lvl3pPr>
-              <a:defRPr sz="1800"/>
-            </a:lvl3pPr>
-            <a:lvl4pPr>
-              <a:defRPr sz="1600"/>
-            </a:lvl4pPr>
-            <a:lvl5pPr>
-              <a:defRPr sz="1600"/>
-            </a:lvl5pPr>
-            <a:lvl6pPr>
-              <a:defRPr sz="1600"/>
-            </a:lvl6pPr>
-            <a:lvl7pPr>
-              <a:defRPr sz="1600"/>
-            </a:lvl7pPr>
-            <a:lvl8pPr>
-              <a:defRPr sz="1600"/>
-            </a:lvl8pPr>
-            <a:lvl9pPr>
-              <a:defRPr sz="1600"/>
-            </a:lvl9pPr>
-          </a:lstStyle>
+          <a:lstStyle/>
           <a:p>
             <a:pPr lvl="0"/>
             <a:r>
+              <a:rPr lang="en-US"/>
+              <a:t>Click to edit Master text styles</a:t>
+            </a:r>
+          </a:p>
+          <a:p>
+            <a:pPr lvl="1"/>
+            <a:r>
+              <a:rPr lang="en-US"/>
+              <a:t>Second level</a:t>
+            </a:r>
+          </a:p>
+          <a:p>
+            <a:pPr lvl="2"/>
+            <a:r>
+              <a:rPr lang="en-US"/>
+              <a:t>Third level</a:t>
+            </a:r>
+          </a:p>
+          <a:p>
+            <a:pPr lvl="3"/>
+            <a:r>
+              <a:rPr lang="en-US"/>
+              <a:t>Fourth level</a:t>
+            </a:r>
+          </a:p>
+          <a:p>
+            <a:pPr lvl="4"/>
+            <a:r>
+              <a:rPr lang="en-US"/>
+              <a:t>Fifth level</a:t>
+            </a:r>
+            <a:endParaRPr lang="en-US" dirty="0"/>
+          </a:p>
+        </p:txBody>
+      </p:sp>
+      <p:sp>
+        <p:nvSpPr>
+          <p:cNvPr id="7" name="Date Placeholder 6"/>
+          <p:cNvSpPr>
+            <a:spLocks noGrp="1"/>
+          </p:cNvSpPr>
+          <p:nvPr>
+            <p:ph type="dt" sz="half" idx="10"/>
+          </p:nvPr>
+        </p:nvSpPr>
+        <p:spPr/>
+        <p:txBody>
+          <a:bodyPr/>
+          <a:lstStyle/>
+          <a:p>
+            <a:fld id="{6E1559D6-F1AA-4628-882E-E5B24F8EA1A1}" type="datetime1">
               <a:rPr lang="en-US" smtClean="0"/>
-              <a:t>Click to edit Master text styles</a:t>
-            </a:r>
-          </a:p>
-          <a:p>
-            <a:pPr lvl="1"/>
-            <a:r>
-              <a:rPr lang="en-US" smtClean="0"/>
-              <a:t>Second level</a:t>
-            </a:r>
-          </a:p>
-          <a:p>
-            <a:pPr lvl="2"/>
-            <a:r>
-              <a:rPr lang="en-US" smtClean="0"/>
-              <a:t>Third level</a:t>
-            </a:r>
-          </a:p>
-          <a:p>
-            <a:pPr lvl="3"/>
-            <a:r>
-              <a:rPr lang="en-US" smtClean="0"/>
-              <a:t>Fourth level</a:t>
-            </a:r>
-          </a:p>
-          <a:p>
-            <a:pPr lvl="4"/>
-            <a:r>
-              <a:rPr lang="en-US" smtClean="0"/>
-              <a:t>Fifth level</a:t>
-            </a:r>
-            <a:endParaRPr lang="en-US"/>
-          </a:p>
-        </p:txBody>
-      </p:sp>
-      <p:sp>
-        <p:nvSpPr>
-          <p:cNvPr id="7" name="Date Placeholder 6"/>
-          <p:cNvSpPr>
-            <a:spLocks noGrp="1"/>
-          </p:cNvSpPr>
-          <p:nvPr>
-            <p:ph type="dt" sz="half" idx="10"/>
-          </p:nvPr>
-        </p:nvSpPr>
-        <p:spPr/>
-        <p:txBody>
-          <a:bodyPr/>
-          <a:lstStyle/>
-          <a:p>
-            <a:fld id="{5BCAD085-E8A6-8845-BD4E-CB4CCA059FC4}" type="datetimeFigureOut">
-              <a:rPr lang="en-US" smtClean="0"/>
-              <a:t>1/27/13</a:t>
+              <a:t>6/10/2026</a:t>
             </a:fld>
             <a:endParaRPr lang="en-US"/>
           </a:p>
@@ -1826,7 +2590,7 @@
     </p:spTree>
     <p:extLst>
       <p:ext uri="{BB962C8B-B14F-4D97-AF65-F5344CB8AC3E}">
-        <p14:creationId xmlns:p14="http://schemas.microsoft.com/office/powerpoint/2010/main" val="990158736"/>
+        <p14:creationId xmlns:p14="http://schemas.microsoft.com/office/powerpoint/2010/main" val="2853961788"/>
       </p:ext>
     </p:extLst>
   </p:cSld>
@@ -1869,31 +2633,31 @@
           <a:lstStyle/>
           <a:p>
             <a:r>
+              <a:rPr lang="en-US"/>
+              <a:t>Click to edit Master title style</a:t>
+            </a:r>
+            <a:endParaRPr lang="en-US" dirty="0"/>
+          </a:p>
+        </p:txBody>
+      </p:sp>
+      <p:sp>
+        <p:nvSpPr>
+          <p:cNvPr id="3" name="Date Placeholder 2"/>
+          <p:cNvSpPr>
+            <a:spLocks noGrp="1"/>
+          </p:cNvSpPr>
+          <p:nvPr>
+            <p:ph type="dt" sz="half" idx="10"/>
+          </p:nvPr>
+        </p:nvSpPr>
+        <p:spPr/>
+        <p:txBody>
+          <a:bodyPr/>
+          <a:lstStyle/>
+          <a:p>
+            <a:fld id="{BC3E116B-E52E-471A-99AC-A666EF9D5668}" type="datetime1">
               <a:rPr lang="en-US" smtClean="0"/>
-              <a:t>Click to edit Master title style</a:t>
-            </a:r>
-            <a:endParaRPr lang="en-US"/>
-          </a:p>
-        </p:txBody>
-      </p:sp>
-      <p:sp>
-        <p:nvSpPr>
-          <p:cNvPr id="3" name="Date Placeholder 2"/>
-          <p:cNvSpPr>
-            <a:spLocks noGrp="1"/>
-          </p:cNvSpPr>
-          <p:nvPr>
-            <p:ph type="dt" sz="half" idx="10"/>
-          </p:nvPr>
-        </p:nvSpPr>
-        <p:spPr/>
-        <p:txBody>
-          <a:bodyPr/>
-          <a:lstStyle/>
-          <a:p>
-            <a:fld id="{5BCAD085-E8A6-8845-BD4E-CB4CCA059FC4}" type="datetimeFigureOut">
-              <a:rPr lang="en-US" smtClean="0"/>
-              <a:t>1/27/13</a:t>
+              <a:t>6/10/2026</a:t>
             </a:fld>
             <a:endParaRPr lang="en-US"/>
           </a:p>
@@ -1944,7 +2708,7 @@
     </p:spTree>
     <p:extLst>
       <p:ext uri="{BB962C8B-B14F-4D97-AF65-F5344CB8AC3E}">
-        <p14:creationId xmlns:p14="http://schemas.microsoft.com/office/powerpoint/2010/main" val="727027711"/>
+        <p14:creationId xmlns:p14="http://schemas.microsoft.com/office/powerpoint/2010/main" val="1933822052"/>
       </p:ext>
     </p:extLst>
   </p:cSld>
@@ -1986,9 +2750,9 @@
           <a:bodyPr/>
           <a:lstStyle/>
           <a:p>
-            <a:fld id="{5BCAD085-E8A6-8845-BD4E-CB4CCA059FC4}" type="datetimeFigureOut">
+            <a:fld id="{F68EFCC6-259E-4D47-884A-2488E65C4929}" type="datetime1">
               <a:rPr lang="en-US" smtClean="0"/>
-              <a:t>1/27/13</a:t>
+              <a:t>6/10/2026</a:t>
             </a:fld>
             <a:endParaRPr lang="en-US"/>
           </a:p>
@@ -2039,7 +2803,7 @@
     </p:spTree>
     <p:extLst>
       <p:ext uri="{BB962C8B-B14F-4D97-AF65-F5344CB8AC3E}">
-        <p14:creationId xmlns:p14="http://schemas.microsoft.com/office/powerpoint/2010/main" val="1212999818"/>
+        <p14:creationId xmlns:p14="http://schemas.microsoft.com/office/powerpoint/2010/main" val="1267451534"/>
       </p:ext>
     </p:extLst>
   </p:cSld>
@@ -2078,23 +2842,23 @@
         </p:nvSpPr>
         <p:spPr>
           <a:xfrm>
-            <a:off x="457200" y="273050"/>
-            <a:ext cx="3008313" cy="1162050"/>
+            <a:off x="839570" y="457200"/>
+            <a:ext cx="3931213" cy="1600200"/>
           </a:xfrm>
         </p:spPr>
         <p:txBody>
           <a:bodyPr anchor="b"/>
           <a:lstStyle>
-            <a:lvl1pPr algn="l">
-              <a:defRPr sz="2000" b="1"/>
+            <a:lvl1pPr>
+              <a:defRPr sz="3199"/>
             </a:lvl1pPr>
           </a:lstStyle>
           <a:p>
             <a:r>
-              <a:rPr lang="en-US" smtClean="0"/>
+              <a:rPr lang="en-US"/>
               <a:t>Click to edit Master title style</a:t>
             </a:r>
-            <a:endParaRPr lang="en-US"/>
+            <a:endParaRPr lang="en-US" dirty="0"/>
           </a:p>
         </p:txBody>
       </p:sp>
@@ -2110,76 +2874,76 @@
         </p:nvSpPr>
         <p:spPr>
           <a:xfrm>
-            <a:off x="3575050" y="273050"/>
-            <a:ext cx="5111750" cy="5853113"/>
+            <a:off x="5181838" y="987426"/>
+            <a:ext cx="6170593" cy="4873625"/>
           </a:xfrm>
         </p:spPr>
         <p:txBody>
           <a:bodyPr/>
           <a:lstStyle>
             <a:lvl1pPr>
-              <a:defRPr sz="3200"/>
+              <a:defRPr sz="3199"/>
             </a:lvl1pPr>
             <a:lvl2pPr>
-              <a:defRPr sz="2800"/>
+              <a:defRPr sz="2799"/>
             </a:lvl2pPr>
             <a:lvl3pPr>
-              <a:defRPr sz="2400"/>
+              <a:defRPr sz="2399"/>
             </a:lvl3pPr>
             <a:lvl4pPr>
-              <a:defRPr sz="2000"/>
+              <a:defRPr sz="1999"/>
             </a:lvl4pPr>
             <a:lvl5pPr>
-              <a:defRPr sz="2000"/>
+              <a:defRPr sz="1999"/>
             </a:lvl5pPr>
             <a:lvl6pPr>
-              <a:defRPr sz="2000"/>
+              <a:defRPr sz="1999"/>
             </a:lvl6pPr>
             <a:lvl7pPr>
-              <a:defRPr sz="2000"/>
+              <a:defRPr sz="1999"/>
             </a:lvl7pPr>
             <a:lvl8pPr>
-              <a:defRPr sz="2000"/>
+              <a:defRPr sz="1999"/>
             </a:lvl8pPr>
             <a:lvl9pPr>
-              <a:defRPr sz="2000"/>
+              <a:defRPr sz="1999"/>
             </a:lvl9pPr>
           </a:lstStyle>
           <a:p>
             <a:pPr lvl="0"/>
             <a:r>
-              <a:rPr lang="en-US" smtClean="0"/>
+              <a:rPr lang="en-US"/>
               <a:t>Click to edit Master text styles</a:t>
             </a:r>
           </a:p>
           <a:p>
             <a:pPr lvl="1"/>
             <a:r>
-              <a:rPr lang="en-US" smtClean="0"/>
+              <a:rPr lang="en-US"/>
               <a:t>Second level</a:t>
             </a:r>
           </a:p>
           <a:p>
             <a:pPr lvl="2"/>
             <a:r>
-              <a:rPr lang="en-US" smtClean="0"/>
+              <a:rPr lang="en-US"/>
               <a:t>Third level</a:t>
             </a:r>
           </a:p>
           <a:p>
             <a:pPr lvl="3"/>
             <a:r>
-              <a:rPr lang="en-US" smtClean="0"/>
+              <a:rPr lang="en-US"/>
               <a:t>Fourth level</a:t>
             </a:r>
           </a:p>
           <a:p>
             <a:pPr lvl="4"/>
             <a:r>
-              <a:rPr lang="en-US" smtClean="0"/>
+              <a:rPr lang="en-US"/>
               <a:t>Fifth level</a:t>
             </a:r>
-            <a:endParaRPr lang="en-US"/>
+            <a:endParaRPr lang="en-US" dirty="0"/>
           </a:p>
         </p:txBody>
       </p:sp>
@@ -2195,8 +2959,8 @@
         </p:nvSpPr>
         <p:spPr>
           <a:xfrm>
-            <a:off x="457200" y="1435100"/>
-            <a:ext cx="3008313" cy="4691063"/>
+            <a:off x="839570" y="2057400"/>
+            <a:ext cx="3931213" cy="3811588"/>
           </a:xfrm>
         </p:spPr>
         <p:txBody>
@@ -2204,68 +2968,68 @@
           <a:lstStyle>
             <a:lvl1pPr marL="0" indent="0">
               <a:buNone/>
+              <a:defRPr sz="1600"/>
+            </a:lvl1pPr>
+            <a:lvl2pPr marL="457063" indent="0">
+              <a:buNone/>
               <a:defRPr sz="1400"/>
-            </a:lvl1pPr>
-            <a:lvl2pPr marL="457200" indent="0">
+            </a:lvl2pPr>
+            <a:lvl3pPr marL="914126" indent="0">
               <a:buNone/>
               <a:defRPr sz="1200"/>
-            </a:lvl2pPr>
-            <a:lvl3pPr marL="914400" indent="0">
+            </a:lvl3pPr>
+            <a:lvl4pPr marL="1371189" indent="0">
               <a:buNone/>
               <a:defRPr sz="1000"/>
-            </a:lvl3pPr>
-            <a:lvl4pPr marL="1371600" indent="0">
+            </a:lvl4pPr>
+            <a:lvl5pPr marL="1828251" indent="0">
               <a:buNone/>
-              <a:defRPr sz="900"/>
-            </a:lvl4pPr>
-            <a:lvl5pPr marL="1828800" indent="0">
+              <a:defRPr sz="1000"/>
+            </a:lvl5pPr>
+            <a:lvl6pPr marL="2285314" indent="0">
               <a:buNone/>
-              <a:defRPr sz="900"/>
-            </a:lvl5pPr>
-            <a:lvl6pPr marL="2286000" indent="0">
+              <a:defRPr sz="1000"/>
+            </a:lvl6pPr>
+            <a:lvl7pPr marL="2742377" indent="0">
               <a:buNone/>
-              <a:defRPr sz="900"/>
-            </a:lvl6pPr>
-            <a:lvl7pPr marL="2743200" indent="0">
+              <a:defRPr sz="1000"/>
+            </a:lvl7pPr>
+            <a:lvl8pPr marL="3199440" indent="0">
               <a:buNone/>
-              <a:defRPr sz="900"/>
-            </a:lvl7pPr>
-            <a:lvl8pPr marL="3200400" indent="0">
+              <a:defRPr sz="1000"/>
+            </a:lvl8pPr>
+            <a:lvl9pPr marL="3656503" indent="0">
               <a:buNone/>
-              <a:defRPr sz="900"/>
-            </a:lvl8pPr>
-            <a:lvl9pPr marL="3657600" indent="0">
-              <a:buNone/>
-              <a:defRPr sz="900"/>
+              <a:defRPr sz="1000"/>
             </a:lvl9pPr>
           </a:lstStyle>
           <a:p>
             <a:pPr lvl="0"/>
             <a:r>
+              <a:rPr lang="en-US"/>
+              <a:t>Click to edit Master text styles</a:t>
+            </a:r>
+          </a:p>
+        </p:txBody>
+      </p:sp>
+      <p:sp>
+        <p:nvSpPr>
+          <p:cNvPr id="5" name="Date Placeholder 4"/>
+          <p:cNvSpPr>
+            <a:spLocks noGrp="1"/>
+          </p:cNvSpPr>
+          <p:nvPr>
+            <p:ph type="dt" sz="half" idx="10"/>
+          </p:nvPr>
+        </p:nvSpPr>
+        <p:spPr/>
+        <p:txBody>
+          <a:bodyPr/>
+          <a:lstStyle/>
+          <a:p>
+            <a:fld id="{F4EDE1EF-672A-47C9-AA45-10AFD91E9E26}" type="datetime1">
               <a:rPr lang="en-US" smtClean="0"/>
-              <a:t>Click to edit Master text styles</a:t>
-            </a:r>
-          </a:p>
-        </p:txBody>
-      </p:sp>
-      <p:sp>
-        <p:nvSpPr>
-          <p:cNvPr id="5" name="Date Placeholder 4"/>
-          <p:cNvSpPr>
-            <a:spLocks noGrp="1"/>
-          </p:cNvSpPr>
-          <p:nvPr>
-            <p:ph type="dt" sz="half" idx="10"/>
-          </p:nvPr>
-        </p:nvSpPr>
-        <p:spPr/>
-        <p:txBody>
-          <a:bodyPr/>
-          <a:lstStyle/>
-          <a:p>
-            <a:fld id="{5BCAD085-E8A6-8845-BD4E-CB4CCA059FC4}" type="datetimeFigureOut">
-              <a:rPr lang="en-US" smtClean="0"/>
-              <a:t>1/27/13</a:t>
+              <a:t>6/10/2026</a:t>
             </a:fld>
             <a:endParaRPr lang="en-US"/>
           </a:p>
@@ -2316,7 +3080,7 @@
     </p:spTree>
     <p:extLst>
       <p:ext uri="{BB962C8B-B14F-4D97-AF65-F5344CB8AC3E}">
-        <p14:creationId xmlns:p14="http://schemas.microsoft.com/office/powerpoint/2010/main" val="1840726560"/>
+        <p14:creationId xmlns:p14="http://schemas.microsoft.com/office/powerpoint/2010/main" val="1454777798"/>
       </p:ext>
     </p:extLst>
   </p:cSld>
@@ -2355,23 +3119,23 @@
         </p:nvSpPr>
         <p:spPr>
           <a:xfrm>
-            <a:off x="1792288" y="4800600"/>
-            <a:ext cx="5486400" cy="566738"/>
+            <a:off x="839570" y="457200"/>
+            <a:ext cx="3931213" cy="1600200"/>
           </a:xfrm>
         </p:spPr>
         <p:txBody>
           <a:bodyPr anchor="b"/>
           <a:lstStyle>
-            <a:lvl1pPr algn="l">
-              <a:defRPr sz="2000" b="1"/>
+            <a:lvl1pPr>
+              <a:defRPr sz="3199"/>
             </a:lvl1pPr>
           </a:lstStyle>
           <a:p>
             <a:r>
-              <a:rPr lang="en-US" smtClean="0"/>
+              <a:rPr lang="en-US"/>
               <a:t>Click to edit Master title style</a:t>
             </a:r>
-            <a:endParaRPr lang="en-US"/>
+            <a:endParaRPr lang="en-US" dirty="0"/>
           </a:p>
         </p:txBody>
       </p:sp>
@@ -2379,7 +3143,7 @@
         <p:nvSpPr>
           <p:cNvPr id="3" name="Picture Placeholder 2"/>
           <p:cNvSpPr>
-            <a:spLocks noGrp="1"/>
+            <a:spLocks noGrp="1" noChangeAspect="1"/>
           </p:cNvSpPr>
           <p:nvPr>
             <p:ph type="pic" idx="1"/>
@@ -2387,8 +3151,73 @@
         </p:nvSpPr>
         <p:spPr>
           <a:xfrm>
-            <a:off x="1792288" y="612775"/>
-            <a:ext cx="5486400" cy="4114800"/>
+            <a:off x="5181838" y="987426"/>
+            <a:ext cx="6170593" cy="4873625"/>
+          </a:xfrm>
+        </p:spPr>
+        <p:txBody>
+          <a:bodyPr anchor="t"/>
+          <a:lstStyle>
+            <a:lvl1pPr marL="0" indent="0">
+              <a:buNone/>
+              <a:defRPr sz="3199"/>
+            </a:lvl1pPr>
+            <a:lvl2pPr marL="457063" indent="0">
+              <a:buNone/>
+              <a:defRPr sz="2799"/>
+            </a:lvl2pPr>
+            <a:lvl3pPr marL="914126" indent="0">
+              <a:buNone/>
+              <a:defRPr sz="2399"/>
+            </a:lvl3pPr>
+            <a:lvl4pPr marL="1371189" indent="0">
+              <a:buNone/>
+              <a:defRPr sz="1999"/>
+            </a:lvl4pPr>
+            <a:lvl5pPr marL="1828251" indent="0">
+              <a:buNone/>
+              <a:defRPr sz="1999"/>
+            </a:lvl5pPr>
+            <a:lvl6pPr marL="2285314" indent="0">
+              <a:buNone/>
+              <a:defRPr sz="1999"/>
+            </a:lvl6pPr>
+            <a:lvl7pPr marL="2742377" indent="0">
+              <a:buNone/>
+              <a:defRPr sz="1999"/>
+            </a:lvl7pPr>
+            <a:lvl8pPr marL="3199440" indent="0">
+              <a:buNone/>
+              <a:defRPr sz="1999"/>
+            </a:lvl8pPr>
+            <a:lvl9pPr marL="3656503" indent="0">
+              <a:buNone/>
+              <a:defRPr sz="1999"/>
+            </a:lvl9pPr>
+          </a:lstStyle>
+          <a:p>
+            <a:r>
+              <a:rPr lang="en-US"/>
+              <a:t>Click icon to add picture</a:t>
+            </a:r>
+            <a:endParaRPr lang="en-US" dirty="0"/>
+          </a:p>
+        </p:txBody>
+      </p:sp>
+      <p:sp>
+        <p:nvSpPr>
+          <p:cNvPr id="4" name="Text Placeholder 3"/>
+          <p:cNvSpPr>
+            <a:spLocks noGrp="1"/>
+          </p:cNvSpPr>
+          <p:nvPr>
+            <p:ph type="body" sz="half" idx="2"/>
+          </p:nvPr>
+        </p:nvSpPr>
+        <p:spPr>
+          <a:xfrm>
+            <a:off x="839570" y="2057400"/>
+            <a:ext cx="3931213" cy="3811588"/>
           </a:xfrm>
         </p:spPr>
         <p:txBody>
@@ -2396,129 +3225,68 @@
           <a:lstStyle>
             <a:lvl1pPr marL="0" indent="0">
               <a:buNone/>
-              <a:defRPr sz="3200"/>
+              <a:defRPr sz="1600"/>
             </a:lvl1pPr>
-            <a:lvl2pPr marL="457200" indent="0">
+            <a:lvl2pPr marL="457063" indent="0">
               <a:buNone/>
-              <a:defRPr sz="2800"/>
+              <a:defRPr sz="1400"/>
             </a:lvl2pPr>
-            <a:lvl3pPr marL="914400" indent="0">
+            <a:lvl3pPr marL="914126" indent="0">
               <a:buNone/>
-              <a:defRPr sz="2400"/>
+              <a:defRPr sz="1200"/>
             </a:lvl3pPr>
-            <a:lvl4pPr marL="1371600" indent="0">
+            <a:lvl4pPr marL="1371189" indent="0">
               <a:buNone/>
-              <a:defRPr sz="2000"/>
+              <a:defRPr sz="1000"/>
             </a:lvl4pPr>
-            <a:lvl5pPr marL="1828800" indent="0">
+            <a:lvl5pPr marL="1828251" indent="0">
               <a:buNone/>
-              <a:defRPr sz="2000"/>
+              <a:defRPr sz="1000"/>
             </a:lvl5pPr>
-            <a:lvl6pPr marL="2286000" indent="0">
+            <a:lvl6pPr marL="2285314" indent="0">
               <a:buNone/>
-              <a:defRPr sz="2000"/>
+              <a:defRPr sz="1000"/>
             </a:lvl6pPr>
-            <a:lvl7pPr marL="2743200" indent="0">
+            <a:lvl7pPr marL="2742377" indent="0">
               <a:buNone/>
-              <a:defRPr sz="2000"/>
+              <a:defRPr sz="1000"/>
             </a:lvl7pPr>
-            <a:lvl8pPr marL="3200400" indent="0">
+            <a:lvl8pPr marL="3199440" indent="0">
               <a:buNone/>
-              <a:defRPr sz="2000"/>
+              <a:defRPr sz="1000"/>
             </a:lvl8pPr>
-            <a:lvl9pPr marL="3657600" indent="0">
+            <a:lvl9pPr marL="3656503" indent="0">
               <a:buNone/>
-              <a:defRPr sz="2000"/>
+              <a:defRPr sz="1000"/>
             </a:lvl9pPr>
           </a:lstStyle>
           <a:p>
-            <a:endParaRPr lang="en-US"/>
-          </a:p>
-        </p:txBody>
-      </p:sp>
-      <p:sp>
-        <p:nvSpPr>
-          <p:cNvPr id="4" name="Text Placeholder 3"/>
-          <p:cNvSpPr>
-            <a:spLocks noGrp="1"/>
-          </p:cNvSpPr>
-          <p:nvPr>
-            <p:ph type="body" sz="half" idx="2"/>
-          </p:nvPr>
-        </p:nvSpPr>
-        <p:spPr>
-          <a:xfrm>
-            <a:off x="1792288" y="5367338"/>
-            <a:ext cx="5486400" cy="804862"/>
-          </a:xfrm>
-        </p:spPr>
+            <a:pPr lvl="0"/>
+            <a:r>
+              <a:rPr lang="en-US"/>
+              <a:t>Click to edit Master text styles</a:t>
+            </a:r>
+          </a:p>
+        </p:txBody>
+      </p:sp>
+      <p:sp>
+        <p:nvSpPr>
+          <p:cNvPr id="5" name="Date Placeholder 4"/>
+          <p:cNvSpPr>
+            <a:spLocks noGrp="1"/>
+          </p:cNvSpPr>
+          <p:nvPr>
+            <p:ph type="dt" sz="half" idx="10"/>
+          </p:nvPr>
+        </p:nvSpPr>
+        <p:spPr/>
         <p:txBody>
           <a:bodyPr/>
-          <a:lstStyle>
-            <a:lvl1pPr marL="0" indent="0">
-              <a:buNone/>
-              <a:defRPr sz="1400"/>
-            </a:lvl1pPr>
-            <a:lvl2pPr marL="457200" indent="0">
-              <a:buNone/>
-              <a:defRPr sz="1200"/>
-            </a:lvl2pPr>
-            <a:lvl3pPr marL="914400" indent="0">
-              <a:buNone/>
-              <a:defRPr sz="1000"/>
-            </a:lvl3pPr>
-            <a:lvl4pPr marL="1371600" indent="0">
-              <a:buNone/>
-              <a:defRPr sz="900"/>
-            </a:lvl4pPr>
-            <a:lvl5pPr marL="1828800" indent="0">
-              <a:buNone/>
-              <a:defRPr sz="900"/>
-            </a:lvl5pPr>
-            <a:lvl6pPr marL="2286000" indent="0">
-              <a:buNone/>
-              <a:defRPr sz="900"/>
-            </a:lvl6pPr>
-            <a:lvl7pPr marL="2743200" indent="0">
-              <a:buNone/>
-              <a:defRPr sz="900"/>
-            </a:lvl7pPr>
-            <a:lvl8pPr marL="3200400" indent="0">
-              <a:buNone/>
-              <a:defRPr sz="900"/>
-            </a:lvl8pPr>
-            <a:lvl9pPr marL="3657600" indent="0">
-              <a:buNone/>
-              <a:defRPr sz="900"/>
-            </a:lvl9pPr>
-          </a:lstStyle>
-          <a:p>
-            <a:pPr lvl="0"/>
-            <a:r>
+          <a:lstStyle/>
+          <a:p>
+            <a:fld id="{BFEE0B1E-0265-4A1F-BC7A-6348E5ABEDCD}" type="datetime1">
               <a:rPr lang="en-US" smtClean="0"/>
-              <a:t>Click to edit Master text styles</a:t>
-            </a:r>
-          </a:p>
-        </p:txBody>
-      </p:sp>
-      <p:sp>
-        <p:nvSpPr>
-          <p:cNvPr id="5" name="Date Placeholder 4"/>
-          <p:cNvSpPr>
-            <a:spLocks noGrp="1"/>
-          </p:cNvSpPr>
-          <p:nvPr>
-            <p:ph type="dt" sz="half" idx="10"/>
-          </p:nvPr>
-        </p:nvSpPr>
-        <p:spPr/>
-        <p:txBody>
-          <a:bodyPr/>
-          <a:lstStyle/>
-          <a:p>
-            <a:fld id="{5BCAD085-E8A6-8845-BD4E-CB4CCA059FC4}" type="datetimeFigureOut">
-              <a:rPr lang="en-US" smtClean="0"/>
-              <a:t>1/27/13</a:t>
+              <a:t>6/10/2026</a:t>
             </a:fld>
             <a:endParaRPr lang="en-US"/>
           </a:p>
@@ -2569,7 +3337,7 @@
     </p:spTree>
     <p:extLst>
       <p:ext uri="{BB962C8B-B14F-4D97-AF65-F5344CB8AC3E}">
-        <p14:creationId xmlns:p14="http://schemas.microsoft.com/office/powerpoint/2010/main" val="3889236939"/>
+        <p14:creationId xmlns:p14="http://schemas.microsoft.com/office/powerpoint/2010/main" val="3264592300"/>
       </p:ext>
     </p:extLst>
   </p:cSld>
@@ -2583,9 +3351,12 @@
 <p:sldMaster xmlns:a="http://schemas.openxmlformats.org/drawingml/2006/main" xmlns:r="http://schemas.openxmlformats.org/officeDocument/2006/relationships" xmlns:p="http://schemas.openxmlformats.org/presentationml/2006/main">
   <p:cSld>
     <p:bg>
-      <p:bgRef idx="1001">
-        <a:schemeClr val="bg1"/>
-      </p:bgRef>
+      <p:bgPr>
+        <a:solidFill>
+          <a:schemeClr val="bg1"/>
+        </a:solidFill>
+        <a:effectLst/>
+      </p:bgPr>
     </p:bg>
     <p:spTree>
       <p:nvGrpSpPr>
@@ -2613,8 +3384,8 @@
         </p:nvSpPr>
         <p:spPr>
           <a:xfrm>
-            <a:off x="457200" y="274638"/>
-            <a:ext cx="8229600" cy="1143000"/>
+            <a:off x="837982" y="365126"/>
+            <a:ext cx="10512862" cy="1325563"/>
           </a:xfrm>
           <a:prstGeom prst="rect">
             <a:avLst/>
@@ -2627,10 +3398,10 @@
           <a:lstStyle/>
           <a:p>
             <a:r>
-              <a:rPr lang="en-US" smtClean="0"/>
+              <a:rPr lang="en-US"/>
               <a:t>Click to edit Master title style</a:t>
             </a:r>
-            <a:endParaRPr lang="en-US"/>
+            <a:endParaRPr lang="en-US" dirty="0"/>
           </a:p>
         </p:txBody>
       </p:sp>
@@ -2646,8 +3417,8 @@
         </p:nvSpPr>
         <p:spPr>
           <a:xfrm>
-            <a:off x="457200" y="1600200"/>
-            <a:ext cx="8229600" cy="4525963"/>
+            <a:off x="837982" y="1825625"/>
+            <a:ext cx="10512862" cy="4351338"/>
           </a:xfrm>
           <a:prstGeom prst="rect">
             <a:avLst/>
@@ -2661,38 +3432,38 @@
           <a:p>
             <a:pPr lvl="0"/>
             <a:r>
-              <a:rPr lang="en-US" smtClean="0"/>
+              <a:rPr lang="en-US"/>
               <a:t>Click to edit Master text styles</a:t>
             </a:r>
           </a:p>
           <a:p>
             <a:pPr lvl="1"/>
             <a:r>
-              <a:rPr lang="en-US" smtClean="0"/>
+              <a:rPr lang="en-US"/>
               <a:t>Second level</a:t>
             </a:r>
           </a:p>
           <a:p>
             <a:pPr lvl="2"/>
             <a:r>
-              <a:rPr lang="en-US" smtClean="0"/>
+              <a:rPr lang="en-US"/>
               <a:t>Third level</a:t>
             </a:r>
           </a:p>
           <a:p>
             <a:pPr lvl="3"/>
             <a:r>
-              <a:rPr lang="en-US" smtClean="0"/>
+              <a:rPr lang="en-US"/>
               <a:t>Fourth level</a:t>
             </a:r>
           </a:p>
           <a:p>
             <a:pPr lvl="4"/>
             <a:r>
-              <a:rPr lang="en-US" smtClean="0"/>
+              <a:rPr lang="en-US"/>
               <a:t>Fifth level</a:t>
             </a:r>
-            <a:endParaRPr lang="en-US"/>
+            <a:endParaRPr lang="en-US" dirty="0"/>
           </a:p>
         </p:txBody>
       </p:sp>
@@ -2708,8 +3479,8 @@
         </p:nvSpPr>
         <p:spPr>
           <a:xfrm>
-            <a:off x="457200" y="6356350"/>
-            <a:ext cx="2133600" cy="365125"/>
+            <a:off x="837982" y="6356351"/>
+            <a:ext cx="2742486" cy="365125"/>
           </a:xfrm>
           <a:prstGeom prst="rect">
             <a:avLst/>
@@ -2722,16 +3493,16 @@
               <a:defRPr sz="1200">
                 <a:solidFill>
                   <a:schemeClr val="tx1">
-                    <a:tint val="75000"/>
+                    <a:tint val="82000"/>
                   </a:schemeClr>
                 </a:solidFill>
               </a:defRPr>
             </a:lvl1pPr>
           </a:lstStyle>
           <a:p>
-            <a:fld id="{5BCAD085-E8A6-8845-BD4E-CB4CCA059FC4}" type="datetimeFigureOut">
+            <a:fld id="{E038131C-9088-4063-8E42-7BF7D1259B13}" type="datetime1">
               <a:rPr lang="en-US" smtClean="0"/>
-              <a:t>1/27/13</a:t>
+              <a:t>6/10/2026</a:t>
             </a:fld>
             <a:endParaRPr lang="en-US"/>
           </a:p>
@@ -2749,8 +3520,8 @@
         </p:nvSpPr>
         <p:spPr>
           <a:xfrm>
-            <a:off x="3124200" y="6356350"/>
-            <a:ext cx="2895600" cy="365125"/>
+            <a:off x="4037549" y="6356351"/>
+            <a:ext cx="4113728" cy="365125"/>
           </a:xfrm>
           <a:prstGeom prst="rect">
             <a:avLst/>
@@ -2763,7 +3534,7 @@
               <a:defRPr sz="1200">
                 <a:solidFill>
                   <a:schemeClr val="tx1">
-                    <a:tint val="75000"/>
+                    <a:tint val="82000"/>
                   </a:schemeClr>
                 </a:solidFill>
               </a:defRPr>
@@ -2786,8 +3557,8 @@
         </p:nvSpPr>
         <p:spPr>
           <a:xfrm>
-            <a:off x="6553200" y="6356350"/>
-            <a:ext cx="2133600" cy="365125"/>
+            <a:off x="8608357" y="6356351"/>
+            <a:ext cx="2742486" cy="365125"/>
           </a:xfrm>
           <a:prstGeom prst="rect">
             <a:avLst/>
@@ -2800,7 +3571,7 @@
               <a:defRPr sz="1200">
                 <a:solidFill>
                   <a:schemeClr val="tx1">
-                    <a:tint val="75000"/>
+                    <a:tint val="82000"/>
                   </a:schemeClr>
                 </a:solidFill>
               </a:defRPr>
@@ -2818,32 +3589,36 @@
     </p:spTree>
     <p:extLst>
       <p:ext uri="{BB962C8B-B14F-4D97-AF65-F5344CB8AC3E}">
-        <p14:creationId xmlns:p14="http://schemas.microsoft.com/office/powerpoint/2010/main" val="2209977519"/>
+        <p14:creationId xmlns:p14="http://schemas.microsoft.com/office/powerpoint/2010/main" val="2336663901"/>
       </p:ext>
     </p:extLst>
   </p:cSld>
   <p:clrMap bg1="lt1" tx1="dk1" bg2="lt2" tx2="dk2" accent1="accent1" accent2="accent2" accent3="accent3" accent4="accent4" accent5="accent5" accent6="accent6" hlink="hlink" folHlink="folHlink"/>
   <p:sldLayoutIdLst>
-    <p:sldLayoutId id="2147483649" r:id="rId1"/>
-    <p:sldLayoutId id="2147483650" r:id="rId2"/>
-    <p:sldLayoutId id="2147483651" r:id="rId3"/>
-    <p:sldLayoutId id="2147483652" r:id="rId4"/>
-    <p:sldLayoutId id="2147483653" r:id="rId5"/>
-    <p:sldLayoutId id="2147483654" r:id="rId6"/>
-    <p:sldLayoutId id="2147483655" r:id="rId7"/>
-    <p:sldLayoutId id="2147483656" r:id="rId8"/>
-    <p:sldLayoutId id="2147483657" r:id="rId9"/>
-    <p:sldLayoutId id="2147483658" r:id="rId10"/>
-    <p:sldLayoutId id="2147483659" r:id="rId11"/>
+    <p:sldLayoutId id="2147483733" r:id="rId1"/>
+    <p:sldLayoutId id="2147483734" r:id="rId2"/>
+    <p:sldLayoutId id="2147483735" r:id="rId3"/>
+    <p:sldLayoutId id="2147483736" r:id="rId4"/>
+    <p:sldLayoutId id="2147483737" r:id="rId5"/>
+    <p:sldLayoutId id="2147483738" r:id="rId6"/>
+    <p:sldLayoutId id="2147483739" r:id="rId7"/>
+    <p:sldLayoutId id="2147483740" r:id="rId8"/>
+    <p:sldLayoutId id="2147483741" r:id="rId9"/>
+    <p:sldLayoutId id="2147483742" r:id="rId10"/>
+    <p:sldLayoutId id="2147483743" r:id="rId11"/>
   </p:sldLayoutIdLst>
+  <p:hf sldNum="0" hdr="0" ftr="0" dt="0"/>
   <p:txStyles>
     <p:titleStyle>
-      <a:lvl1pPr algn="ctr" defTabSz="457200" rtl="0" eaLnBrk="1" latinLnBrk="0" hangingPunct="1">
+      <a:lvl1pPr algn="l" defTabSz="914126" rtl="0" eaLnBrk="1" latinLnBrk="0" hangingPunct="1">
+        <a:lnSpc>
+          <a:spcPct val="90000"/>
+        </a:lnSpc>
         <a:spcBef>
           <a:spcPct val="0"/>
         </a:spcBef>
         <a:buNone/>
-        <a:defRPr sz="4400" kern="1200">
+        <a:defRPr sz="4399" kern="1200">
           <a:solidFill>
             <a:schemeClr val="tx1"/>
           </a:solidFill>
@@ -2854,13 +3629,16 @@
       </a:lvl1pPr>
     </p:titleStyle>
     <p:bodyStyle>
-      <a:lvl1pPr marL="342900" indent="-342900" algn="l" defTabSz="457200" rtl="0" eaLnBrk="1" latinLnBrk="0" hangingPunct="1">
+      <a:lvl1pPr marL="228531" indent="-228531" algn="l" defTabSz="914126" rtl="0" eaLnBrk="1" latinLnBrk="0" hangingPunct="1">
+        <a:lnSpc>
+          <a:spcPct val="90000"/>
+        </a:lnSpc>
         <a:spcBef>
-          <a:spcPct val="20000"/>
+          <a:spcPts val="1000"/>
         </a:spcBef>
-        <a:buFont typeface="Arial"/>
+        <a:buFont typeface="Arial" panose="020B0604020202020204" pitchFamily="34" charset="0"/>
         <a:buChar char="•"/>
-        <a:defRPr sz="3200" kern="1200">
+        <a:defRPr sz="2799" kern="1200">
           <a:solidFill>
             <a:schemeClr val="tx1"/>
           </a:solidFill>
@@ -2869,13 +3647,16 @@
           <a:cs typeface="+mn-cs"/>
         </a:defRPr>
       </a:lvl1pPr>
-      <a:lvl2pPr marL="742950" indent="-285750" algn="l" defTabSz="457200" rtl="0" eaLnBrk="1" latinLnBrk="0" hangingPunct="1">
+      <a:lvl2pPr marL="685594" indent="-228531" algn="l" defTabSz="914126" rtl="0" eaLnBrk="1" latinLnBrk="0" hangingPunct="1">
+        <a:lnSpc>
+          <a:spcPct val="90000"/>
+        </a:lnSpc>
         <a:spcBef>
-          <a:spcPct val="20000"/>
+          <a:spcPts val="500"/>
         </a:spcBef>
-        <a:buFont typeface="Arial"/>
-        <a:buChar char="–"/>
-        <a:defRPr sz="2800" kern="1200">
+        <a:buFont typeface="Arial" panose="020B0604020202020204" pitchFamily="34" charset="0"/>
+        <a:buChar char="•"/>
+        <a:defRPr sz="2399" kern="1200">
           <a:solidFill>
             <a:schemeClr val="tx1"/>
           </a:solidFill>
@@ -2884,13 +3665,16 @@
           <a:cs typeface="+mn-cs"/>
         </a:defRPr>
       </a:lvl2pPr>
-      <a:lvl3pPr marL="1143000" indent="-228600" algn="l" defTabSz="457200" rtl="0" eaLnBrk="1" latinLnBrk="0" hangingPunct="1">
+      <a:lvl3pPr marL="1142657" indent="-228531" algn="l" defTabSz="914126" rtl="0" eaLnBrk="1" latinLnBrk="0" hangingPunct="1">
+        <a:lnSpc>
+          <a:spcPct val="90000"/>
+        </a:lnSpc>
         <a:spcBef>
-          <a:spcPct val="20000"/>
+          <a:spcPts val="500"/>
         </a:spcBef>
-        <a:buFont typeface="Arial"/>
+        <a:buFont typeface="Arial" panose="020B0604020202020204" pitchFamily="34" charset="0"/>
         <a:buChar char="•"/>
-        <a:defRPr sz="2400" kern="1200">
+        <a:defRPr sz="1999" kern="1200">
           <a:solidFill>
             <a:schemeClr val="tx1"/>
           </a:solidFill>
@@ -2899,13 +3683,16 @@
           <a:cs typeface="+mn-cs"/>
         </a:defRPr>
       </a:lvl3pPr>
-      <a:lvl4pPr marL="1600200" indent="-228600" algn="l" defTabSz="457200" rtl="0" eaLnBrk="1" latinLnBrk="0" hangingPunct="1">
+      <a:lvl4pPr marL="1599720" indent="-228531" algn="l" defTabSz="914126" rtl="0" eaLnBrk="1" latinLnBrk="0" hangingPunct="1">
+        <a:lnSpc>
+          <a:spcPct val="90000"/>
+        </a:lnSpc>
         <a:spcBef>
-          <a:spcPct val="20000"/>
+          <a:spcPts val="500"/>
         </a:spcBef>
-        <a:buFont typeface="Arial"/>
-        <a:buChar char="–"/>
-        <a:defRPr sz="2000" kern="1200">
+        <a:buFont typeface="Arial" panose="020B0604020202020204" pitchFamily="34" charset="0"/>
+        <a:buChar char="•"/>
+        <a:defRPr sz="1799" kern="1200">
           <a:solidFill>
             <a:schemeClr val="tx1"/>
           </a:solidFill>
@@ -2914,13 +3701,16 @@
           <a:cs typeface="+mn-cs"/>
         </a:defRPr>
       </a:lvl4pPr>
-      <a:lvl5pPr marL="2057400" indent="-228600" algn="l" defTabSz="457200" rtl="0" eaLnBrk="1" latinLnBrk="0" hangingPunct="1">
+      <a:lvl5pPr marL="2056783" indent="-228531" algn="l" defTabSz="914126" rtl="0" eaLnBrk="1" latinLnBrk="0" hangingPunct="1">
+        <a:lnSpc>
+          <a:spcPct val="90000"/>
+        </a:lnSpc>
         <a:spcBef>
-          <a:spcPct val="20000"/>
+          <a:spcPts val="500"/>
         </a:spcBef>
-        <a:buFont typeface="Arial"/>
-        <a:buChar char="»"/>
-        <a:defRPr sz="2000" kern="1200">
+        <a:buFont typeface="Arial" panose="020B0604020202020204" pitchFamily="34" charset="0"/>
+        <a:buChar char="•"/>
+        <a:defRPr sz="1799" kern="1200">
           <a:solidFill>
             <a:schemeClr val="tx1"/>
           </a:solidFill>
@@ -2929,13 +3719,16 @@
           <a:cs typeface="+mn-cs"/>
         </a:defRPr>
       </a:lvl5pPr>
-      <a:lvl6pPr marL="2514600" indent="-228600" algn="l" defTabSz="457200" rtl="0" eaLnBrk="1" latinLnBrk="0" hangingPunct="1">
+      <a:lvl6pPr marL="2513846" indent="-228531" algn="l" defTabSz="914126" rtl="0" eaLnBrk="1" latinLnBrk="0" hangingPunct="1">
+        <a:lnSpc>
+          <a:spcPct val="90000"/>
+        </a:lnSpc>
         <a:spcBef>
-          <a:spcPct val="20000"/>
+          <a:spcPts val="500"/>
         </a:spcBef>
-        <a:buFont typeface="Arial"/>
+        <a:buFont typeface="Arial" panose="020B0604020202020204" pitchFamily="34" charset="0"/>
         <a:buChar char="•"/>
-        <a:defRPr sz="2000" kern="1200">
+        <a:defRPr sz="1799" kern="1200">
           <a:solidFill>
             <a:schemeClr val="tx1"/>
           </a:solidFill>
@@ -2944,13 +3737,16 @@
           <a:cs typeface="+mn-cs"/>
         </a:defRPr>
       </a:lvl6pPr>
-      <a:lvl7pPr marL="2971800" indent="-228600" algn="l" defTabSz="457200" rtl="0" eaLnBrk="1" latinLnBrk="0" hangingPunct="1">
+      <a:lvl7pPr marL="2970908" indent="-228531" algn="l" defTabSz="914126" rtl="0" eaLnBrk="1" latinLnBrk="0" hangingPunct="1">
+        <a:lnSpc>
+          <a:spcPct val="90000"/>
+        </a:lnSpc>
         <a:spcBef>
-          <a:spcPct val="20000"/>
+          <a:spcPts val="500"/>
         </a:spcBef>
-        <a:buFont typeface="Arial"/>
+        <a:buFont typeface="Arial" panose="020B0604020202020204" pitchFamily="34" charset="0"/>
         <a:buChar char="•"/>
-        <a:defRPr sz="2000" kern="1200">
+        <a:defRPr sz="1799" kern="1200">
           <a:solidFill>
             <a:schemeClr val="tx1"/>
           </a:solidFill>
@@ -2959,13 +3755,16 @@
           <a:cs typeface="+mn-cs"/>
         </a:defRPr>
       </a:lvl7pPr>
-      <a:lvl8pPr marL="3429000" indent="-228600" algn="l" defTabSz="457200" rtl="0" eaLnBrk="1" latinLnBrk="0" hangingPunct="1">
+      <a:lvl8pPr marL="3427971" indent="-228531" algn="l" defTabSz="914126" rtl="0" eaLnBrk="1" latinLnBrk="0" hangingPunct="1">
+        <a:lnSpc>
+          <a:spcPct val="90000"/>
+        </a:lnSpc>
         <a:spcBef>
-          <a:spcPct val="20000"/>
+          <a:spcPts val="500"/>
         </a:spcBef>
-        <a:buFont typeface="Arial"/>
+        <a:buFont typeface="Arial" panose="020B0604020202020204" pitchFamily="34" charset="0"/>
         <a:buChar char="•"/>
-        <a:defRPr sz="2000" kern="1200">
+        <a:defRPr sz="1799" kern="1200">
           <a:solidFill>
             <a:schemeClr val="tx1"/>
           </a:solidFill>
@@ -2974,13 +3773,16 @@
           <a:cs typeface="+mn-cs"/>
         </a:defRPr>
       </a:lvl8pPr>
-      <a:lvl9pPr marL="3886200" indent="-228600" algn="l" defTabSz="457200" rtl="0" eaLnBrk="1" latinLnBrk="0" hangingPunct="1">
+      <a:lvl9pPr marL="3885034" indent="-228531" algn="l" defTabSz="914126" rtl="0" eaLnBrk="1" latinLnBrk="0" hangingPunct="1">
+        <a:lnSpc>
+          <a:spcPct val="90000"/>
+        </a:lnSpc>
         <a:spcBef>
-          <a:spcPct val="20000"/>
+          <a:spcPts val="500"/>
         </a:spcBef>
-        <a:buFont typeface="Arial"/>
+        <a:buFont typeface="Arial" panose="020B0604020202020204" pitchFamily="34" charset="0"/>
         <a:buChar char="•"/>
-        <a:defRPr sz="2000" kern="1200">
+        <a:defRPr sz="1799" kern="1200">
           <a:solidFill>
             <a:schemeClr val="tx1"/>
           </a:solidFill>
@@ -2994,8 +3796,8 @@
       <a:defPPr>
         <a:defRPr lang="en-US"/>
       </a:defPPr>
-      <a:lvl1pPr marL="0" algn="l" defTabSz="457200" rtl="0" eaLnBrk="1" latinLnBrk="0" hangingPunct="1">
-        <a:defRPr sz="1800" kern="1200">
+      <a:lvl1pPr marL="0" algn="l" defTabSz="914126" rtl="0" eaLnBrk="1" latinLnBrk="0" hangingPunct="1">
+        <a:defRPr sz="1799" kern="1200">
           <a:solidFill>
             <a:schemeClr val="tx1"/>
           </a:solidFill>
@@ -3004,8 +3806,8 @@
           <a:cs typeface="+mn-cs"/>
         </a:defRPr>
       </a:lvl1pPr>
-      <a:lvl2pPr marL="457200" algn="l" defTabSz="457200" rtl="0" eaLnBrk="1" latinLnBrk="0" hangingPunct="1">
-        <a:defRPr sz="1800" kern="1200">
+      <a:lvl2pPr marL="457063" algn="l" defTabSz="914126" rtl="0" eaLnBrk="1" latinLnBrk="0" hangingPunct="1">
+        <a:defRPr sz="1799" kern="1200">
           <a:solidFill>
             <a:schemeClr val="tx1"/>
           </a:solidFill>
@@ -3014,8 +3816,8 @@
           <a:cs typeface="+mn-cs"/>
         </a:defRPr>
       </a:lvl2pPr>
-      <a:lvl3pPr marL="914400" algn="l" defTabSz="457200" rtl="0" eaLnBrk="1" latinLnBrk="0" hangingPunct="1">
-        <a:defRPr sz="1800" kern="1200">
+      <a:lvl3pPr marL="914126" algn="l" defTabSz="914126" rtl="0" eaLnBrk="1" latinLnBrk="0" hangingPunct="1">
+        <a:defRPr sz="1799" kern="1200">
           <a:solidFill>
             <a:schemeClr val="tx1"/>
           </a:solidFill>
@@ -3024,8 +3826,8 @@
           <a:cs typeface="+mn-cs"/>
         </a:defRPr>
       </a:lvl3pPr>
-      <a:lvl4pPr marL="1371600" algn="l" defTabSz="457200" rtl="0" eaLnBrk="1" latinLnBrk="0" hangingPunct="1">
-        <a:defRPr sz="1800" kern="1200">
+      <a:lvl4pPr marL="1371189" algn="l" defTabSz="914126" rtl="0" eaLnBrk="1" latinLnBrk="0" hangingPunct="1">
+        <a:defRPr sz="1799" kern="1200">
           <a:solidFill>
             <a:schemeClr val="tx1"/>
           </a:solidFill>
@@ -3034,8 +3836,8 @@
           <a:cs typeface="+mn-cs"/>
         </a:defRPr>
       </a:lvl4pPr>
-      <a:lvl5pPr marL="1828800" algn="l" defTabSz="457200" rtl="0" eaLnBrk="1" latinLnBrk="0" hangingPunct="1">
-        <a:defRPr sz="1800" kern="1200">
+      <a:lvl5pPr marL="1828251" algn="l" defTabSz="914126" rtl="0" eaLnBrk="1" latinLnBrk="0" hangingPunct="1">
+        <a:defRPr sz="1799" kern="1200">
           <a:solidFill>
             <a:schemeClr val="tx1"/>
           </a:solidFill>
@@ -3044,8 +3846,8 @@
           <a:cs typeface="+mn-cs"/>
         </a:defRPr>
       </a:lvl5pPr>
-      <a:lvl6pPr marL="2286000" algn="l" defTabSz="457200" rtl="0" eaLnBrk="1" latinLnBrk="0" hangingPunct="1">
-        <a:defRPr sz="1800" kern="1200">
+      <a:lvl6pPr marL="2285314" algn="l" defTabSz="914126" rtl="0" eaLnBrk="1" latinLnBrk="0" hangingPunct="1">
+        <a:defRPr sz="1799" kern="1200">
           <a:solidFill>
             <a:schemeClr val="tx1"/>
           </a:solidFill>
@@ -3054,8 +3856,8 @@
           <a:cs typeface="+mn-cs"/>
         </a:defRPr>
       </a:lvl6pPr>
-      <a:lvl7pPr marL="2743200" algn="l" defTabSz="457200" rtl="0" eaLnBrk="1" latinLnBrk="0" hangingPunct="1">
-        <a:defRPr sz="1800" kern="1200">
+      <a:lvl7pPr marL="2742377" algn="l" defTabSz="914126" rtl="0" eaLnBrk="1" latinLnBrk="0" hangingPunct="1">
+        <a:defRPr sz="1799" kern="1200">
           <a:solidFill>
             <a:schemeClr val="tx1"/>
           </a:solidFill>
@@ -3064,8 +3866,8 @@
           <a:cs typeface="+mn-cs"/>
         </a:defRPr>
       </a:lvl7pPr>
-      <a:lvl8pPr marL="3200400" algn="l" defTabSz="457200" rtl="0" eaLnBrk="1" latinLnBrk="0" hangingPunct="1">
-        <a:defRPr sz="1800" kern="1200">
+      <a:lvl8pPr marL="3199440" algn="l" defTabSz="914126" rtl="0" eaLnBrk="1" latinLnBrk="0" hangingPunct="1">
+        <a:defRPr sz="1799" kern="1200">
           <a:solidFill>
             <a:schemeClr val="tx1"/>
           </a:solidFill>
@@ -3074,8 +3876,8 @@
           <a:cs typeface="+mn-cs"/>
         </a:defRPr>
       </a:lvl8pPr>
-      <a:lvl9pPr marL="3657600" algn="l" defTabSz="457200" rtl="0" eaLnBrk="1" latinLnBrk="0" hangingPunct="1">
-        <a:defRPr sz="1800" kern="1200">
+      <a:lvl9pPr marL="3656503" algn="l" defTabSz="914126" rtl="0" eaLnBrk="1" latinLnBrk="0" hangingPunct="1">
+        <a:defRPr sz="1799" kern="1200">
           <a:solidFill>
             <a:schemeClr val="tx1"/>
           </a:solidFill>
@@ -3090,7 +3892,7 @@
 </file>
 
 <file path=ppt/slides/slide1.xml><?xml version="1.0" encoding="utf-8"?>
-<p:sld xmlns:a="http://schemas.openxmlformats.org/drawingml/2006/main" xmlns:p="http://schemas.openxmlformats.org/presentationml/2006/main" xmlns:r="http://schemas.openxmlformats.org/officeDocument/2006/relationships">
+<p:sld xmlns:a="http://schemas.openxmlformats.org/drawingml/2006/main" xmlns:r="http://schemas.openxmlformats.org/officeDocument/2006/relationships" xmlns:p="http://schemas.openxmlformats.org/presentationml/2006/main">
   <p:cSld>
     <p:spTree>
       <p:nvGrpSpPr>
@@ -3098,7 +3900,14 @@
         <p:cNvGrpSpPr/>
         <p:nvPr/>
       </p:nvGrpSpPr>
-      <p:grpSpPr/>
+      <p:grpSpPr>
+        <a:xfrm>
+          <a:off x="0" y="0"/>
+          <a:ext cx="0" cy="0"/>
+          <a:chOff x="0" y="0"/>
+          <a:chExt cx="0" cy="0"/>
+        </a:xfrm>
+      </p:grpSpPr>
       <p:sp>
         <p:nvSpPr>
           <p:cNvPr id="2" name="Title 1"/>
@@ -3109,19 +3918,63 @@
             <p:ph type="ctrTitle"/>
           </p:nvPr>
         </p:nvSpPr>
-        <p:spPr/>
-        <p:txBody>
-          <a:bodyPr/>
-          <a:lstStyle/>
-          <a:p>
-            <a:r>
-              <a:rPr sz="4000">
+        <p:spPr>
+          <a:xfrm>
+            <a:off x="1177413" y="157932"/>
+            <a:ext cx="9225116" cy="2565604"/>
+          </a:xfrm>
+        </p:spPr>
+        <p:txBody>
+          <a:bodyPr>
+            <a:normAutofit/>
+          </a:bodyPr>
+          <a:lstStyle/>
+          <a:p>
+            <a:r>
+              <a:rPr sz="6000" b="1" u="sng" dirty="0" err="1">
                 <a:solidFill>
-                  <a:srgbClr val="1B4F9B"/>
+                  <a:srgbClr val="0070C0"/>
                 </a:solidFill>
               </a:rPr>
-              <a:t>Bluestock Fintech</a:t>
-            </a:r>
+              <a:t>Bluestoc</a:t>
+            </a:r>
+            <a:r>
+              <a:rPr lang="en-IN" sz="6000" b="1" u="sng" dirty="0">
+                <a:solidFill>
+                  <a:srgbClr val="0070C0"/>
+                </a:solidFill>
+              </a:rPr>
+              <a:t>k</a:t>
+            </a:r>
+            <a:r>
+              <a:rPr lang="en-IN" sz="6000" b="1" dirty="0">
+                <a:solidFill>
+                  <a:srgbClr val="0070C0"/>
+                </a:solidFill>
+              </a:rPr>
+              <a:t> </a:t>
+            </a:r>
+            <a:r>
+              <a:rPr sz="6000" b="1" dirty="0">
+                <a:solidFill>
+                  <a:srgbClr val="0070C0"/>
+                </a:solidFill>
+              </a:rPr>
+              <a:t>Fintech</a:t>
+            </a:r>
+            <a:r>
+              <a:rPr lang="en-IN" sz="6000" b="1" dirty="0">
+                <a:solidFill>
+                  <a:srgbClr val="0070C0"/>
+                </a:solidFill>
+              </a:rPr>
+              <a:t> </a:t>
+            </a:r>
+            <a:endParaRPr sz="6000" b="1" dirty="0">
+              <a:solidFill>
+                <a:srgbClr val="0070C0"/>
+              </a:solidFill>
+            </a:endParaRPr>
           </a:p>
         </p:txBody>
       </p:sp>
@@ -3135,17 +3988,24 @@
             <p:ph type="subTitle" idx="1"/>
           </p:nvPr>
         </p:nvSpPr>
-        <p:spPr/>
+        <p:spPr>
+          <a:xfrm>
+            <a:off x="1523603" y="3234814"/>
+            <a:ext cx="9141619" cy="1288026"/>
+          </a:xfrm>
+        </p:spPr>
         <p:txBody>
           <a:bodyPr/>
           <a:lstStyle/>
           <a:p>
             <a:r>
+              <a:rPr dirty="0"/>
               <a:t>Mutual Fund Analytics Platform</a:t>
             </a:r>
           </a:p>
           <a:p>
             <a:r>
+              <a:rPr dirty="0"/>
               <a:t>Capstone Project | June 2026</a:t>
             </a:r>
           </a:p>
@@ -3159,8 +4019,8 @@
         </p:nvSpPr>
         <p:spPr>
           <a:xfrm>
-            <a:off x="914400" y="5486400"/>
-            <a:ext cx="9144000" cy="457200"/>
+            <a:off x="1177412" y="4247535"/>
+            <a:ext cx="8880987" cy="307777"/>
           </a:xfrm>
           <a:prstGeom prst="rect">
             <a:avLst/>
@@ -3181,11 +4041,46 @@
               </a:defRPr>
             </a:pPr>
             <a:r>
-              <a:t>Upputholla Gopi | Data Analyst Intern | VVIT Guntur</a:t>
-            </a:r>
-          </a:p>
-        </p:txBody>
-      </p:sp>
+              <a:rPr dirty="0" err="1"/>
+              <a:t>Upputholla</a:t>
+            </a:r>
+            <a:r>
+              <a:rPr dirty="0"/>
+              <a:t> Gopi | Data Analyst Intern | VVIT Guntur</a:t>
+            </a:r>
+          </a:p>
+        </p:txBody>
+      </p:sp>
+      <p:pic>
+        <p:nvPicPr>
+          <p:cNvPr id="14" name="Picture 13">
+            <a:extLst>
+              <a:ext uri="{FF2B5EF4-FFF2-40B4-BE49-F238E27FC236}">
+                <a16:creationId xmlns:a16="http://schemas.microsoft.com/office/drawing/2014/main" id="{4C2CB761-2C09-9768-EED9-B7F7BE4C4A38}"/>
+              </a:ext>
+            </a:extLst>
+          </p:cNvPr>
+          <p:cNvPicPr>
+            <a:picLocks noChangeAspect="1"/>
+          </p:cNvPicPr>
+          <p:nvPr/>
+        </p:nvPicPr>
+        <p:blipFill>
+          <a:blip r:embed="rId2"/>
+          <a:stretch>
+            <a:fillRect/>
+          </a:stretch>
+        </p:blipFill>
+        <p:spPr>
+          <a:xfrm>
+            <a:off x="9171130" y="157932"/>
+            <a:ext cx="2988183" cy="378504"/>
+          </a:xfrm>
+          <a:prstGeom prst="rect">
+            <a:avLst/>
+          </a:prstGeom>
+        </p:spPr>
+      </p:pic>
     </p:spTree>
   </p:cSld>
   <p:clrMapOvr>
@@ -3195,7 +4090,7 @@
 </file>
 
 <file path=ppt/slides/slide10.xml><?xml version="1.0" encoding="utf-8"?>
-<p:sld xmlns:a="http://schemas.openxmlformats.org/drawingml/2006/main" xmlns:p="http://schemas.openxmlformats.org/presentationml/2006/main" xmlns:r="http://schemas.openxmlformats.org/officeDocument/2006/relationships">
+<p:sld xmlns:a="http://schemas.openxmlformats.org/drawingml/2006/main" xmlns:r="http://schemas.openxmlformats.org/officeDocument/2006/relationships" xmlns:p="http://schemas.openxmlformats.org/presentationml/2006/main">
   <p:cSld>
     <p:spTree>
       <p:nvGrpSpPr>
@@ -3203,7 +4098,14 @@
         <p:cNvGrpSpPr/>
         <p:nvPr/>
       </p:nvGrpSpPr>
-      <p:grpSpPr/>
+      <p:grpSpPr>
+        <a:xfrm>
+          <a:off x="0" y="0"/>
+          <a:ext cx="0" cy="0"/>
+          <a:chOff x="0" y="0"/>
+          <a:chExt cx="0" cy="0"/>
+        </a:xfrm>
+      </p:grpSpPr>
       <p:sp>
         <p:nvSpPr>
           <p:cNvPr id="2" name="Title 1"/>
@@ -3242,7 +4144,9 @@
         </p:nvSpPr>
         <p:spPr/>
         <p:txBody>
-          <a:bodyPr/>
+          <a:bodyPr>
+            <a:normAutofit fontScale="77500" lnSpcReduction="20000"/>
+          </a:bodyPr>
           <a:lstStyle/>
           <a:p>
             <a:r>
@@ -3274,7 +4178,9 @@
               <a:t>• Slicers: State, City Tier (T30/B30)</a:t>
             </a:r>
           </a:p>
-          <a:p/>
+          <a:p>
+            <a:endParaRPr/>
+          </a:p>
           <a:p>
             <a:r>
               <a:t>PAGE 4 — SIP &amp; MARKET TRENDS:</a:t>
@@ -3298,6 +4204,66 @@
           <a:p>
             <a:r>
               <a:t>• Month Slicer for time filtering</a:t>
+            </a:r>
+          </a:p>
+        </p:txBody>
+      </p:sp>
+      <p:sp>
+        <p:nvSpPr>
+          <p:cNvPr id="5" name="Rectangle 4">
+            <a:extLst>
+              <a:ext uri="{FF2B5EF4-FFF2-40B4-BE49-F238E27FC236}">
+                <a16:creationId xmlns:a16="http://schemas.microsoft.com/office/drawing/2014/main" id="{790E2C66-A346-47D8-CC9E-212BBF3991A2}"/>
+              </a:ext>
+            </a:extLst>
+          </p:cNvPr>
+          <p:cNvSpPr/>
+          <p:nvPr/>
+        </p:nvSpPr>
+        <p:spPr>
+          <a:xfrm>
+            <a:off x="3828947" y="6411248"/>
+            <a:ext cx="5289755" cy="446752"/>
+          </a:xfrm>
+          <a:prstGeom prst="rect">
+            <a:avLst/>
+          </a:prstGeom>
+          <a:solidFill>
+            <a:srgbClr val="0070C0">
+              <a:alpha val="21000"/>
+            </a:srgbClr>
+          </a:solidFill>
+        </p:spPr>
+        <p:style>
+          <a:lnRef idx="2">
+            <a:schemeClr val="accent1">
+              <a:shade val="15000"/>
+            </a:schemeClr>
+          </a:lnRef>
+          <a:fillRef idx="1">
+            <a:schemeClr val="accent1"/>
+          </a:fillRef>
+          <a:effectRef idx="0">
+            <a:schemeClr val="accent1"/>
+          </a:effectRef>
+          <a:fontRef idx="minor">
+            <a:schemeClr val="lt1"/>
+          </a:fontRef>
+        </p:style>
+        <p:txBody>
+          <a:bodyPr rtlCol="0" anchor="ctr"/>
+          <a:lstStyle/>
+          <a:p>
+            <a:pPr algn="ctr"/>
+            <a:r>
+              <a:rPr lang="en-IN" dirty="0">
+                <a:solidFill>
+                  <a:schemeClr val="tx2">
+                    <a:alpha val="21000"/>
+                  </a:schemeClr>
+                </a:solidFill>
+              </a:rPr>
+              <a:t>📈 Data Analytics | 📊 Insights | 💹 Mutual Funds</a:t>
             </a:r>
           </a:p>
         </p:txBody>
@@ -3311,7 +4277,7 @@
 </file>
 
 <file path=ppt/slides/slide11.xml><?xml version="1.0" encoding="utf-8"?>
-<p:sld xmlns:a="http://schemas.openxmlformats.org/drawingml/2006/main" xmlns:p="http://schemas.openxmlformats.org/presentationml/2006/main" xmlns:r="http://schemas.openxmlformats.org/officeDocument/2006/relationships">
+<p:sld xmlns:a="http://schemas.openxmlformats.org/drawingml/2006/main" xmlns:r="http://schemas.openxmlformats.org/officeDocument/2006/relationships" xmlns:p="http://schemas.openxmlformats.org/presentationml/2006/main">
   <p:cSld>
     <p:spTree>
       <p:nvGrpSpPr>
@@ -3319,7 +4285,14 @@
         <p:cNvGrpSpPr/>
         <p:nvPr/>
       </p:nvGrpSpPr>
-      <p:grpSpPr/>
+      <p:grpSpPr>
+        <a:xfrm>
+          <a:off x="0" y="0"/>
+          <a:ext cx="0" cy="0"/>
+          <a:chOff x="0" y="0"/>
+          <a:chExt cx="0" cy="0"/>
+        </a:xfrm>
+      </p:grpSpPr>
       <p:sp>
         <p:nvSpPr>
           <p:cNvPr id="2" name="Title 1"/>
@@ -3358,7 +4331,9 @@
         </p:nvSpPr>
         <p:spPr/>
         <p:txBody>
-          <a:bodyPr/>
+          <a:bodyPr>
+            <a:normAutofit fontScale="62500" lnSpcReduction="20000"/>
+          </a:bodyPr>
           <a:lstStyle/>
           <a:p>
             <a:r>
@@ -3390,7 +4365,9 @@
               <a:t>5. B30 cities — untapped growth opportunity</a:t>
             </a:r>
           </a:p>
-          <a:p/>
+          <a:p>
+            <a:endParaRPr/>
+          </a:p>
           <a:p>
             <a:r>
               <a:t>RECOMMENDATIONS:</a:t>
@@ -3419,6 +4396,66 @@
           <a:p>
             <a:r>
               <a:t>• Re-engage at-risk SIP investors (gap &gt; 35 days)</a:t>
+            </a:r>
+          </a:p>
+        </p:txBody>
+      </p:sp>
+      <p:sp>
+        <p:nvSpPr>
+          <p:cNvPr id="5" name="Rectangle 4">
+            <a:extLst>
+              <a:ext uri="{FF2B5EF4-FFF2-40B4-BE49-F238E27FC236}">
+                <a16:creationId xmlns:a16="http://schemas.microsoft.com/office/drawing/2014/main" id="{4AB71503-CB4E-6562-CDD0-61961C294B52}"/>
+              </a:ext>
+            </a:extLst>
+          </p:cNvPr>
+          <p:cNvSpPr/>
+          <p:nvPr/>
+        </p:nvSpPr>
+        <p:spPr>
+          <a:xfrm>
+            <a:off x="3828947" y="6411248"/>
+            <a:ext cx="5289755" cy="446752"/>
+          </a:xfrm>
+          <a:prstGeom prst="rect">
+            <a:avLst/>
+          </a:prstGeom>
+          <a:solidFill>
+            <a:srgbClr val="0070C0">
+              <a:alpha val="21000"/>
+            </a:srgbClr>
+          </a:solidFill>
+        </p:spPr>
+        <p:style>
+          <a:lnRef idx="2">
+            <a:schemeClr val="accent1">
+              <a:shade val="15000"/>
+            </a:schemeClr>
+          </a:lnRef>
+          <a:fillRef idx="1">
+            <a:schemeClr val="accent1"/>
+          </a:fillRef>
+          <a:effectRef idx="0">
+            <a:schemeClr val="accent1"/>
+          </a:effectRef>
+          <a:fontRef idx="minor">
+            <a:schemeClr val="lt1"/>
+          </a:fontRef>
+        </p:style>
+        <p:txBody>
+          <a:bodyPr rtlCol="0" anchor="ctr"/>
+          <a:lstStyle/>
+          <a:p>
+            <a:pPr algn="ctr"/>
+            <a:r>
+              <a:rPr lang="en-IN" dirty="0">
+                <a:solidFill>
+                  <a:schemeClr val="tx2">
+                    <a:alpha val="21000"/>
+                  </a:schemeClr>
+                </a:solidFill>
+              </a:rPr>
+              <a:t>📈 Data Analytics | 📊 Insights | 💹 Mutual Funds</a:t>
             </a:r>
           </a:p>
         </p:txBody>
@@ -3432,7 +4469,7 @@
 </file>
 
 <file path=ppt/slides/slide12.xml><?xml version="1.0" encoding="utf-8"?>
-<p:sld xmlns:a="http://schemas.openxmlformats.org/drawingml/2006/main" xmlns:p="http://schemas.openxmlformats.org/presentationml/2006/main" xmlns:r="http://schemas.openxmlformats.org/officeDocument/2006/relationships">
+<p:sld xmlns:a="http://schemas.openxmlformats.org/drawingml/2006/main" xmlns:r="http://schemas.openxmlformats.org/officeDocument/2006/relationships" xmlns:p="http://schemas.openxmlformats.org/presentationml/2006/main">
   <p:cSld>
     <p:spTree>
       <p:nvGrpSpPr>
@@ -3440,7 +4477,14 @@
         <p:cNvGrpSpPr/>
         <p:nvPr/>
       </p:nvGrpSpPr>
-      <p:grpSpPr/>
+      <p:grpSpPr>
+        <a:xfrm>
+          <a:off x="0" y="0"/>
+          <a:ext cx="0" cy="0"/>
+          <a:chOff x="0" y="0"/>
+          <a:chExt cx="0" cy="0"/>
+        </a:xfrm>
+      </p:grpSpPr>
       <p:sp>
         <p:nvSpPr>
           <p:cNvPr id="2" name="Title 1"/>
@@ -3451,13 +4495,20 @@
             <p:ph type="ctrTitle"/>
           </p:nvPr>
         </p:nvSpPr>
-        <p:spPr/>
-        <p:txBody>
-          <a:bodyPr/>
-          <a:lstStyle/>
-          <a:p>
-            <a:r>
-              <a:rPr sz="4400">
+        <p:spPr>
+          <a:xfrm>
+            <a:off x="685800" y="1337187"/>
+            <a:ext cx="7772400" cy="501445"/>
+          </a:xfrm>
+        </p:spPr>
+        <p:txBody>
+          <a:bodyPr>
+            <a:normAutofit fontScale="90000"/>
+          </a:bodyPr>
+          <a:lstStyle/>
+          <a:p>
+            <a:r>
+              <a:rPr sz="4400" dirty="0">
                 <a:solidFill>
                   <a:srgbClr val="1B4F9B"/>
                 </a:solidFill>
@@ -3477,28 +4528,150 @@
             <p:ph type="subTitle" idx="1"/>
           </p:nvPr>
         </p:nvSpPr>
-        <p:spPr/>
-        <p:txBody>
-          <a:bodyPr/>
-          <a:lstStyle/>
-          <a:p>
-            <a:r>
-              <a:t>Upputholla Gopi</a:t>
-            </a:r>
-          </a:p>
-          <a:p>
-            <a:r>
-              <a:t>Data Analyst Intern — Bluestock Fintech</a:t>
-            </a:r>
-          </a:p>
-          <a:p>
-            <a:r>
-              <a:t>VVIT, Guntur | June 2026</a:t>
-            </a:r>
-          </a:p>
-          <a:p>
-            <a:r>
-              <a:t>GitHub: github.com/Gopi0311/bluestock_mf_capstone</a:t>
+        <p:spPr>
+          <a:xfrm>
+            <a:off x="1371599" y="2526891"/>
+            <a:ext cx="9925665" cy="3401961"/>
+          </a:xfrm>
+        </p:spPr>
+        <p:txBody>
+          <a:bodyPr>
+            <a:normAutofit/>
+          </a:bodyPr>
+          <a:lstStyle/>
+          <a:p>
+            <a:r>
+              <a:rPr dirty="0" err="1">
+                <a:solidFill>
+                  <a:schemeClr val="tx1"/>
+                </a:solidFill>
+                <a:latin typeface="Arial Black" panose="020B0A04020102020204" pitchFamily="34" charset="0"/>
+              </a:rPr>
+              <a:t>Upputholla</a:t>
+            </a:r>
+            <a:r>
+              <a:rPr dirty="0">
+                <a:solidFill>
+                  <a:schemeClr val="tx1"/>
+                </a:solidFill>
+                <a:latin typeface="Arial Black" panose="020B0A04020102020204" pitchFamily="34" charset="0"/>
+              </a:rPr>
+              <a:t> Gopi</a:t>
+            </a:r>
+          </a:p>
+          <a:p>
+            <a:r>
+              <a:rPr dirty="0">
+                <a:solidFill>
+                  <a:schemeClr val="tx1"/>
+                </a:solidFill>
+              </a:rPr>
+              <a:t>Data Analyst Intern </a:t>
+            </a:r>
+            <a:r>
+              <a:rPr dirty="0"/>
+              <a:t>— </a:t>
+            </a:r>
+            <a:r>
+              <a:rPr dirty="0" err="1">
+                <a:solidFill>
+                  <a:schemeClr val="tx2"/>
+                </a:solidFill>
+              </a:rPr>
+              <a:t>Bluestock</a:t>
+            </a:r>
+            <a:r>
+              <a:rPr dirty="0">
+                <a:solidFill>
+                  <a:schemeClr val="tx2"/>
+                </a:solidFill>
+              </a:rPr>
+              <a:t> Fintech</a:t>
+            </a:r>
+          </a:p>
+          <a:p>
+            <a:r>
+              <a:rPr dirty="0">
+                <a:solidFill>
+                  <a:schemeClr val="accent6"/>
+                </a:solidFill>
+              </a:rPr>
+              <a:t>VVIT, Guntur </a:t>
+            </a:r>
+            <a:r>
+              <a:rPr dirty="0"/>
+              <a:t>| June 2026</a:t>
+            </a:r>
+          </a:p>
+          <a:p>
+            <a:r>
+              <a:rPr dirty="0"/>
+              <a:t>GitHub: github.com/Gopi0311/</a:t>
+            </a:r>
+            <a:r>
+              <a:rPr dirty="0" err="1"/>
+              <a:t>bluestock_mf_capstone</a:t>
+            </a:r>
+            <a:endParaRPr dirty="0"/>
+          </a:p>
+        </p:txBody>
+      </p:sp>
+      <p:sp>
+        <p:nvSpPr>
+          <p:cNvPr id="5" name="Rectangle 4">
+            <a:extLst>
+              <a:ext uri="{FF2B5EF4-FFF2-40B4-BE49-F238E27FC236}">
+                <a16:creationId xmlns:a16="http://schemas.microsoft.com/office/drawing/2014/main" id="{FE2750EB-D34A-E612-10AA-B3A0B54DB5E2}"/>
+              </a:ext>
+            </a:extLst>
+          </p:cNvPr>
+          <p:cNvSpPr/>
+          <p:nvPr/>
+        </p:nvSpPr>
+        <p:spPr>
+          <a:xfrm>
+            <a:off x="3828947" y="6411248"/>
+            <a:ext cx="5289755" cy="446752"/>
+          </a:xfrm>
+          <a:prstGeom prst="rect">
+            <a:avLst/>
+          </a:prstGeom>
+          <a:solidFill>
+            <a:srgbClr val="0070C0">
+              <a:alpha val="21000"/>
+            </a:srgbClr>
+          </a:solidFill>
+        </p:spPr>
+        <p:style>
+          <a:lnRef idx="2">
+            <a:schemeClr val="accent1">
+              <a:shade val="15000"/>
+            </a:schemeClr>
+          </a:lnRef>
+          <a:fillRef idx="1">
+            <a:schemeClr val="accent1"/>
+          </a:fillRef>
+          <a:effectRef idx="0">
+            <a:schemeClr val="accent1"/>
+          </a:effectRef>
+          <a:fontRef idx="minor">
+            <a:schemeClr val="lt1"/>
+          </a:fontRef>
+        </p:style>
+        <p:txBody>
+          <a:bodyPr rtlCol="0" anchor="ctr"/>
+          <a:lstStyle/>
+          <a:p>
+            <a:pPr algn="ctr"/>
+            <a:r>
+              <a:rPr lang="en-IN" dirty="0">
+                <a:solidFill>
+                  <a:schemeClr val="tx2">
+                    <a:alpha val="21000"/>
+                  </a:schemeClr>
+                </a:solidFill>
+              </a:rPr>
+              <a:t>📈 Data Analytics | 📊 Insights | 💹 Mutual Funds</a:t>
             </a:r>
           </a:p>
         </p:txBody>
@@ -3512,7 +4685,7 @@
 </file>
 
 <file path=ppt/slides/slide2.xml><?xml version="1.0" encoding="utf-8"?>
-<p:sld xmlns:a="http://schemas.openxmlformats.org/drawingml/2006/main" xmlns:p="http://schemas.openxmlformats.org/presentationml/2006/main" xmlns:r="http://schemas.openxmlformats.org/officeDocument/2006/relationships">
+<p:sld xmlns:a="http://schemas.openxmlformats.org/drawingml/2006/main" xmlns:r="http://schemas.openxmlformats.org/officeDocument/2006/relationships" xmlns:p="http://schemas.openxmlformats.org/presentationml/2006/main">
   <p:cSld>
     <p:spTree>
       <p:nvGrpSpPr>
@@ -3520,7 +4693,14 @@
         <p:cNvGrpSpPr/>
         <p:nvPr/>
       </p:nvGrpSpPr>
-      <p:grpSpPr/>
+      <p:grpSpPr>
+        <a:xfrm>
+          <a:off x="0" y="0"/>
+          <a:ext cx="0" cy="0"/>
+          <a:chOff x="0" y="0"/>
+          <a:chExt cx="0" cy="0"/>
+        </a:xfrm>
+      </p:grpSpPr>
       <p:sp>
         <p:nvSpPr>
           <p:cNvPr id="2" name="Title 1"/>
@@ -3531,13 +4711,20 @@
             <p:ph type="title"/>
           </p:nvPr>
         </p:nvSpPr>
-        <p:spPr/>
-        <p:txBody>
-          <a:bodyPr/>
-          <a:lstStyle/>
-          <a:p>
-            <a:r>
-              <a:rPr sz="2800" b="1">
+        <p:spPr>
+          <a:xfrm>
+            <a:off x="457200" y="274638"/>
+            <a:ext cx="8229600" cy="197310"/>
+          </a:xfrm>
+        </p:spPr>
+        <p:txBody>
+          <a:bodyPr>
+            <a:normAutofit fontScale="90000"/>
+          </a:bodyPr>
+          <a:lstStyle/>
+          <a:p>
+            <a:r>
+              <a:rPr sz="2800" b="1" dirty="0">
                 <a:solidFill>
                   <a:srgbClr val="1B4F9B"/>
                 </a:solidFill>
@@ -3557,59 +4744,162 @@
             <p:ph idx="1"/>
           </p:nvPr>
         </p:nvSpPr>
-        <p:spPr/>
-        <p:txBody>
-          <a:bodyPr/>
-          <a:lstStyle/>
-          <a:p>
-            <a:r>
-              <a:t>PROBLEMS:</a:t>
-            </a:r>
-          </a:p>
-          <a:p>
-            <a:r>
+        <p:spPr>
+          <a:xfrm>
+            <a:off x="349045" y="616974"/>
+            <a:ext cx="8229600" cy="4525963"/>
+          </a:xfrm>
+        </p:spPr>
+        <p:txBody>
+          <a:bodyPr>
+            <a:normAutofit fontScale="85000" lnSpcReduction="20000"/>
+          </a:bodyPr>
+          <a:lstStyle/>
+          <a:p>
+            <a:r>
+              <a:rPr u="sng" dirty="0">
+                <a:solidFill>
+                  <a:srgbClr val="FF0000"/>
+                </a:solidFill>
+              </a:rPr>
+              <a:t>PROBLEMS</a:t>
+            </a:r>
+            <a:r>
+              <a:rPr dirty="0"/>
+              <a:t>:</a:t>
+            </a:r>
+          </a:p>
+          <a:p>
+            <a:r>
+              <a:rPr dirty="0"/>
               <a:t>• Data Fragmentation — NAV, AUM, SIP data in different formats</a:t>
             </a:r>
           </a:p>
           <a:p>
             <a:r>
+              <a:rPr dirty="0"/>
               <a:t>• No unified platform for risk-adjusted fund comparison</a:t>
             </a:r>
           </a:p>
           <a:p>
             <a:r>
+              <a:rPr dirty="0"/>
               <a:t>• Retail investors cannot track benchmark performance</a:t>
             </a:r>
           </a:p>
           <a:p>
             <a:r>
+              <a:rPr dirty="0"/>
               <a:t>• Static PDF reports — no real-time insights</a:t>
             </a:r>
           </a:p>
-          <a:p/>
-          <a:p>
-            <a:r>
-              <a:t>OBJECTIVES:</a:t>
-            </a:r>
-          </a:p>
-          <a:p>
-            <a:r>
+          <a:p>
+            <a:endParaRPr dirty="0"/>
+          </a:p>
+          <a:p>
+            <a:r>
+              <a:rPr u="sng" dirty="0">
+                <a:solidFill>
+                  <a:srgbClr val="FF0000"/>
+                </a:solidFill>
+              </a:rPr>
+              <a:t>OBJECTIVES</a:t>
+            </a:r>
+            <a:r>
+              <a:rPr dirty="0"/>
+              <a:t>:</a:t>
+            </a:r>
+          </a:p>
+          <a:p>
+            <a:r>
+              <a:rPr dirty="0"/>
               <a:t>• Build automated ETL pipeline from AMFI public data</a:t>
             </a:r>
           </a:p>
           <a:p>
             <a:r>
+              <a:rPr dirty="0"/>
               <a:t>• Design normalized SQL database (star schema)</a:t>
             </a:r>
           </a:p>
           <a:p>
             <a:r>
-              <a:t>• Compute Sharpe, Alpha, Beta, VaR for 40 funds</a:t>
-            </a:r>
-          </a:p>
-          <a:p>
-            <a:r>
+              <a:rPr dirty="0"/>
+              <a:t>• Compute Sharpe, Alpha, Beta, </a:t>
+            </a:r>
+            <a:r>
+              <a:rPr dirty="0" err="1"/>
+              <a:t>VaR</a:t>
+            </a:r>
+            <a:r>
+              <a:rPr dirty="0"/>
+              <a:t> for 40 funds</a:t>
+            </a:r>
+          </a:p>
+          <a:p>
+            <a:r>
+              <a:rPr dirty="0"/>
               <a:t>• Build interactive Power BI dashboard</a:t>
+            </a:r>
+          </a:p>
+        </p:txBody>
+      </p:sp>
+      <p:sp>
+        <p:nvSpPr>
+          <p:cNvPr id="7" name="Rectangle 6">
+            <a:extLst>
+              <a:ext uri="{FF2B5EF4-FFF2-40B4-BE49-F238E27FC236}">
+                <a16:creationId xmlns:a16="http://schemas.microsoft.com/office/drawing/2014/main" id="{D687D9DF-CF9D-7453-12C7-624237032AE4}"/>
+              </a:ext>
+            </a:extLst>
+          </p:cNvPr>
+          <p:cNvSpPr/>
+          <p:nvPr/>
+        </p:nvSpPr>
+        <p:spPr>
+          <a:xfrm>
+            <a:off x="3828947" y="6411248"/>
+            <a:ext cx="5289755" cy="446752"/>
+          </a:xfrm>
+          <a:prstGeom prst="rect">
+            <a:avLst/>
+          </a:prstGeom>
+          <a:solidFill>
+            <a:srgbClr val="0070C0">
+              <a:alpha val="21000"/>
+            </a:srgbClr>
+          </a:solidFill>
+        </p:spPr>
+        <p:style>
+          <a:lnRef idx="2">
+            <a:schemeClr val="accent1">
+              <a:shade val="15000"/>
+            </a:schemeClr>
+          </a:lnRef>
+          <a:fillRef idx="1">
+            <a:schemeClr val="accent1"/>
+          </a:fillRef>
+          <a:effectRef idx="0">
+            <a:schemeClr val="accent1"/>
+          </a:effectRef>
+          <a:fontRef idx="minor">
+            <a:schemeClr val="lt1"/>
+          </a:fontRef>
+        </p:style>
+        <p:txBody>
+          <a:bodyPr rtlCol="0" anchor="ctr"/>
+          <a:lstStyle/>
+          <a:p>
+            <a:pPr algn="ctr"/>
+            <a:r>
+              <a:rPr lang="en-IN" dirty="0">
+                <a:solidFill>
+                  <a:schemeClr val="tx2">
+                    <a:alpha val="21000"/>
+                  </a:schemeClr>
+                </a:solidFill>
+              </a:rPr>
+              <a:t>📈 Data Analytics | 📊 Insights | 💹 Mutual Funds</a:t>
             </a:r>
           </a:p>
         </p:txBody>
@@ -3623,7 +4913,7 @@
 </file>
 
 <file path=ppt/slides/slide3.xml><?xml version="1.0" encoding="utf-8"?>
-<p:sld xmlns:a="http://schemas.openxmlformats.org/drawingml/2006/main" xmlns:p="http://schemas.openxmlformats.org/presentationml/2006/main" xmlns:r="http://schemas.openxmlformats.org/officeDocument/2006/relationships">
+<p:sld xmlns:a="http://schemas.openxmlformats.org/drawingml/2006/main" xmlns:r="http://schemas.openxmlformats.org/officeDocument/2006/relationships" xmlns:p="http://schemas.openxmlformats.org/presentationml/2006/main">
   <p:cSld>
     <p:spTree>
       <p:nvGrpSpPr>
@@ -3631,7 +4921,14 @@
         <p:cNvGrpSpPr/>
         <p:nvPr/>
       </p:nvGrpSpPr>
-      <p:grpSpPr/>
+      <p:grpSpPr>
+        <a:xfrm>
+          <a:off x="0" y="0"/>
+          <a:ext cx="0" cy="0"/>
+          <a:chOff x="0" y="0"/>
+          <a:chExt cx="0" cy="0"/>
+        </a:xfrm>
+      </p:grpSpPr>
       <p:sp>
         <p:nvSpPr>
           <p:cNvPr id="2" name="Title 1"/>
@@ -3642,13 +4939,18 @@
             <p:ph type="title"/>
           </p:nvPr>
         </p:nvSpPr>
-        <p:spPr/>
+        <p:spPr>
+          <a:xfrm>
+            <a:off x="457200" y="274638"/>
+            <a:ext cx="8229600" cy="669259"/>
+          </a:xfrm>
+        </p:spPr>
         <p:txBody>
           <a:bodyPr/>
           <a:lstStyle/>
           <a:p>
             <a:r>
-              <a:rPr sz="2800" b="1">
+              <a:rPr sz="2800" b="1" dirty="0">
                 <a:solidFill>
                   <a:srgbClr val="1B4F9B"/>
                 </a:solidFill>
@@ -3670,61 +4972,121 @@
         </p:nvSpPr>
         <p:spPr/>
         <p:txBody>
-          <a:bodyPr/>
-          <a:lstStyle/>
-          <a:p>
-            <a:r>
-              <a:t>DATA SOURCES:</a:t>
-            </a:r>
-          </a:p>
-          <a:p>
-            <a:r>
+          <a:bodyPr>
+            <a:normAutofit fontScale="85000" lnSpcReduction="20000"/>
+          </a:bodyPr>
+          <a:lstStyle/>
+          <a:p>
+            <a:r>
+              <a:rPr u="sng" dirty="0">
+                <a:solidFill>
+                  <a:srgbClr val="FF0000"/>
+                </a:solidFill>
+              </a:rPr>
+              <a:t>DATA SOURCES</a:t>
+            </a:r>
+            <a:r>
+              <a:rPr dirty="0"/>
+              <a:t>:</a:t>
+            </a:r>
+          </a:p>
+          <a:p>
+            <a:r>
+              <a:rPr dirty="0"/>
               <a:t>• AMFI India — NAV, AUM, SIP, Folio data</a:t>
             </a:r>
           </a:p>
           <a:p>
             <a:r>
+              <a:rPr dirty="0"/>
               <a:t>• mfapi.in — Live NAV API (no auth required)</a:t>
             </a:r>
           </a:p>
           <a:p>
             <a:r>
+              <a:rPr dirty="0"/>
               <a:t>• NSE/BSE — Benchmark index prices</a:t>
             </a:r>
           </a:p>
-          <a:p/>
-          <a:p>
-            <a:r>
-              <a:t>SCALE:</a:t>
-            </a:r>
-          </a:p>
-          <a:p>
-            <a:r>
+          <a:p>
+            <a:endParaRPr dirty="0"/>
+          </a:p>
+          <a:p>
+            <a:r>
+              <a:rPr u="sng" dirty="0">
+                <a:solidFill>
+                  <a:srgbClr val="FF0000"/>
+                </a:solidFill>
+              </a:rPr>
+              <a:t>SCALE</a:t>
+            </a:r>
+            <a:r>
+              <a:rPr dirty="0"/>
+              <a:t>:</a:t>
+            </a:r>
+          </a:p>
+          <a:p>
+            <a:r>
+              <a:rPr dirty="0"/>
               <a:t>• 40 Mutual Fund Schemes across 10 AMCs</a:t>
             </a:r>
           </a:p>
           <a:p>
             <a:r>
+              <a:rPr dirty="0"/>
               <a:t>• 46,000+ Daily NAV records (2022-2026)</a:t>
             </a:r>
           </a:p>
           <a:p>
             <a:r>
+              <a:rPr dirty="0"/>
               <a:t>• 32,000+ Investor Transactions</a:t>
             </a:r>
           </a:p>
           <a:p>
             <a:r>
+              <a:rPr dirty="0"/>
               <a:t>• 8,050 Benchmark Index records</a:t>
             </a:r>
           </a:p>
           <a:p>
             <a:r>
+              <a:rPr dirty="0"/>
               <a:t>• Total: 87,000+ rows of financial data</a:t>
             </a:r>
           </a:p>
         </p:txBody>
       </p:sp>
+      <p:pic>
+        <p:nvPicPr>
+          <p:cNvPr id="6" name="Picture 5">
+            <a:extLst>
+              <a:ext uri="{FF2B5EF4-FFF2-40B4-BE49-F238E27FC236}">
+                <a16:creationId xmlns:a16="http://schemas.microsoft.com/office/drawing/2014/main" id="{0887B34C-F1A2-D93B-830C-DB70EE3AEB56}"/>
+              </a:ext>
+            </a:extLst>
+          </p:cNvPr>
+          <p:cNvPicPr>
+            <a:picLocks noChangeAspect="1"/>
+          </p:cNvPicPr>
+          <p:nvPr/>
+        </p:nvPicPr>
+        <p:blipFill>
+          <a:blip r:embed="rId2"/>
+          <a:stretch>
+            <a:fillRect/>
+          </a:stretch>
+        </p:blipFill>
+        <p:spPr>
+          <a:xfrm>
+            <a:off x="3439374" y="6330356"/>
+            <a:ext cx="5310076" cy="506012"/>
+          </a:xfrm>
+          <a:prstGeom prst="rect">
+            <a:avLst/>
+          </a:prstGeom>
+        </p:spPr>
+      </p:pic>
     </p:spTree>
   </p:cSld>
   <p:clrMapOvr>
@@ -3734,7 +5096,7 @@
 </file>
 
 <file path=ppt/slides/slide4.xml><?xml version="1.0" encoding="utf-8"?>
-<p:sld xmlns:a="http://schemas.openxmlformats.org/drawingml/2006/main" xmlns:p="http://schemas.openxmlformats.org/presentationml/2006/main" xmlns:r="http://schemas.openxmlformats.org/officeDocument/2006/relationships">
+<p:sld xmlns:a="http://schemas.openxmlformats.org/drawingml/2006/main" xmlns:r="http://schemas.openxmlformats.org/officeDocument/2006/relationships" xmlns:p="http://schemas.openxmlformats.org/presentationml/2006/main">
   <p:cSld>
     <p:spTree>
       <p:nvGrpSpPr>
@@ -3742,7 +5104,14 @@
         <p:cNvGrpSpPr/>
         <p:nvPr/>
       </p:nvGrpSpPr>
-      <p:grpSpPr/>
+      <p:grpSpPr>
+        <a:xfrm>
+          <a:off x="0" y="0"/>
+          <a:ext cx="0" cy="0"/>
+          <a:chOff x="0" y="0"/>
+          <a:chExt cx="0" cy="0"/>
+        </a:xfrm>
+      </p:grpSpPr>
       <p:sp>
         <p:nvSpPr>
           <p:cNvPr id="2" name="Title 1"/>
@@ -3781,57 +5150,147 @@
         </p:nvSpPr>
         <p:spPr/>
         <p:txBody>
-          <a:bodyPr/>
-          <a:lstStyle/>
-          <a:p>
-            <a:r>
-              <a:t>ETL PIPELINE:</a:t>
-            </a:r>
-          </a:p>
-          <a:p/>
-          <a:p>
-            <a:r>
+          <a:bodyPr>
+            <a:normAutofit fontScale="85000" lnSpcReduction="20000"/>
+          </a:bodyPr>
+          <a:lstStyle/>
+          <a:p>
+            <a:r>
+              <a:rPr u="sng" dirty="0">
+                <a:solidFill>
+                  <a:srgbClr val="FF0000"/>
+                </a:solidFill>
+              </a:rPr>
+              <a:t>ETL PIPELINE</a:t>
+            </a:r>
+            <a:r>
+              <a:rPr dirty="0"/>
+              <a:t>:</a:t>
+            </a:r>
+          </a:p>
+          <a:p>
+            <a:endParaRPr dirty="0"/>
+          </a:p>
+          <a:p>
+            <a:r>
+              <a:rPr dirty="0"/>
               <a:t>EXTRACT → AMFI APIs, mfapi.in, CSV datasets</a:t>
             </a:r>
           </a:p>
           <a:p>
             <a:r>
+              <a:rPr dirty="0"/>
               <a:t>      ↓</a:t>
             </a:r>
           </a:p>
           <a:p>
             <a:r>
+              <a:rPr dirty="0"/>
               <a:t>TRANSFORM → Python/Pandas: clean, validate, compute metrics</a:t>
             </a:r>
           </a:p>
           <a:p>
             <a:r>
+              <a:rPr dirty="0"/>
               <a:t>      ↓</a:t>
             </a:r>
           </a:p>
           <a:p>
             <a:r>
+              <a:rPr dirty="0"/>
               <a:t>LOAD → SQLite database (5-table star schema)</a:t>
             </a:r>
           </a:p>
           <a:p>
             <a:r>
+              <a:rPr dirty="0"/>
               <a:t>      ↓</a:t>
             </a:r>
           </a:p>
           <a:p>
             <a:r>
-              <a:t>ANALYSE → Jupyter notebooks: EDA, performance metrics</a:t>
-            </a:r>
-          </a:p>
-          <a:p>
-            <a:r>
+              <a:rPr dirty="0"/>
+              <a:t>ANALYSE → </a:t>
+            </a:r>
+            <a:r>
+              <a:rPr dirty="0" err="1"/>
+              <a:t>Jupyter</a:t>
+            </a:r>
+            <a:r>
+              <a:rPr dirty="0"/>
+              <a:t> notebooks: EDA, performance metrics</a:t>
+            </a:r>
+          </a:p>
+          <a:p>
+            <a:r>
+              <a:rPr dirty="0"/>
               <a:t>      ↓</a:t>
             </a:r>
           </a:p>
           <a:p>
             <a:r>
+              <a:rPr dirty="0"/>
               <a:t>VISUALISE → Power BI: 4-page interactive dashboard</a:t>
+            </a:r>
+          </a:p>
+        </p:txBody>
+      </p:sp>
+      <p:sp>
+        <p:nvSpPr>
+          <p:cNvPr id="5" name="Rectangle 4">
+            <a:extLst>
+              <a:ext uri="{FF2B5EF4-FFF2-40B4-BE49-F238E27FC236}">
+                <a16:creationId xmlns:a16="http://schemas.microsoft.com/office/drawing/2014/main" id="{0DFCA42C-65CD-7D5A-1A57-F094EB263203}"/>
+              </a:ext>
+            </a:extLst>
+          </p:cNvPr>
+          <p:cNvSpPr/>
+          <p:nvPr/>
+        </p:nvSpPr>
+        <p:spPr>
+          <a:xfrm>
+            <a:off x="3828947" y="6411248"/>
+            <a:ext cx="5289755" cy="446752"/>
+          </a:xfrm>
+          <a:prstGeom prst="rect">
+            <a:avLst/>
+          </a:prstGeom>
+          <a:solidFill>
+            <a:srgbClr val="0070C0">
+              <a:alpha val="21000"/>
+            </a:srgbClr>
+          </a:solidFill>
+        </p:spPr>
+        <p:style>
+          <a:lnRef idx="2">
+            <a:schemeClr val="accent1">
+              <a:shade val="15000"/>
+            </a:schemeClr>
+          </a:lnRef>
+          <a:fillRef idx="1">
+            <a:schemeClr val="accent1"/>
+          </a:fillRef>
+          <a:effectRef idx="0">
+            <a:schemeClr val="accent1"/>
+          </a:effectRef>
+          <a:fontRef idx="minor">
+            <a:schemeClr val="lt1"/>
+          </a:fontRef>
+        </p:style>
+        <p:txBody>
+          <a:bodyPr rtlCol="0" anchor="ctr"/>
+          <a:lstStyle/>
+          <a:p>
+            <a:pPr algn="ctr"/>
+            <a:r>
+              <a:rPr lang="en-IN" dirty="0">
+                <a:solidFill>
+                  <a:schemeClr val="tx2">
+                    <a:alpha val="21000"/>
+                  </a:schemeClr>
+                </a:solidFill>
+              </a:rPr>
+              <a:t>📈 Data Analytics | 📊 Insights | 💹 Mutual Funds</a:t>
             </a:r>
           </a:p>
         </p:txBody>
@@ -3845,7 +5304,7 @@
 </file>
 
 <file path=ppt/slides/slide5.xml><?xml version="1.0" encoding="utf-8"?>
-<p:sld xmlns:a="http://schemas.openxmlformats.org/drawingml/2006/main" xmlns:p="http://schemas.openxmlformats.org/presentationml/2006/main" xmlns:r="http://schemas.openxmlformats.org/officeDocument/2006/relationships">
+<p:sld xmlns:a="http://schemas.openxmlformats.org/drawingml/2006/main" xmlns:r="http://schemas.openxmlformats.org/officeDocument/2006/relationships" xmlns:p="http://schemas.openxmlformats.org/presentationml/2006/main">
   <p:cSld>
     <p:spTree>
       <p:nvGrpSpPr>
@@ -3853,7 +5312,14 @@
         <p:cNvGrpSpPr/>
         <p:nvPr/>
       </p:nvGrpSpPr>
-      <p:grpSpPr/>
+      <p:grpSpPr>
+        <a:xfrm>
+          <a:off x="0" y="0"/>
+          <a:ext cx="0" cy="0"/>
+          <a:chOff x="0" y="0"/>
+          <a:chExt cx="0" cy="0"/>
+        </a:xfrm>
+      </p:grpSpPr>
       <p:sp>
         <p:nvSpPr>
           <p:cNvPr id="2" name="Title 1"/>
@@ -3892,50 +5358,136 @@
         </p:nvSpPr>
         <p:spPr/>
         <p:txBody>
-          <a:bodyPr/>
-          <a:lstStyle/>
-          <a:p>
-            <a:r>
-              <a:t>KEY FINDINGS:</a:t>
-            </a:r>
-          </a:p>
-          <a:p/>
-          <a:p>
-            <a:r>
+          <a:bodyPr>
+            <a:normAutofit fontScale="77500" lnSpcReduction="20000"/>
+          </a:bodyPr>
+          <a:lstStyle/>
+          <a:p>
+            <a:r>
+              <a:rPr u="sng" dirty="0">
+                <a:solidFill>
+                  <a:srgbClr val="FF0000"/>
+                </a:solidFill>
+              </a:rPr>
+              <a:t>KEY FINDINGS</a:t>
+            </a:r>
+            <a:r>
+              <a:rPr dirty="0"/>
+              <a:t>:</a:t>
+            </a:r>
+          </a:p>
+          <a:p>
+            <a:endParaRPr dirty="0"/>
+          </a:p>
+          <a:p>
+            <a:r>
+              <a:rPr dirty="0"/>
               <a:t>📈 NAV Trend: All 40 funds grew consistently 2022-2026</a:t>
             </a:r>
           </a:p>
           <a:p>
             <a:r>
+              <a:rPr dirty="0"/>
               <a:t>   Strong 2023 bull run, minor 2024 corrections</a:t>
             </a:r>
           </a:p>
-          <a:p/>
-          <a:p>
-            <a:r>
+          <a:p>
+            <a:endParaRPr dirty="0"/>
+          </a:p>
+          <a:p>
+            <a:r>
+              <a:rPr dirty="0"/>
               <a:t>🏦 SBI Dominance: Rs.12.5 Lakh Crore AUM</a:t>
             </a:r>
           </a:p>
           <a:p>
             <a:r>
+              <a:rPr dirty="0"/>
               <a:t>   Nearly 2x the second-largest AMC (ICICI Prudential)</a:t>
             </a:r>
           </a:p>
-          <a:p/>
-          <a:p>
-            <a:r>
+          <a:p>
+            <a:endParaRPr dirty="0"/>
+          </a:p>
+          <a:p>
+            <a:r>
+              <a:rPr dirty="0"/>
               <a:t>💰 SIP All-time High: Rs.31,002 Crore in Dec 2025</a:t>
             </a:r>
           </a:p>
           <a:p>
             <a:r>
+              <a:rPr dirty="0"/>
               <a:t>   Reflects India's growing retail investment culture</a:t>
             </a:r>
           </a:p>
-          <a:p/>
-          <a:p>
-            <a:r>
+          <a:p>
+            <a:endParaRPr dirty="0"/>
+          </a:p>
+          <a:p>
+            <a:r>
+              <a:rPr dirty="0"/>
               <a:t>📊 Folio Growth: 13.26 Cr → 26.12 Cr (97% growth in 4 years)</a:t>
+            </a:r>
+          </a:p>
+        </p:txBody>
+      </p:sp>
+      <p:sp>
+        <p:nvSpPr>
+          <p:cNvPr id="5" name="Rectangle 4">
+            <a:extLst>
+              <a:ext uri="{FF2B5EF4-FFF2-40B4-BE49-F238E27FC236}">
+                <a16:creationId xmlns:a16="http://schemas.microsoft.com/office/drawing/2014/main" id="{0A33F8BB-6E07-DB99-DEFD-858D532397BF}"/>
+              </a:ext>
+            </a:extLst>
+          </p:cNvPr>
+          <p:cNvSpPr/>
+          <p:nvPr/>
+        </p:nvSpPr>
+        <p:spPr>
+          <a:xfrm>
+            <a:off x="3828947" y="6411248"/>
+            <a:ext cx="5289755" cy="446752"/>
+          </a:xfrm>
+          <a:prstGeom prst="rect">
+            <a:avLst/>
+          </a:prstGeom>
+          <a:solidFill>
+            <a:srgbClr val="0070C0">
+              <a:alpha val="21000"/>
+            </a:srgbClr>
+          </a:solidFill>
+        </p:spPr>
+        <p:style>
+          <a:lnRef idx="2">
+            <a:schemeClr val="accent1">
+              <a:shade val="15000"/>
+            </a:schemeClr>
+          </a:lnRef>
+          <a:fillRef idx="1">
+            <a:schemeClr val="accent1"/>
+          </a:fillRef>
+          <a:effectRef idx="0">
+            <a:schemeClr val="accent1"/>
+          </a:effectRef>
+          <a:fontRef idx="minor">
+            <a:schemeClr val="lt1"/>
+          </a:fontRef>
+        </p:style>
+        <p:txBody>
+          <a:bodyPr rtlCol="0" anchor="ctr"/>
+          <a:lstStyle/>
+          <a:p>
+            <a:pPr algn="ctr"/>
+            <a:r>
+              <a:rPr lang="en-IN" dirty="0">
+                <a:solidFill>
+                  <a:schemeClr val="tx2">
+                    <a:alpha val="21000"/>
+                  </a:schemeClr>
+                </a:solidFill>
+              </a:rPr>
+              <a:t>📈 Data Analytics | 📊 Insights | 💹 Mutual Funds</a:t>
             </a:r>
           </a:p>
         </p:txBody>
@@ -3949,7 +5501,7 @@
 </file>
 
 <file path=ppt/slides/slide6.xml><?xml version="1.0" encoding="utf-8"?>
-<p:sld xmlns:a="http://schemas.openxmlformats.org/drawingml/2006/main" xmlns:p="http://schemas.openxmlformats.org/presentationml/2006/main" xmlns:r="http://schemas.openxmlformats.org/officeDocument/2006/relationships">
+<p:sld xmlns:a="http://schemas.openxmlformats.org/drawingml/2006/main" xmlns:r="http://schemas.openxmlformats.org/officeDocument/2006/relationships" xmlns:p="http://schemas.openxmlformats.org/presentationml/2006/main">
   <p:cSld>
     <p:spTree>
       <p:nvGrpSpPr>
@@ -3957,7 +5509,14 @@
         <p:cNvGrpSpPr/>
         <p:nvPr/>
       </p:nvGrpSpPr>
-      <p:grpSpPr/>
+      <p:grpSpPr>
+        <a:xfrm>
+          <a:off x="0" y="0"/>
+          <a:ext cx="0" cy="0"/>
+          <a:chOff x="0" y="0"/>
+          <a:chExt cx="0" cy="0"/>
+        </a:xfrm>
+      </p:grpSpPr>
       <p:sp>
         <p:nvSpPr>
           <p:cNvPr id="2" name="Title 1"/>
@@ -3996,50 +5555,136 @@
         </p:nvSpPr>
         <p:spPr/>
         <p:txBody>
-          <a:bodyPr/>
-          <a:lstStyle/>
-          <a:p>
-            <a:r>
-              <a:t>INVESTOR INSIGHTS:</a:t>
-            </a:r>
-          </a:p>
-          <a:p/>
-          <a:p>
-            <a:r>
+          <a:bodyPr>
+            <a:normAutofit fontScale="77500" lnSpcReduction="20000"/>
+          </a:bodyPr>
+          <a:lstStyle/>
+          <a:p>
+            <a:r>
+              <a:rPr u="sng" dirty="0">
+                <a:solidFill>
+                  <a:srgbClr val="FF0000"/>
+                </a:solidFill>
+              </a:rPr>
+              <a:t>INVESTOR INSIGHTS</a:t>
+            </a:r>
+            <a:r>
+              <a:rPr dirty="0"/>
+              <a:t>:</a:t>
+            </a:r>
+          </a:p>
+          <a:p>
+            <a:endParaRPr dirty="0"/>
+          </a:p>
+          <a:p>
+            <a:r>
+              <a:rPr dirty="0"/>
               <a:t>👥 Demographics: 26-35 age group = largest investor segment</a:t>
             </a:r>
           </a:p>
           <a:p>
             <a:r>
+              <a:rPr dirty="0"/>
               <a:t>   Young professionals driving MF growth in India</a:t>
             </a:r>
           </a:p>
-          <a:p/>
-          <a:p>
-            <a:r>
+          <a:p>
+            <a:endParaRPr dirty="0"/>
+          </a:p>
+          <a:p>
+            <a:r>
+              <a:rPr dirty="0"/>
               <a:t>🗺️ Geography: Maharashtra &amp; Karnataka lead investments</a:t>
             </a:r>
           </a:p>
           <a:p>
             <a:r>
+              <a:rPr dirty="0"/>
               <a:t>   T30 cities = 70% of total AUM</a:t>
             </a:r>
           </a:p>
-          <a:p/>
-          <a:p>
-            <a:r>
+          <a:p>
+            <a:endParaRPr dirty="0"/>
+          </a:p>
+          <a:p>
+            <a:r>
+              <a:rPr dirty="0"/>
               <a:t>⚖️ Gender Gap: Male 65% vs Female 35% investors</a:t>
             </a:r>
           </a:p>
           <a:p>
             <a:r>
+              <a:rPr dirty="0"/>
               <a:t>   Opportunity for women-focused MF campaigns</a:t>
             </a:r>
           </a:p>
-          <a:p/>
-          <a:p>
-            <a:r>
+          <a:p>
+            <a:endParaRPr dirty="0"/>
+          </a:p>
+          <a:p>
+            <a:r>
+              <a:rPr dirty="0"/>
               <a:t>🏙️ B30 Growth: Beyond Top-30 cities growing faster in SIPs</a:t>
+            </a:r>
+          </a:p>
+        </p:txBody>
+      </p:sp>
+      <p:sp>
+        <p:nvSpPr>
+          <p:cNvPr id="5" name="Rectangle 4">
+            <a:extLst>
+              <a:ext uri="{FF2B5EF4-FFF2-40B4-BE49-F238E27FC236}">
+                <a16:creationId xmlns:a16="http://schemas.microsoft.com/office/drawing/2014/main" id="{84921527-8882-03E8-52F3-748F476B373F}"/>
+              </a:ext>
+            </a:extLst>
+          </p:cNvPr>
+          <p:cNvSpPr/>
+          <p:nvPr/>
+        </p:nvSpPr>
+        <p:spPr>
+          <a:xfrm>
+            <a:off x="3828947" y="6411248"/>
+            <a:ext cx="5289755" cy="446752"/>
+          </a:xfrm>
+          <a:prstGeom prst="rect">
+            <a:avLst/>
+          </a:prstGeom>
+          <a:solidFill>
+            <a:srgbClr val="0070C0">
+              <a:alpha val="21000"/>
+            </a:srgbClr>
+          </a:solidFill>
+        </p:spPr>
+        <p:style>
+          <a:lnRef idx="2">
+            <a:schemeClr val="accent1">
+              <a:shade val="15000"/>
+            </a:schemeClr>
+          </a:lnRef>
+          <a:fillRef idx="1">
+            <a:schemeClr val="accent1"/>
+          </a:fillRef>
+          <a:effectRef idx="0">
+            <a:schemeClr val="accent1"/>
+          </a:effectRef>
+          <a:fontRef idx="minor">
+            <a:schemeClr val="lt1"/>
+          </a:fontRef>
+        </p:style>
+        <p:txBody>
+          <a:bodyPr rtlCol="0" anchor="ctr"/>
+          <a:lstStyle/>
+          <a:p>
+            <a:pPr algn="ctr"/>
+            <a:r>
+              <a:rPr lang="en-IN" dirty="0">
+                <a:solidFill>
+                  <a:schemeClr val="tx2">
+                    <a:alpha val="21000"/>
+                  </a:schemeClr>
+                </a:solidFill>
+              </a:rPr>
+              <a:t>📈 Data Analytics | 📊 Insights | 💹 Mutual Funds</a:t>
             </a:r>
           </a:p>
         </p:txBody>
@@ -4053,7 +5698,7 @@
 </file>
 
 <file path=ppt/slides/slide7.xml><?xml version="1.0" encoding="utf-8"?>
-<p:sld xmlns:a="http://schemas.openxmlformats.org/drawingml/2006/main" xmlns:p="http://schemas.openxmlformats.org/presentationml/2006/main" xmlns:r="http://schemas.openxmlformats.org/officeDocument/2006/relationships">
+<p:sld xmlns:a="http://schemas.openxmlformats.org/drawingml/2006/main" xmlns:r="http://schemas.openxmlformats.org/officeDocument/2006/relationships" xmlns:p="http://schemas.openxmlformats.org/presentationml/2006/main">
   <p:cSld>
     <p:spTree>
       <p:nvGrpSpPr>
@@ -4061,7 +5706,14 @@
         <p:cNvGrpSpPr/>
         <p:nvPr/>
       </p:nvGrpSpPr>
-      <p:grpSpPr/>
+      <p:grpSpPr>
+        <a:xfrm>
+          <a:off x="0" y="0"/>
+          <a:ext cx="0" cy="0"/>
+          <a:chOff x="0" y="0"/>
+          <a:chExt cx="0" cy="0"/>
+        </a:xfrm>
+      </p:grpSpPr>
       <p:sp>
         <p:nvSpPr>
           <p:cNvPr id="2" name="Title 1"/>
@@ -4100,52 +5752,165 @@
         </p:nvSpPr>
         <p:spPr/>
         <p:txBody>
-          <a:bodyPr/>
-          <a:lstStyle/>
-          <a:p>
-            <a:r>
+          <a:bodyPr>
+            <a:normAutofit fontScale="92500" lnSpcReduction="20000"/>
+          </a:bodyPr>
+          <a:lstStyle/>
+          <a:p>
+            <a:r>
+              <a:rPr u="sng" dirty="0">
+                <a:solidFill>
+                  <a:srgbClr val="FF0000"/>
+                </a:solidFill>
+              </a:rPr>
               <a:t>METRICS COMPUTED FOR ALL 40 FUNDS:</a:t>
             </a:r>
           </a:p>
-          <a:p/>
-          <a:p>
-            <a:r>
-              <a:t>• CAGR (1yr, 3yr, 5yr) — Annualised compound returns</a:t>
-            </a:r>
-          </a:p>
-          <a:p>
-            <a:r>
+          <a:p>
+            <a:endParaRPr u="sng" dirty="0">
+              <a:solidFill>
+                <a:srgbClr val="FF0000"/>
+              </a:solidFill>
+            </a:endParaRPr>
+          </a:p>
+          <a:p>
+            <a:r>
+              <a:rPr dirty="0"/>
+              <a:t>• CAGR (1yr, 3yr, 5yr) — </a:t>
+            </a:r>
+            <a:r>
+              <a:rPr dirty="0" err="1"/>
+              <a:t>Annualised</a:t>
+            </a:r>
+            <a:r>
+              <a:rPr dirty="0"/>
+              <a:t> compound returns</a:t>
+            </a:r>
+          </a:p>
+          <a:p>
+            <a:r>
+              <a:rPr dirty="0"/>
               <a:t>• Sharpe Ratio — Risk-adjusted return vs RBI repo rate (6.5%)</a:t>
             </a:r>
           </a:p>
           <a:p>
             <a:r>
-              <a:t>• Sortino Ratio — Penalises only downside volatility</a:t>
-            </a:r>
-          </a:p>
-          <a:p>
-            <a:r>
+              <a:rPr dirty="0"/>
+              <a:t>• Sortino Ratio — </a:t>
+            </a:r>
+            <a:r>
+              <a:rPr dirty="0" err="1"/>
+              <a:t>Penalises</a:t>
+            </a:r>
+            <a:r>
+              <a:rPr dirty="0"/>
+              <a:t> only downside volatility</a:t>
+            </a:r>
+          </a:p>
+          <a:p>
+            <a:r>
+              <a:rPr dirty="0"/>
               <a:t>• Alpha &amp; Beta — OLS regression vs Nifty 100 benchmark</a:t>
             </a:r>
           </a:p>
           <a:p>
             <a:r>
+              <a:rPr dirty="0"/>
               <a:t>• Max Drawdown — Worst peak-to-trough decline</a:t>
             </a:r>
           </a:p>
           <a:p>
             <a:r>
-              <a:t>• VaR (95%) — Daily loss threshold at 95% confidence</a:t>
-            </a:r>
-          </a:p>
-          <a:p>
-            <a:r>
-              <a:t>• CVaR — Expected loss beyond VaR threshold</a:t>
-            </a:r>
-          </a:p>
-          <a:p>
-            <a:r>
+              <a:rPr dirty="0"/>
+              <a:t>• </a:t>
+            </a:r>
+            <a:r>
+              <a:rPr dirty="0" err="1"/>
+              <a:t>VaR</a:t>
+            </a:r>
+            <a:r>
+              <a:rPr dirty="0"/>
+              <a:t> (95%) — Daily loss threshold at 95% confidence</a:t>
+            </a:r>
+          </a:p>
+          <a:p>
+            <a:r>
+              <a:rPr dirty="0"/>
+              <a:t>• CVaR — Expected loss beyond </a:t>
+            </a:r>
+            <a:r>
+              <a:rPr dirty="0" err="1"/>
+              <a:t>VaR</a:t>
+            </a:r>
+            <a:r>
+              <a:rPr dirty="0"/>
+              <a:t> threshold</a:t>
+            </a:r>
+          </a:p>
+          <a:p>
+            <a:r>
+              <a:rPr dirty="0"/>
               <a:t>• Tracking Error — Std dev of fund vs benchmark returns</a:t>
+            </a:r>
+          </a:p>
+        </p:txBody>
+      </p:sp>
+      <p:sp>
+        <p:nvSpPr>
+          <p:cNvPr id="5" name="Rectangle 4">
+            <a:extLst>
+              <a:ext uri="{FF2B5EF4-FFF2-40B4-BE49-F238E27FC236}">
+                <a16:creationId xmlns:a16="http://schemas.microsoft.com/office/drawing/2014/main" id="{03E9A1B8-7E84-9783-3F30-C8082519E1FA}"/>
+              </a:ext>
+            </a:extLst>
+          </p:cNvPr>
+          <p:cNvSpPr/>
+          <p:nvPr/>
+        </p:nvSpPr>
+        <p:spPr>
+          <a:xfrm>
+            <a:off x="3828947" y="6411248"/>
+            <a:ext cx="5289755" cy="446752"/>
+          </a:xfrm>
+          <a:prstGeom prst="rect">
+            <a:avLst/>
+          </a:prstGeom>
+          <a:solidFill>
+            <a:srgbClr val="0070C0">
+              <a:alpha val="21000"/>
+            </a:srgbClr>
+          </a:solidFill>
+        </p:spPr>
+        <p:style>
+          <a:lnRef idx="2">
+            <a:schemeClr val="accent1">
+              <a:shade val="15000"/>
+            </a:schemeClr>
+          </a:lnRef>
+          <a:fillRef idx="1">
+            <a:schemeClr val="accent1"/>
+          </a:fillRef>
+          <a:effectRef idx="0">
+            <a:schemeClr val="accent1"/>
+          </a:effectRef>
+          <a:fontRef idx="minor">
+            <a:schemeClr val="lt1"/>
+          </a:fontRef>
+        </p:style>
+        <p:txBody>
+          <a:bodyPr rtlCol="0" anchor="ctr"/>
+          <a:lstStyle/>
+          <a:p>
+            <a:pPr algn="ctr"/>
+            <a:r>
+              <a:rPr lang="en-IN" dirty="0">
+                <a:solidFill>
+                  <a:schemeClr val="tx2">
+                    <a:alpha val="21000"/>
+                  </a:schemeClr>
+                </a:solidFill>
+              </a:rPr>
+              <a:t>📈 Data Analytics | 📊 Insights | 💹 Mutual Funds</a:t>
             </a:r>
           </a:p>
         </p:txBody>
@@ -4159,7 +5924,7 @@
 </file>
 
 <file path=ppt/slides/slide8.xml><?xml version="1.0" encoding="utf-8"?>
-<p:sld xmlns:a="http://schemas.openxmlformats.org/drawingml/2006/main" xmlns:p="http://schemas.openxmlformats.org/presentationml/2006/main" xmlns:r="http://schemas.openxmlformats.org/officeDocument/2006/relationships">
+<p:sld xmlns:a="http://schemas.openxmlformats.org/drawingml/2006/main" xmlns:r="http://schemas.openxmlformats.org/officeDocument/2006/relationships" xmlns:p="http://schemas.openxmlformats.org/presentationml/2006/main">
   <p:cSld>
     <p:spTree>
       <p:nvGrpSpPr>
@@ -4167,7 +5932,14 @@
         <p:cNvGrpSpPr/>
         <p:nvPr/>
       </p:nvGrpSpPr>
-      <p:grpSpPr/>
+      <p:grpSpPr>
+        <a:xfrm>
+          <a:off x="0" y="0"/>
+          <a:ext cx="0" cy="0"/>
+          <a:chOff x="0" y="0"/>
+          <a:chExt cx="0" cy="0"/>
+        </a:xfrm>
+      </p:grpSpPr>
       <p:sp>
         <p:nvSpPr>
           <p:cNvPr id="2" name="Title 1"/>
@@ -4206,63 +5978,161 @@
         </p:nvSpPr>
         <p:spPr/>
         <p:txBody>
-          <a:bodyPr/>
-          <a:lstStyle/>
-          <a:p>
-            <a:r>
-              <a:t>FUND SCORECARD (Composite 0-100 Score):</a:t>
-            </a:r>
-          </a:p>
-          <a:p>
-            <a:r>
+          <a:bodyPr>
+            <a:normAutofit fontScale="62500" lnSpcReduction="20000"/>
+          </a:bodyPr>
+          <a:lstStyle/>
+          <a:p>
+            <a:r>
+              <a:rPr u="sng" dirty="0">
+                <a:solidFill>
+                  <a:srgbClr val="FF0000"/>
+                </a:solidFill>
+              </a:rPr>
+              <a:t>FUND SCORECARD </a:t>
+            </a:r>
+            <a:r>
+              <a:rPr dirty="0"/>
+              <a:t>(Composite 0-100 Score):</a:t>
+            </a:r>
+          </a:p>
+          <a:p>
+            <a:r>
+              <a:rPr dirty="0"/>
               <a:t>Weighted: 30% Return + 25% Sharpe + 20% Alpha + 15% Expense + 10% Max DD</a:t>
             </a:r>
           </a:p>
-          <a:p/>
-          <a:p>
-            <a:r>
+          <a:p>
+            <a:endParaRPr dirty="0"/>
+          </a:p>
+          <a:p>
+            <a:r>
+              <a:rPr dirty="0"/>
               <a:t>TOP FINDINGS:</a:t>
             </a:r>
           </a:p>
           <a:p>
             <a:r>
+              <a:rPr dirty="0"/>
               <a:t>• Funds with Sharpe &gt; 1 consistently outperform benchmark</a:t>
             </a:r>
           </a:p>
           <a:p>
             <a:r>
+              <a:rPr dirty="0"/>
               <a:t>• Large cap funds show Beta close to 1.0 (market-tracking)</a:t>
             </a:r>
           </a:p>
           <a:p>
             <a:r>
-              <a:t>• Small/Mid cap funds have higher Alpha but higher VaR</a:t>
-            </a:r>
-          </a:p>
-          <a:p>
-            <a:r>
-              <a:t>• Liquid funds show lowest VaR — best for capital preservation</a:t>
-            </a:r>
-          </a:p>
-          <a:p>
-            <a:r>
+              <a:rPr dirty="0"/>
+              <a:t>• Small/Mid cap funds have higher Alpha but higher </a:t>
+            </a:r>
+            <a:r>
+              <a:rPr dirty="0" err="1"/>
+              <a:t>VaR</a:t>
+            </a:r>
+            <a:endParaRPr dirty="0"/>
+          </a:p>
+          <a:p>
+            <a:r>
+              <a:rPr dirty="0"/>
+              <a:t>• Liquid funds show lowest </a:t>
+            </a:r>
+            <a:r>
+              <a:rPr dirty="0" err="1"/>
+              <a:t>VaR</a:t>
+            </a:r>
+            <a:r>
+              <a:rPr dirty="0"/>
+              <a:t> — best for capital preservation</a:t>
+            </a:r>
+          </a:p>
+          <a:p>
+            <a:r>
+              <a:rPr dirty="0"/>
               <a:t>• High HHI funds concentrated in Consumer Goods &amp; IT sectors</a:t>
             </a:r>
           </a:p>
-          <a:p/>
-          <a:p>
-            <a:r>
+          <a:p>
+            <a:endParaRPr dirty="0"/>
+          </a:p>
+          <a:p>
+            <a:r>
+              <a:rPr dirty="0"/>
               <a:t>RISK INSIGHTS:</a:t>
             </a:r>
           </a:p>
           <a:p>
             <a:r>
+              <a:rPr dirty="0"/>
               <a:t>• Rolling Sharpe declined in 2024 — market-wide risk increase</a:t>
             </a:r>
           </a:p>
           <a:p>
             <a:r>
+              <a:rPr dirty="0"/>
               <a:t>• At-risk SIP investors (gap &gt; 35 days) need re-engagement</a:t>
+            </a:r>
+          </a:p>
+        </p:txBody>
+      </p:sp>
+      <p:sp>
+        <p:nvSpPr>
+          <p:cNvPr id="5" name="Rectangle 4">
+            <a:extLst>
+              <a:ext uri="{FF2B5EF4-FFF2-40B4-BE49-F238E27FC236}">
+                <a16:creationId xmlns:a16="http://schemas.microsoft.com/office/drawing/2014/main" id="{C39B23C8-C574-5DE5-E6C9-5974CC96C89A}"/>
+              </a:ext>
+            </a:extLst>
+          </p:cNvPr>
+          <p:cNvSpPr/>
+          <p:nvPr/>
+        </p:nvSpPr>
+        <p:spPr>
+          <a:xfrm>
+            <a:off x="3828947" y="6411248"/>
+            <a:ext cx="5289755" cy="446752"/>
+          </a:xfrm>
+          <a:prstGeom prst="rect">
+            <a:avLst/>
+          </a:prstGeom>
+          <a:solidFill>
+            <a:srgbClr val="0070C0">
+              <a:alpha val="21000"/>
+            </a:srgbClr>
+          </a:solidFill>
+        </p:spPr>
+        <p:style>
+          <a:lnRef idx="2">
+            <a:schemeClr val="accent1">
+              <a:shade val="15000"/>
+            </a:schemeClr>
+          </a:lnRef>
+          <a:fillRef idx="1">
+            <a:schemeClr val="accent1"/>
+          </a:fillRef>
+          <a:effectRef idx="0">
+            <a:schemeClr val="accent1"/>
+          </a:effectRef>
+          <a:fontRef idx="minor">
+            <a:schemeClr val="lt1"/>
+          </a:fontRef>
+        </p:style>
+        <p:txBody>
+          <a:bodyPr rtlCol="0" anchor="ctr"/>
+          <a:lstStyle/>
+          <a:p>
+            <a:pPr algn="ctr"/>
+            <a:r>
+              <a:rPr lang="en-IN" dirty="0">
+                <a:solidFill>
+                  <a:schemeClr val="tx2">
+                    <a:alpha val="21000"/>
+                  </a:schemeClr>
+                </a:solidFill>
+              </a:rPr>
+              <a:t>📈 Data Analytics | 📊 Insights | 💹 Mutual Funds</a:t>
             </a:r>
           </a:p>
         </p:txBody>
@@ -4276,7 +6146,7 @@
 </file>
 
 <file path=ppt/slides/slide9.xml><?xml version="1.0" encoding="utf-8"?>
-<p:sld xmlns:a="http://schemas.openxmlformats.org/drawingml/2006/main" xmlns:p="http://schemas.openxmlformats.org/presentationml/2006/main" xmlns:r="http://schemas.openxmlformats.org/officeDocument/2006/relationships">
+<p:sld xmlns:a="http://schemas.openxmlformats.org/drawingml/2006/main" xmlns:r="http://schemas.openxmlformats.org/officeDocument/2006/relationships" xmlns:p="http://schemas.openxmlformats.org/presentationml/2006/main">
   <p:cSld>
     <p:spTree>
       <p:nvGrpSpPr>
@@ -4284,7 +6154,14 @@
         <p:cNvGrpSpPr/>
         <p:nvPr/>
       </p:nvGrpSpPr>
-      <p:grpSpPr/>
+      <p:grpSpPr>
+        <a:xfrm>
+          <a:off x="0" y="0"/>
+          <a:ext cx="0" cy="0"/>
+          <a:chOff x="0" y="0"/>
+          <a:chExt cx="0" cy="0"/>
+        </a:xfrm>
+      </p:grpSpPr>
       <p:sp>
         <p:nvSpPr>
           <p:cNvPr id="2" name="Title 1"/>
@@ -4323,7 +6200,9 @@
         </p:nvSpPr>
         <p:spPr/>
         <p:txBody>
-          <a:bodyPr/>
+          <a:bodyPr>
+            <a:normAutofit fontScale="92500" lnSpcReduction="20000"/>
+          </a:bodyPr>
           <a:lstStyle/>
           <a:p>
             <a:r>
@@ -4350,7 +6229,9 @@
               <a:t>• Slicer: Fund Category filter</a:t>
             </a:r>
           </a:p>
-          <a:p/>
+          <a:p>
+            <a:endParaRPr/>
+          </a:p>
           <a:p>
             <a:r>
               <a:t>PAGE 2 — FUND PERFORMANCE:</a:t>
@@ -4369,6 +6250,66 @@
           <a:p>
             <a:r>
               <a:t>• Fund House Slicer: filter by AMC</a:t>
+            </a:r>
+          </a:p>
+        </p:txBody>
+      </p:sp>
+      <p:sp>
+        <p:nvSpPr>
+          <p:cNvPr id="5" name="Rectangle 4">
+            <a:extLst>
+              <a:ext uri="{FF2B5EF4-FFF2-40B4-BE49-F238E27FC236}">
+                <a16:creationId xmlns:a16="http://schemas.microsoft.com/office/drawing/2014/main" id="{C2A8FC9D-06A0-8392-7CC6-49F2766A3237}"/>
+              </a:ext>
+            </a:extLst>
+          </p:cNvPr>
+          <p:cNvSpPr/>
+          <p:nvPr/>
+        </p:nvSpPr>
+        <p:spPr>
+          <a:xfrm>
+            <a:off x="3828947" y="6411248"/>
+            <a:ext cx="5289755" cy="446752"/>
+          </a:xfrm>
+          <a:prstGeom prst="rect">
+            <a:avLst/>
+          </a:prstGeom>
+          <a:solidFill>
+            <a:srgbClr val="0070C0">
+              <a:alpha val="21000"/>
+            </a:srgbClr>
+          </a:solidFill>
+        </p:spPr>
+        <p:style>
+          <a:lnRef idx="2">
+            <a:schemeClr val="accent1">
+              <a:shade val="15000"/>
+            </a:schemeClr>
+          </a:lnRef>
+          <a:fillRef idx="1">
+            <a:schemeClr val="accent1"/>
+          </a:fillRef>
+          <a:effectRef idx="0">
+            <a:schemeClr val="accent1"/>
+          </a:effectRef>
+          <a:fontRef idx="minor">
+            <a:schemeClr val="lt1"/>
+          </a:fontRef>
+        </p:style>
+        <p:txBody>
+          <a:bodyPr rtlCol="0" anchor="ctr"/>
+          <a:lstStyle/>
+          <a:p>
+            <a:pPr algn="ctr"/>
+            <a:r>
+              <a:rPr lang="en-IN" dirty="0">
+                <a:solidFill>
+                  <a:schemeClr val="tx2">
+                    <a:alpha val="21000"/>
+                  </a:schemeClr>
+                </a:solidFill>
+              </a:rPr>
+              <a:t>📈 Data Analytics | 📊 Insights | 💹 Mutual Funds</a:t>
             </a:r>
           </a:p>
         </p:txBody>
@@ -4384,7 +6325,7 @@
 <file path=ppt/theme/theme1.xml><?xml version="1.0" encoding="utf-8"?>
 <a:theme xmlns:a="http://schemas.openxmlformats.org/drawingml/2006/main" name="Office Theme">
   <a:themeElements>
-    <a:clrScheme name="Office">
+    <a:clrScheme name="Custom 1">
       <a:dk1>
         <a:sysClr val="windowText" lastClr="000000"/>
       </a:dk1>
@@ -4392,44 +6333,44 @@
         <a:sysClr val="window" lastClr="FFFFFF"/>
       </a:lt1>
       <a:dk2>
-        <a:srgbClr val="1F497D"/>
+        <a:srgbClr val="0E2841"/>
       </a:dk2>
       <a:lt2>
-        <a:srgbClr val="EEECE1"/>
+        <a:srgbClr val="E8E8E8"/>
       </a:lt2>
       <a:accent1>
-        <a:srgbClr val="4F81BD"/>
+        <a:srgbClr val="156082"/>
       </a:accent1>
       <a:accent2>
-        <a:srgbClr val="C0504D"/>
+        <a:srgbClr val="E97132"/>
       </a:accent2>
       <a:accent3>
-        <a:srgbClr val="9BBB59"/>
+        <a:srgbClr val="196B24"/>
       </a:accent3>
       <a:accent4>
-        <a:srgbClr val="8064A2"/>
+        <a:srgbClr val="0070C0"/>
       </a:accent4>
       <a:accent5>
-        <a:srgbClr val="4BACC6"/>
+        <a:srgbClr val="A02B93"/>
       </a:accent5>
       <a:accent6>
-        <a:srgbClr val="F79646"/>
+        <a:srgbClr val="4EA72E"/>
       </a:accent6>
       <a:hlink>
-        <a:srgbClr val="0000FF"/>
+        <a:srgbClr val="467886"/>
       </a:hlink>
       <a:folHlink>
-        <a:srgbClr val="800080"/>
+        <a:srgbClr val="96607D"/>
       </a:folHlink>
     </a:clrScheme>
-    <a:fontScheme name="Office">
+    <a:fontScheme name="Office Theme">
       <a:majorFont>
-        <a:latin typeface="Calibri"/>
+        <a:latin typeface="Aptos Display" panose="02110004020202020204"/>
         <a:ea typeface=""/>
         <a:cs typeface=""/>
-        <a:font script="Jpan" typeface="ＭＳ Ｐゴシック"/>
+        <a:font script="Jpan" typeface="游ゴシック Light"/>
         <a:font script="Hang" typeface="맑은 고딕"/>
-        <a:font script="Hans" typeface="宋体"/>
+        <a:font script="Hans" typeface="等线 Light"/>
         <a:font script="Hant" typeface="新細明體"/>
         <a:font script="Arab" typeface="Times New Roman"/>
         <a:font script="Hebr" typeface="Times New Roman"/>
@@ -4457,14 +6398,31 @@
         <a:font script="Viet" typeface="Times New Roman"/>
         <a:font script="Uigh" typeface="Microsoft Uighur"/>
         <a:font script="Geor" typeface="Sylfaen"/>
+        <a:font script="Armn" typeface="Arial"/>
+        <a:font script="Bugi" typeface="Leelawadee UI"/>
+        <a:font script="Bopo" typeface="Microsoft JhengHei"/>
+        <a:font script="Java" typeface="Javanese Text"/>
+        <a:font script="Lisu" typeface="Segoe UI"/>
+        <a:font script="Mymr" typeface="Myanmar Text"/>
+        <a:font script="Nkoo" typeface="Ebrima"/>
+        <a:font script="Olck" typeface="Nirmala UI"/>
+        <a:font script="Osma" typeface="Ebrima"/>
+        <a:font script="Phag" typeface="Phagspa"/>
+        <a:font script="Syrn" typeface="Estrangelo Edessa"/>
+        <a:font script="Syrj" typeface="Estrangelo Edessa"/>
+        <a:font script="Syre" typeface="Estrangelo Edessa"/>
+        <a:font script="Sora" typeface="Nirmala UI"/>
+        <a:font script="Tale" typeface="Microsoft Tai Le"/>
+        <a:font script="Talu" typeface="Microsoft New Tai Lue"/>
+        <a:font script="Tfng" typeface="Ebrima"/>
       </a:majorFont>
       <a:minorFont>
-        <a:latin typeface="Calibri"/>
+        <a:latin typeface="Aptos" panose="02110004020202020204"/>
         <a:ea typeface=""/>
         <a:cs typeface=""/>
-        <a:font script="Jpan" typeface="ＭＳ Ｐゴシック"/>
+        <a:font script="Jpan" typeface="游ゴシック"/>
         <a:font script="Hang" typeface="맑은 고딕"/>
-        <a:font script="Hans" typeface="宋体"/>
+        <a:font script="Hans" typeface="等线"/>
         <a:font script="Hant" typeface="新細明體"/>
         <a:font script="Arab" typeface="Arial"/>
         <a:font script="Hebr" typeface="Arial"/>
@@ -4492,9 +6450,26 @@
         <a:font script="Viet" typeface="Arial"/>
         <a:font script="Uigh" typeface="Microsoft Uighur"/>
         <a:font script="Geor" typeface="Sylfaen"/>
+        <a:font script="Armn" typeface="Arial"/>
+        <a:font script="Bugi" typeface="Leelawadee UI"/>
+        <a:font script="Bopo" typeface="Microsoft JhengHei"/>
+        <a:font script="Java" typeface="Javanese Text"/>
+        <a:font script="Lisu" typeface="Segoe UI"/>
+        <a:font script="Mymr" typeface="Myanmar Text"/>
+        <a:font script="Nkoo" typeface="Ebrima"/>
+        <a:font script="Olck" typeface="Nirmala UI"/>
+        <a:font script="Osma" typeface="Ebrima"/>
+        <a:font script="Phag" typeface="Phagspa"/>
+        <a:font script="Syrn" typeface="Estrangelo Edessa"/>
+        <a:font script="Syrj" typeface="Estrangelo Edessa"/>
+        <a:font script="Syre" typeface="Estrangelo Edessa"/>
+        <a:font script="Sora" typeface="Nirmala UI"/>
+        <a:font script="Tale" typeface="Microsoft Tai Le"/>
+        <a:font script="Talu" typeface="Microsoft New Tai Lue"/>
+        <a:font script="Tfng" typeface="Ebrima"/>
       </a:minorFont>
     </a:fontScheme>
-    <a:fmtScheme name="Office">
+    <a:fmtScheme name="Office Theme">
       <a:fillStyleLst>
         <a:solidFill>
           <a:schemeClr val="phClr"/>
@@ -4503,180 +6478,136 @@
           <a:gsLst>
             <a:gs pos="0">
               <a:schemeClr val="phClr">
-                <a:tint val="50000"/>
-                <a:satMod val="300000"/>
+                <a:lumMod val="110000"/>
+                <a:satMod val="105000"/>
+                <a:tint val="67000"/>
               </a:schemeClr>
             </a:gs>
-            <a:gs pos="35000">
+            <a:gs pos="50000">
               <a:schemeClr val="phClr">
-                <a:tint val="37000"/>
-                <a:satMod val="300000"/>
+                <a:lumMod val="105000"/>
+                <a:satMod val="103000"/>
+                <a:tint val="73000"/>
               </a:schemeClr>
             </a:gs>
             <a:gs pos="100000">
               <a:schemeClr val="phClr">
-                <a:tint val="15000"/>
-                <a:satMod val="350000"/>
+                <a:lumMod val="105000"/>
+                <a:satMod val="109000"/>
+                <a:tint val="81000"/>
               </a:schemeClr>
             </a:gs>
           </a:gsLst>
-          <a:lin ang="16200000" scaled="1"/>
+          <a:lin ang="5400000" scaled="0"/>
         </a:gradFill>
         <a:gradFill rotWithShape="1">
           <a:gsLst>
             <a:gs pos="0">
               <a:schemeClr val="phClr">
-                <a:tint val="100000"/>
+                <a:satMod val="103000"/>
+                <a:lumMod val="102000"/>
+                <a:tint val="94000"/>
+              </a:schemeClr>
+            </a:gs>
+            <a:gs pos="50000">
+              <a:schemeClr val="phClr">
+                <a:satMod val="110000"/>
+                <a:lumMod val="100000"/>
                 <a:shade val="100000"/>
-                <a:satMod val="130000"/>
               </a:schemeClr>
             </a:gs>
             <a:gs pos="100000">
               <a:schemeClr val="phClr">
-                <a:tint val="50000"/>
-                <a:shade val="100000"/>
-                <a:satMod val="350000"/>
+                <a:lumMod val="99000"/>
+                <a:satMod val="120000"/>
+                <a:shade val="78000"/>
               </a:schemeClr>
             </a:gs>
           </a:gsLst>
-          <a:lin ang="16200000" scaled="0"/>
+          <a:lin ang="5400000" scaled="0"/>
         </a:gradFill>
       </a:fillStyleLst>
       <a:lnStyleLst>
-        <a:ln w="9525" cap="flat" cmpd="sng" algn="ctr">
+        <a:ln w="12700" cap="flat" cmpd="sng" algn="ctr">
           <a:solidFill>
-            <a:schemeClr val="phClr">
-              <a:shade val="95000"/>
-              <a:satMod val="105000"/>
-            </a:schemeClr>
+            <a:schemeClr val="phClr"/>
           </a:solidFill>
           <a:prstDash val="solid"/>
+          <a:miter lim="800000"/>
+        </a:ln>
+        <a:ln w="19050" cap="flat" cmpd="sng" algn="ctr">
+          <a:solidFill>
+            <a:schemeClr val="phClr"/>
+          </a:solidFill>
+          <a:prstDash val="solid"/>
+          <a:miter lim="800000"/>
         </a:ln>
         <a:ln w="25400" cap="flat" cmpd="sng" algn="ctr">
           <a:solidFill>
             <a:schemeClr val="phClr"/>
           </a:solidFill>
           <a:prstDash val="solid"/>
-        </a:ln>
-        <a:ln w="38100" cap="flat" cmpd="sng" algn="ctr">
-          <a:solidFill>
-            <a:schemeClr val="phClr"/>
-          </a:solidFill>
-          <a:prstDash val="solid"/>
+          <a:miter lim="800000"/>
         </a:ln>
       </a:lnStyleLst>
       <a:effectStyleLst>
         <a:effectStyle>
+          <a:effectLst/>
+        </a:effectStyle>
+        <a:effectStyle>
+          <a:effectLst/>
+        </a:effectStyle>
+        <a:effectStyle>
           <a:effectLst>
-            <a:outerShdw blurRad="40000" dist="20000" dir="5400000" rotWithShape="0">
+            <a:outerShdw blurRad="57150" dist="19050" dir="5400000" algn="ctr" rotWithShape="0">
               <a:srgbClr val="000000">
-                <a:alpha val="38000"/>
+                <a:alpha val="63000"/>
               </a:srgbClr>
             </a:outerShdw>
           </a:effectLst>
-        </a:effectStyle>
-        <a:effectStyle>
-          <a:effectLst>
-            <a:outerShdw blurRad="40000" dist="23000" dir="5400000" rotWithShape="0">
-              <a:srgbClr val="000000">
-                <a:alpha val="35000"/>
-              </a:srgbClr>
-            </a:outerShdw>
-          </a:effectLst>
-        </a:effectStyle>
-        <a:effectStyle>
-          <a:effectLst>
-            <a:outerShdw blurRad="40000" dist="23000" dir="5400000" rotWithShape="0">
-              <a:srgbClr val="000000">
-                <a:alpha val="35000"/>
-              </a:srgbClr>
-            </a:outerShdw>
-          </a:effectLst>
-          <a:scene3d>
-            <a:camera prst="orthographicFront">
-              <a:rot lat="0" lon="0" rev="0"/>
-            </a:camera>
-            <a:lightRig rig="threePt" dir="t">
-              <a:rot lat="0" lon="0" rev="1200000"/>
-            </a:lightRig>
-          </a:scene3d>
-          <a:sp3d>
-            <a:bevelT w="63500" h="25400"/>
-          </a:sp3d>
         </a:effectStyle>
       </a:effectStyleLst>
       <a:bgFillStyleLst>
         <a:solidFill>
           <a:schemeClr val="phClr"/>
         </a:solidFill>
+        <a:solidFill>
+          <a:schemeClr val="phClr">
+            <a:tint val="95000"/>
+            <a:satMod val="170000"/>
+          </a:schemeClr>
+        </a:solidFill>
         <a:gradFill rotWithShape="1">
           <a:gsLst>
             <a:gs pos="0">
               <a:schemeClr val="phClr">
-                <a:tint val="40000"/>
-                <a:satMod val="350000"/>
+                <a:tint val="93000"/>
+                <a:satMod val="150000"/>
+                <a:shade val="98000"/>
+                <a:lumMod val="102000"/>
               </a:schemeClr>
             </a:gs>
-            <a:gs pos="40000">
+            <a:gs pos="50000">
               <a:schemeClr val="phClr">
-                <a:tint val="45000"/>
-                <a:shade val="99000"/>
-                <a:satMod val="350000"/>
+                <a:tint val="98000"/>
+                <a:satMod val="130000"/>
+                <a:shade val="90000"/>
+                <a:lumMod val="103000"/>
               </a:schemeClr>
             </a:gs>
             <a:gs pos="100000">
               <a:schemeClr val="phClr">
-                <a:shade val="20000"/>
-                <a:satMod val="255000"/>
+                <a:shade val="63000"/>
+                <a:satMod val="120000"/>
               </a:schemeClr>
             </a:gs>
           </a:gsLst>
-          <a:path path="circle">
-            <a:fillToRect l="50000" t="-80000" r="50000" b="180000"/>
-          </a:path>
-        </a:gradFill>
-        <a:gradFill rotWithShape="1">
-          <a:gsLst>
-            <a:gs pos="0">
-              <a:schemeClr val="phClr">
-                <a:tint val="80000"/>
-                <a:satMod val="300000"/>
-              </a:schemeClr>
-            </a:gs>
-            <a:gs pos="100000">
-              <a:schemeClr val="phClr">
-                <a:shade val="30000"/>
-                <a:satMod val="200000"/>
-              </a:schemeClr>
-            </a:gs>
-          </a:gsLst>
-          <a:path path="circle">
-            <a:fillToRect l="50000" t="50000" r="50000" b="50000"/>
-          </a:path>
+          <a:lin ang="5400000" scaled="0"/>
         </a:gradFill>
       </a:bgFillStyleLst>
     </a:fmtScheme>
   </a:themeElements>
   <a:objectDefaults>
-    <a:spDef>
-      <a:spPr/>
-      <a:bodyPr/>
-      <a:lstStyle/>
-      <a:style>
-        <a:lnRef idx="1">
-          <a:schemeClr val="accent1"/>
-        </a:lnRef>
-        <a:fillRef idx="3">
-          <a:schemeClr val="accent1"/>
-        </a:fillRef>
-        <a:effectRef idx="2">
-          <a:schemeClr val="accent1"/>
-        </a:effectRef>
-        <a:fontRef idx="minor">
-          <a:schemeClr val="lt1"/>
-        </a:fontRef>
-      </a:style>
-    </a:spDef>
     <a:lnDef>
       <a:spPr/>
       <a:bodyPr/>
@@ -4698,5 +6629,325 @@
     </a:lnDef>
   </a:objectDefaults>
   <a:extraClrSchemeLst/>
+  <a:extLst>
+    <a:ext uri="{05A4C25C-085E-4340-85A3-A5531E510DB2}">
+      <thm15:themeFamily xmlns:thm15="http://schemas.microsoft.com/office/thememl/2012/main" name="Office Theme" id="{2E142A2C-CD16-42D6-873A-C26D2A0506FA}" vid="{1BDDFF52-6CD6-40A5-AB3C-68EB2F1E4D0A}"/>
+    </a:ext>
+  </a:extLst>
+</a:theme>
+</file>
+
+<file path=ppt/theme/theme2.xml><?xml version="1.0" encoding="utf-8"?>
+<a:theme xmlns:a="http://schemas.openxmlformats.org/drawingml/2006/main" name="Office Theme">
+  <a:themeElements>
+    <a:clrScheme name="Office">
+      <a:dk1>
+        <a:sysClr val="windowText" lastClr="000000"/>
+      </a:dk1>
+      <a:lt1>
+        <a:sysClr val="window" lastClr="FFFFFF"/>
+      </a:lt1>
+      <a:dk2>
+        <a:srgbClr val="0E2841"/>
+      </a:dk2>
+      <a:lt2>
+        <a:srgbClr val="E8E8E8"/>
+      </a:lt2>
+      <a:accent1>
+        <a:srgbClr val="156082"/>
+      </a:accent1>
+      <a:accent2>
+        <a:srgbClr val="E97132"/>
+      </a:accent2>
+      <a:accent3>
+        <a:srgbClr val="196B24"/>
+      </a:accent3>
+      <a:accent4>
+        <a:srgbClr val="0F9ED5"/>
+      </a:accent4>
+      <a:accent5>
+        <a:srgbClr val="A02B93"/>
+      </a:accent5>
+      <a:accent6>
+        <a:srgbClr val="4EA72E"/>
+      </a:accent6>
+      <a:hlink>
+        <a:srgbClr val="467886"/>
+      </a:hlink>
+      <a:folHlink>
+        <a:srgbClr val="96607D"/>
+      </a:folHlink>
+    </a:clrScheme>
+    <a:fontScheme name="Office">
+      <a:majorFont>
+        <a:latin typeface="Aptos Display" panose="02110004020202020204"/>
+        <a:ea typeface=""/>
+        <a:cs typeface=""/>
+        <a:font script="Jpan" typeface="游ゴシック Light"/>
+        <a:font script="Hang" typeface="맑은 고딕"/>
+        <a:font script="Hans" typeface="等线 Light"/>
+        <a:font script="Hant" typeface="新細明體"/>
+        <a:font script="Arab" typeface="Times New Roman"/>
+        <a:font script="Hebr" typeface="Times New Roman"/>
+        <a:font script="Thai" typeface="Angsana New"/>
+        <a:font script="Ethi" typeface="Nyala"/>
+        <a:font script="Beng" typeface="Vrinda"/>
+        <a:font script="Gujr" typeface="Shruti"/>
+        <a:font script="Khmr" typeface="MoolBoran"/>
+        <a:font script="Knda" typeface="Tunga"/>
+        <a:font script="Guru" typeface="Raavi"/>
+        <a:font script="Cans" typeface="Euphemia"/>
+        <a:font script="Cher" typeface="Plantagenet Cherokee"/>
+        <a:font script="Yiii" typeface="Microsoft Yi Baiti"/>
+        <a:font script="Tibt" typeface="Microsoft Himalaya"/>
+        <a:font script="Thaa" typeface="MV Boli"/>
+        <a:font script="Deva" typeface="Mangal"/>
+        <a:font script="Telu" typeface="Gautami"/>
+        <a:font script="Taml" typeface="Latha"/>
+        <a:font script="Syrc" typeface="Estrangelo Edessa"/>
+        <a:font script="Orya" typeface="Kalinga"/>
+        <a:font script="Mlym" typeface="Kartika"/>
+        <a:font script="Laoo" typeface="DokChampa"/>
+        <a:font script="Sinh" typeface="Iskoola Pota"/>
+        <a:font script="Mong" typeface="Mongolian Baiti"/>
+        <a:font script="Viet" typeface="Times New Roman"/>
+        <a:font script="Uigh" typeface="Microsoft Uighur"/>
+        <a:font script="Geor" typeface="Sylfaen"/>
+        <a:font script="Armn" typeface="Arial"/>
+        <a:font script="Bugi" typeface="Leelawadee UI"/>
+        <a:font script="Bopo" typeface="Microsoft JhengHei"/>
+        <a:font script="Java" typeface="Javanese Text"/>
+        <a:font script="Lisu" typeface="Segoe UI"/>
+        <a:font script="Mymr" typeface="Myanmar Text"/>
+        <a:font script="Nkoo" typeface="Ebrima"/>
+        <a:font script="Olck" typeface="Nirmala UI"/>
+        <a:font script="Osma" typeface="Ebrima"/>
+        <a:font script="Phag" typeface="Phagspa"/>
+        <a:font script="Syrn" typeface="Estrangelo Edessa"/>
+        <a:font script="Syrj" typeface="Estrangelo Edessa"/>
+        <a:font script="Syre" typeface="Estrangelo Edessa"/>
+        <a:font script="Sora" typeface="Nirmala UI"/>
+        <a:font script="Tale" typeface="Microsoft Tai Le"/>
+        <a:font script="Talu" typeface="Microsoft New Tai Lue"/>
+        <a:font script="Tfng" typeface="Ebrima"/>
+      </a:majorFont>
+      <a:minorFont>
+        <a:latin typeface="Aptos" panose="02110004020202020204"/>
+        <a:ea typeface=""/>
+        <a:cs typeface=""/>
+        <a:font script="Jpan" typeface="游ゴシック"/>
+        <a:font script="Hang" typeface="맑은 고딕"/>
+        <a:font script="Hans" typeface="等线"/>
+        <a:font script="Hant" typeface="新細明體"/>
+        <a:font script="Arab" typeface="Arial"/>
+        <a:font script="Hebr" typeface="Arial"/>
+        <a:font script="Thai" typeface="Cordia New"/>
+        <a:font script="Ethi" typeface="Nyala"/>
+        <a:font script="Beng" typeface="Vrinda"/>
+        <a:font script="Gujr" typeface="Shruti"/>
+        <a:font script="Khmr" typeface="DaunPenh"/>
+        <a:font script="Knda" typeface="Tunga"/>
+        <a:font script="Guru" typeface="Raavi"/>
+        <a:font script="Cans" typeface="Euphemia"/>
+        <a:font script="Cher" typeface="Plantagenet Cherokee"/>
+        <a:font script="Yiii" typeface="Microsoft Yi Baiti"/>
+        <a:font script="Tibt" typeface="Microsoft Himalaya"/>
+        <a:font script="Thaa" typeface="MV Boli"/>
+        <a:font script="Deva" typeface="Mangal"/>
+        <a:font script="Telu" typeface="Gautami"/>
+        <a:font script="Taml" typeface="Latha"/>
+        <a:font script="Syrc" typeface="Estrangelo Edessa"/>
+        <a:font script="Orya" typeface="Kalinga"/>
+        <a:font script="Mlym" typeface="Kartika"/>
+        <a:font script="Laoo" typeface="DokChampa"/>
+        <a:font script="Sinh" typeface="Iskoola Pota"/>
+        <a:font script="Mong" typeface="Mongolian Baiti"/>
+        <a:font script="Viet" typeface="Arial"/>
+        <a:font script="Uigh" typeface="Microsoft Uighur"/>
+        <a:font script="Geor" typeface="Sylfaen"/>
+        <a:font script="Armn" typeface="Arial"/>
+        <a:font script="Bugi" typeface="Leelawadee UI"/>
+        <a:font script="Bopo" typeface="Microsoft JhengHei"/>
+        <a:font script="Java" typeface="Javanese Text"/>
+        <a:font script="Lisu" typeface="Segoe UI"/>
+        <a:font script="Mymr" typeface="Myanmar Text"/>
+        <a:font script="Nkoo" typeface="Ebrima"/>
+        <a:font script="Olck" typeface="Nirmala UI"/>
+        <a:font script="Osma" typeface="Ebrima"/>
+        <a:font script="Phag" typeface="Phagspa"/>
+        <a:font script="Syrn" typeface="Estrangelo Edessa"/>
+        <a:font script="Syrj" typeface="Estrangelo Edessa"/>
+        <a:font script="Syre" typeface="Estrangelo Edessa"/>
+        <a:font script="Sora" typeface="Nirmala UI"/>
+        <a:font script="Tale" typeface="Microsoft Tai Le"/>
+        <a:font script="Talu" typeface="Microsoft New Tai Lue"/>
+        <a:font script="Tfng" typeface="Ebrima"/>
+      </a:minorFont>
+    </a:fontScheme>
+    <a:fmtScheme name="Office">
+      <a:fillStyleLst>
+        <a:solidFill>
+          <a:schemeClr val="phClr"/>
+        </a:solidFill>
+        <a:gradFill rotWithShape="1">
+          <a:gsLst>
+            <a:gs pos="0">
+              <a:schemeClr val="phClr">
+                <a:lumMod val="110000"/>
+                <a:satMod val="105000"/>
+                <a:tint val="67000"/>
+              </a:schemeClr>
+            </a:gs>
+            <a:gs pos="50000">
+              <a:schemeClr val="phClr">
+                <a:lumMod val="105000"/>
+                <a:satMod val="103000"/>
+                <a:tint val="73000"/>
+              </a:schemeClr>
+            </a:gs>
+            <a:gs pos="100000">
+              <a:schemeClr val="phClr">
+                <a:lumMod val="105000"/>
+                <a:satMod val="109000"/>
+                <a:tint val="81000"/>
+              </a:schemeClr>
+            </a:gs>
+          </a:gsLst>
+          <a:lin ang="5400000" scaled="0"/>
+        </a:gradFill>
+        <a:gradFill rotWithShape="1">
+          <a:gsLst>
+            <a:gs pos="0">
+              <a:schemeClr val="phClr">
+                <a:satMod val="103000"/>
+                <a:lumMod val="102000"/>
+                <a:tint val="94000"/>
+              </a:schemeClr>
+            </a:gs>
+            <a:gs pos="50000">
+              <a:schemeClr val="phClr">
+                <a:satMod val="110000"/>
+                <a:lumMod val="100000"/>
+                <a:shade val="100000"/>
+              </a:schemeClr>
+            </a:gs>
+            <a:gs pos="100000">
+              <a:schemeClr val="phClr">
+                <a:lumMod val="99000"/>
+                <a:satMod val="120000"/>
+                <a:shade val="78000"/>
+              </a:schemeClr>
+            </a:gs>
+          </a:gsLst>
+          <a:lin ang="5400000" scaled="0"/>
+        </a:gradFill>
+      </a:fillStyleLst>
+      <a:lnStyleLst>
+        <a:ln w="12700" cap="flat" cmpd="sng" algn="ctr">
+          <a:solidFill>
+            <a:schemeClr val="phClr"/>
+          </a:solidFill>
+          <a:prstDash val="solid"/>
+          <a:miter lim="800000"/>
+        </a:ln>
+        <a:ln w="19050" cap="flat" cmpd="sng" algn="ctr">
+          <a:solidFill>
+            <a:schemeClr val="phClr"/>
+          </a:solidFill>
+          <a:prstDash val="solid"/>
+          <a:miter lim="800000"/>
+        </a:ln>
+        <a:ln w="25400" cap="flat" cmpd="sng" algn="ctr">
+          <a:solidFill>
+            <a:schemeClr val="phClr"/>
+          </a:solidFill>
+          <a:prstDash val="solid"/>
+          <a:miter lim="800000"/>
+        </a:ln>
+      </a:lnStyleLst>
+      <a:effectStyleLst>
+        <a:effectStyle>
+          <a:effectLst/>
+        </a:effectStyle>
+        <a:effectStyle>
+          <a:effectLst/>
+        </a:effectStyle>
+        <a:effectStyle>
+          <a:effectLst>
+            <a:outerShdw blurRad="57150" dist="19050" dir="5400000" algn="ctr" rotWithShape="0">
+              <a:srgbClr val="000000">
+                <a:alpha val="63000"/>
+              </a:srgbClr>
+            </a:outerShdw>
+          </a:effectLst>
+        </a:effectStyle>
+      </a:effectStyleLst>
+      <a:bgFillStyleLst>
+        <a:solidFill>
+          <a:schemeClr val="phClr"/>
+        </a:solidFill>
+        <a:solidFill>
+          <a:schemeClr val="phClr">
+            <a:tint val="95000"/>
+            <a:satMod val="170000"/>
+          </a:schemeClr>
+        </a:solidFill>
+        <a:gradFill rotWithShape="1">
+          <a:gsLst>
+            <a:gs pos="0">
+              <a:schemeClr val="phClr">
+                <a:tint val="93000"/>
+                <a:satMod val="150000"/>
+                <a:shade val="98000"/>
+                <a:lumMod val="102000"/>
+              </a:schemeClr>
+            </a:gs>
+            <a:gs pos="50000">
+              <a:schemeClr val="phClr">
+                <a:tint val="98000"/>
+                <a:satMod val="130000"/>
+                <a:shade val="90000"/>
+                <a:lumMod val="103000"/>
+              </a:schemeClr>
+            </a:gs>
+            <a:gs pos="100000">
+              <a:schemeClr val="phClr">
+                <a:shade val="63000"/>
+                <a:satMod val="120000"/>
+              </a:schemeClr>
+            </a:gs>
+          </a:gsLst>
+          <a:lin ang="5400000" scaled="0"/>
+        </a:gradFill>
+      </a:bgFillStyleLst>
+    </a:fmtScheme>
+  </a:themeElements>
+  <a:objectDefaults>
+    <a:lnDef>
+      <a:spPr/>
+      <a:bodyPr/>
+      <a:lstStyle/>
+      <a:style>
+        <a:lnRef idx="2">
+          <a:schemeClr val="accent1"/>
+        </a:lnRef>
+        <a:fillRef idx="0">
+          <a:schemeClr val="accent1"/>
+        </a:fillRef>
+        <a:effectRef idx="1">
+          <a:schemeClr val="accent1"/>
+        </a:effectRef>
+        <a:fontRef idx="minor">
+          <a:schemeClr val="tx1"/>
+        </a:fontRef>
+      </a:style>
+    </a:lnDef>
+  </a:objectDefaults>
+  <a:extraClrSchemeLst/>
+  <a:extLst>
+    <a:ext uri="{05A4C25C-085E-4340-85A3-A5531E510DB2}">
+      <thm15:themeFamily xmlns:thm15="http://schemas.microsoft.com/office/thememl/2012/main" name="Office Theme" id="{2E142A2C-CD16-42D6-873A-C26D2A0506FA}" vid="{1BDDFF52-6CD6-40A5-AB3C-68EB2F1E4D0A}"/>
+    </a:ext>
+  </a:extLst>
 </a:theme>
 </file>